--- a/content/decks/media-studies/media-studies-s1-lesson-10-narrative-barthes-and-the-blog-audit.pptx
+++ b/content/decks/media-studies/media-studies-s1-lesson-10-narrative-barthes-and-the-blog-audit.pptx
@@ -1217,7 +1217,7 @@
           <a:p>
             <a:r>
               <a:rPr lang="en-US" dirty="0"/>
-              <a:t>D1: one TV cold open screened twice. First pass, list every question the text plants; second, every promise it makes.</a:t>
+              <a:t>D1: one TV cold open screened twice. First pass, list every question the text plants; second, every promise it makes. The TNS worked table for D1 is Lupin, so the frame and the table now match.</a:t>
             </a:r>
             <a:endParaRPr lang="en-US" dirty="0"/>
           </a:p>
@@ -6196,7 +6196,7 @@
       </p:grpSpPr>
       <p:pic>
         <p:nvPicPr>
-          <p:cNvPr id="2" name="Image 0" descr="/Users/dogan/Documents/Vaults/Courses/wiki/classes/media-studies/decks/_build/img/crops/friedrich-wanderer_a664.jpg">    </p:cNvPr>
+          <p:cNvPr id="2" name="Image 0" descr="/Users/dogan/Documents/Vaults/Courses/wiki/classes/media-studies/decks/_build/img/crops/lupin-unit_a664.jpg">    </p:cNvPr>
           <p:cNvPicPr>
             <a:picLocks noChangeAspect="1"/>
           </p:cNvPicPr>
@@ -6253,7 +6253,7 @@
                 <a:ea typeface="Arial" pitchFamily="34" charset="-122"/>
                 <a:cs typeface="Arial" pitchFamily="34" charset="-120"/>
               </a:rPr>
-              <a:t>Caspar David Friedrich, Wanderer Above the Sea of Fog, 1818</a:t>
+              <a:t>Lupin, Part 3 (Netflix, 2023). Unit still</a:t>
             </a:r>
             <a:endParaRPr lang="en-US" sz="950" dirty="0"/>
           </a:p>
@@ -6369,7 +6369,7 @@
         <p:spPr>
           <a:xfrm>
             <a:off x="822960" y="2286000"/>
-            <a:ext cx="6583680" cy="2743200"/>
+            <a:ext cx="6583680" cy="3108960"/>
           </a:xfrm>
           <a:prstGeom prst="rect">
             <a:avLst/>
@@ -6396,7 +6396,7 @@
                 <a:ea typeface="Georgia" pitchFamily="34" charset="-122"/>
                 <a:cs typeface="Georgia" pitchFamily="34" charset="-120"/>
               </a:rPr>
-              <a:t>A figure on a rock, his back turned. Who is he? What does he see? The picture plants a question and refuses to answer it, and you leaned in to find out. That lean is Barthes's enigma code working, and every opening is engineered to owe you answers.</a:t>
+              <a:t>White hair, tinted glasses, a borrowed name: the man at the gala is the series' hero in disguise, and every viewer at home is asking the same two questions. Will he be recognised? What is he here to take? The show plants questions and pays them off on a schedule, and that lean toward the answer is Barthes's enigma code working. Every opening is engineered to owe you answers, and your D1 table maps exactly what this frame owes.</a:t>
             </a:r>
             <a:endParaRPr lang="en-US" sz="1800" dirty="0"/>
           </a:p>

--- a/content/decks/media-studies/media-studies-s1-lesson-10-narrative-barthes-and-the-blog-audit.pptx
+++ b/content/decks/media-studies/media-studies-s1-lesson-10-narrative-barthes-and-the-blog-audit.pptx
@@ -17,9 +17,11 @@
     <p:sldId id="265" r:id="rId11"/>
     <p:sldId id="266" r:id="rId12"/>
     <p:sldId id="267" r:id="rId13"/>
+    <p:sldId id="268" r:id="rId14"/>
+    <p:sldId id="269" r:id="rId15"/>
   </p:sldIdLst>
   <p:notesMasterIdLst>
-    <p:notesMasterId r:id="rId14"/>
+    <p:notesMasterId r:id="rId16"/>
   </p:notesMasterIdLst>
   <p:sldSz cx="12192000" cy="6858000"/>
   <p:notesSz cx="6858000" cy="12192000"/>
@@ -601,7 +603,7 @@
           <a:p>
             <a:r>
               <a:rPr lang="en-US" dirty="0"/>
-              <a:t/>
+              <a:t>The audit is A2's marking preview. It sits with working days to spare so there is still time to act on what it finds. Kept deliberately: the systematic-study mood image for the audit ritual; the checklist itself is the next slide.</a:t>
             </a:r>
             <a:endParaRPr lang="en-US" dirty="0"/>
           </a:p>
@@ -689,7 +691,7 @@
           <a:p>
             <a:r>
               <a:rPr lang="en-US" dirty="0"/>
-              <a:t/>
+              <a:t>Protocol is describe, question, suggest. Enforce findings-as-actions in the first five minutes or the audit degrades into politeness. Teacher circulates to the thinnest blogs first.</a:t>
             </a:r>
             <a:endParaRPr lang="en-US" dirty="0"/>
           </a:p>
@@ -777,7 +779,7 @@
           <a:p>
             <a:r>
               <a:rPr lang="en-US" dirty="0"/>
-              <a:t/>
+              <a:t>A1 scripts also return Wednesday under the five-day rule: two minutes of silent reading, one written action each, the commonest gap named aloud from the pile.</a:t>
             </a:r>
             <a:endParaRPr lang="en-US" dirty="0"/>
           </a:p>
@@ -801,6 +803,182 @@
             <a:fld id="{F7021451-1387-4CA6-816F-3879F97B5CBC}" type="slidenum">
               <a:rPr lang="en-US"/>
               <a:t>12</a:t>
+            </a:fld>
+            <a:endParaRPr lang="en-US"/>
+          </a:p>
+        </p:txBody>
+      </p:sp>
+    </p:spTree>
+    <p:extLst>
+      <p:ext uri="{BB962C8B-B14F-4D97-AF65-F5344CB8AC3E}">
+        <p14:creationId xmlns:p14="http://schemas.microsoft.com/office/powerpoint/2010/main" val="1024086991"/>
+      </p:ext>
+    </p:extLst>
+  </p:cSld>
+  <p:clrMapOvr>
+    <a:masterClrMapping/>
+  </p:clrMapOvr>
+</p:notes>
+</file>
+
+<file path=ppt/notesSlides/notesSlide13.xml><?xml version="1.0" encoding="utf-8"?>
+<p:notes xmlns:a="http://schemas.openxmlformats.org/drawingml/2006/main" xmlns:r="http://schemas.openxmlformats.org/officeDocument/2006/relationships" xmlns:p="http://schemas.openxmlformats.org/presentationml/2006/main">
+  <p:cSld>
+    <p:spTree>
+      <p:nvGrpSpPr>
+        <p:cNvPr id="1" name=""/>
+        <p:cNvGrpSpPr/>
+        <p:nvPr/>
+      </p:nvGrpSpPr>
+      <p:grpSpPr>
+        <a:xfrm>
+          <a:off x="0" y="0"/>
+          <a:ext cx="0" cy="0"/>
+          <a:chOff x="0" y="0"/>
+          <a:chExt cx="0" cy="0"/>
+        </a:xfrm>
+      </p:grpSpPr>
+      <p:sp>
+        <p:nvSpPr>
+          <p:cNvPr id="2" name="Slide Image Placeholder 1"/>
+          <p:cNvSpPr>
+            <a:spLocks noGrp="1" noRot="1" noChangeAspect="1"/>
+          </p:cNvSpPr>
+          <p:nvPr>
+            <p:ph type="sldImg"/>
+          </p:nvPr>
+        </p:nvSpPr>
+        <p:spPr/>
+      </p:sp>
+      <p:sp>
+        <p:nvSpPr>
+          <p:cNvPr id="3" name="Notes Placeholder 2"/>
+          <p:cNvSpPr>
+            <a:spLocks noGrp="1"/>
+          </p:cNvSpPr>
+          <p:nvPr>
+            <p:ph type="body" idx="1"/>
+          </p:nvPr>
+        </p:nvSpPr>
+        <p:spPr/>
+        <p:txBody>
+          <a:bodyPr/>
+          <a:lstStyle/>
+          <a:p>
+            <a:r>
+              <a:rPr lang="en-US" dirty="0"/>
+              <a:t>D3: one contemporary trailer, cast mapped onto functions in pairs, then the harder question logged in writing: where did Propp fail to fit, and why is that interesting? Pairs trade logs to steal each other's best strain.</a:t>
+            </a:r>
+            <a:endParaRPr lang="en-US" dirty="0"/>
+          </a:p>
+        </p:txBody>
+      </p:sp>
+      <p:sp>
+        <p:nvSpPr>
+          <p:cNvPr id="4" name="Slide Number Placeholder 3"/>
+          <p:cNvSpPr>
+            <a:spLocks noGrp="1"/>
+          </p:cNvSpPr>
+          <p:nvPr>
+            <p:ph type="sldNum" sz="quarter" idx="10"/>
+          </p:nvPr>
+        </p:nvSpPr>
+        <p:spPr/>
+        <p:txBody>
+          <a:bodyPr/>
+          <a:lstStyle/>
+          <a:p>
+            <a:fld id="{F7021451-1387-4CA6-816F-3879F97B5CBC}" type="slidenum">
+              <a:rPr lang="en-US"/>
+              <a:t>13</a:t>
+            </a:fld>
+            <a:endParaRPr lang="en-US"/>
+          </a:p>
+        </p:txBody>
+      </p:sp>
+    </p:spTree>
+    <p:extLst>
+      <p:ext uri="{BB962C8B-B14F-4D97-AF65-F5344CB8AC3E}">
+        <p14:creationId xmlns:p14="http://schemas.microsoft.com/office/powerpoint/2010/main" val="1024086991"/>
+      </p:ext>
+    </p:extLst>
+  </p:cSld>
+  <p:clrMapOvr>
+    <a:masterClrMapping/>
+  </p:clrMapOvr>
+</p:notes>
+</file>
+
+<file path=ppt/notesSlides/notesSlide14.xml><?xml version="1.0" encoding="utf-8"?>
+<p:notes xmlns:a="http://schemas.openxmlformats.org/drawingml/2006/main" xmlns:r="http://schemas.openxmlformats.org/officeDocument/2006/relationships" xmlns:p="http://schemas.openxmlformats.org/presentationml/2006/main">
+  <p:cSld>
+    <p:spTree>
+      <p:nvGrpSpPr>
+        <p:cNvPr id="1" name=""/>
+        <p:cNvGrpSpPr/>
+        <p:nvPr/>
+      </p:nvGrpSpPr>
+      <p:grpSpPr>
+        <a:xfrm>
+          <a:off x="0" y="0"/>
+          <a:ext cx="0" cy="0"/>
+          <a:chOff x="0" y="0"/>
+          <a:chExt cx="0" cy="0"/>
+        </a:xfrm>
+      </p:grpSpPr>
+      <p:sp>
+        <p:nvSpPr>
+          <p:cNvPr id="2" name="Slide Image Placeholder 1"/>
+          <p:cNvSpPr>
+            <a:spLocks noGrp="1" noRot="1" noChangeAspect="1"/>
+          </p:cNvSpPr>
+          <p:nvPr>
+            <p:ph type="sldImg"/>
+          </p:nvPr>
+        </p:nvSpPr>
+        <p:spPr/>
+      </p:sp>
+      <p:sp>
+        <p:nvSpPr>
+          <p:cNvPr id="3" name="Notes Placeholder 2"/>
+          <p:cNvSpPr>
+            <a:spLocks noGrp="1"/>
+          </p:cNvSpPr>
+          <p:nvPr>
+            <p:ph type="body" idx="1"/>
+          </p:nvPr>
+        </p:nvSpPr>
+        <p:spPr/>
+        <p:txBody>
+          <a:bodyPr/>
+          <a:lstStyle/>
+          <a:p>
+            <a:r>
+              <a:rPr lang="en-US" dirty="0"/>
+              <a:t/>
+            </a:r>
+            <a:endParaRPr lang="en-US" dirty="0"/>
+          </a:p>
+        </p:txBody>
+      </p:sp>
+      <p:sp>
+        <p:nvSpPr>
+          <p:cNvPr id="4" name="Slide Number Placeholder 3"/>
+          <p:cNvSpPr>
+            <a:spLocks noGrp="1"/>
+          </p:cNvSpPr>
+          <p:nvPr>
+            <p:ph type="sldNum" sz="quarter" idx="10"/>
+          </p:nvPr>
+        </p:nvSpPr>
+        <p:spPr/>
+        <p:txBody>
+          <a:bodyPr/>
+          <a:lstStyle/>
+          <a:p>
+            <a:fld id="{F7021451-1387-4CA6-816F-3879F97B5CBC}" type="slidenum">
+              <a:rPr lang="en-US"/>
+              <a:t>14</a:t>
             </a:fld>
             <a:endParaRPr lang="en-US"/>
           </a:p>
@@ -953,7 +1131,7 @@
           <a:p>
             <a:r>
               <a:rPr lang="en-US" dirty="0"/>
-              <a:t/>
+              <a:t>Coursebook 3.2 teaches Todorov through Toy Story, so the frames match the reading students do. Run WS 3.2 as written: I-do on these frames, we-do on a second text, you-do on a story they know. The Christmas-window coda frame exists in img/ if you want the sequel joke: every new equilibrium is the next film's equilibrium.</a:t>
             </a:r>
             <a:endParaRPr lang="en-US" dirty="0"/>
           </a:p>
@@ -1129,7 +1307,7 @@
           <a:p>
             <a:r>
               <a:rPr lang="en-US" dirty="0"/>
-              <a:t/>
+              <a:t>Binary oppositions follow via the TNS's worked Lupin table on the next slides: narratives run on conflicts of value, not just people. The strain log starts here and is harvested at L17.</a:t>
             </a:r>
             <a:endParaRPr lang="en-US" dirty="0"/>
           </a:p>
@@ -1305,7 +1483,7 @@
           <a:p>
             <a:r>
               <a:rPr lang="en-US" dirty="0"/>
-              <a:t/>
+              <a:t>The left frame owes you an answer; the right frame owes you a consequence. One makes you lean in with a question, the other with anticipation.</a:t>
             </a:r>
             <a:endParaRPr lang="en-US" dirty="0"/>
           </a:p>
@@ -1481,7 +1659,7 @@
           <a:p>
             <a:r>
               <a:rPr lang="en-US" dirty="0"/>
-              <a:t>The audit is A2's marking preview. It sits with working days to spare so there is still time to act on what it finds.</a:t>
+              <a:t>Run from the TNS's worked Lupin binary-oppositions table; the pairs on the slide are the frame's own, as prompts. Levi-Strauss via coursebook 3.2.</a:t>
             </a:r>
             <a:endParaRPr lang="en-US" dirty="0"/>
           </a:p>
@@ -2106,13 +2284,6 @@
 <file path=ppt/slides/slide10.xml><?xml version="1.0" encoding="utf-8"?>
 <p:sld xmlns:a="http://schemas.openxmlformats.org/drawingml/2006/main" xmlns:r="http://schemas.openxmlformats.org/officeDocument/2006/relationships" xmlns:p="http://schemas.openxmlformats.org/presentationml/2006/main">
   <p:cSld name="Slide 10">
-    <p:bg>
-      <p:bgPr>
-        <a:solidFill>
-          <a:srgbClr val="FAF8F1"/>
-        </a:solidFill>
-      </p:bgPr>
-    </p:bg>
     <p:spTree>
       <p:nvGrpSpPr>
         <p:cNvPr id="1" name=""/>
@@ -2127,16 +2298,60 @@
           <a:chExt cx="0" cy="0"/>
         </a:xfrm>
       </p:grpSpPr>
-      <p:sp>
-        <p:nvSpPr>
-          <p:cNvPr id="2" name="Text 0"/>
-          <p:cNvSpPr/>
-          <p:nvPr/>
-        </p:nvSpPr>
-        <p:spPr>
-          <a:xfrm>
-            <a:off x="822960" y="457200"/>
-            <a:ext cx="6400800" cy="274320"/>
+      <p:pic>
+        <p:nvPicPr>
+          <p:cNvPr id="2" name="Image 0" descr="/Users/dogan/Documents/Vaults/Courses/wiki/classes/media-studies/decks/_build/img/crops/johnston-geography_a1777.jpg">    </p:cNvPr>
+          <p:cNvPicPr>
+            <a:picLocks noChangeAspect="1"/>
+          </p:cNvPicPr>
+          <p:nvPr/>
+        </p:nvPicPr>
+        <p:blipFill>
+          <a:blip r:embed="rId1"/>
+          <a:stretch>
+            <a:fillRect/>
+          </a:stretch>
+        </p:blipFill>
+        <p:spPr>
+          <a:xfrm>
+            <a:off x="0" y="0"/>
+            <a:ext cx="12188952" cy="6858000"/>
+          </a:xfrm>
+          <a:prstGeom prst="rect">
+            <a:avLst/>
+          </a:prstGeom>
+        </p:spPr>
+      </p:pic>
+      <p:sp>
+        <p:nvSpPr>
+          <p:cNvPr id="3" name="Shape 0"/>
+          <p:cNvSpPr/>
+          <p:nvPr/>
+        </p:nvSpPr>
+        <p:spPr>
+          <a:xfrm>
+            <a:off x="502920" y="502920"/>
+            <a:ext cx="5120640" cy="502920"/>
+          </a:xfrm>
+          <a:prstGeom prst="rect">
+            <a:avLst/>
+          </a:prstGeom>
+          <a:solidFill>
+            <a:srgbClr val="FAF8F1"/>
+          </a:solidFill>
+          <a:ln/>
+        </p:spPr>
+      </p:sp>
+      <p:sp>
+        <p:nvSpPr>
+          <p:cNvPr id="4" name="Text 1"/>
+          <p:cNvSpPr/>
+          <p:nvPr/>
+        </p:nvSpPr>
+        <p:spPr>
+          <a:xfrm>
+            <a:off x="704088" y="521208"/>
+            <a:ext cx="4846320" cy="274320"/>
           </a:xfrm>
           <a:prstGeom prst="rect">
             <a:avLst/>
@@ -2160,7 +2375,7 @@
                 <a:ea typeface="Arial" pitchFamily="34" charset="-122"/>
                 <a:cs typeface="Arial" pitchFamily="34" charset="-120"/>
               </a:rPr>
-              <a:t>CS9 · THE AUDIT</a:t>
+              <a:t>CS9 · THE BLOG AUDIT</a:t>
             </a:r>
             <a:endParaRPr lang="en-US" sz="1100" dirty="0"/>
           </a:p>
@@ -2168,871 +2383,40 @@
       </p:sp>
       <p:sp>
         <p:nvSpPr>
-          <p:cNvPr id="3" name="Text 1"/>
-          <p:cNvSpPr/>
-          <p:nvPr/>
-        </p:nvSpPr>
-        <p:spPr>
-          <a:xfrm>
-            <a:off x="6793992" y="457200"/>
-            <a:ext cx="4572000" cy="274320"/>
-          </a:xfrm>
-          <a:prstGeom prst="rect">
-            <a:avLst/>
-          </a:prstGeom>
-          <a:noFill/>
-          <a:ln/>
-        </p:spPr>
-        <p:txBody>
-          <a:bodyPr wrap="square" lIns="0" tIns="0" rIns="0" bIns="0" rtlCol="0" anchor="ctr"/>
-          <a:lstStyle/>
-          <a:p>
-            <a:pPr algn="r" indent="0" marL="0">
-              <a:buNone/>
-            </a:pPr>
-            <a:r>
-              <a:rPr lang="en-US" sz="1100" b="1" spc="250" kern="0" dirty="0">
-                <a:solidFill>
-                  <a:srgbClr val="7A7F72"/>
-                </a:solidFill>
-                <a:latin typeface="Arial" pitchFamily="34" charset="0"/>
-                <a:ea typeface="Arial" pitchFamily="34" charset="-122"/>
-                <a:cs typeface="Arial" pitchFamily="34" charset="-120"/>
-              </a:rPr>
-              <a:t>THE SAME CHECKLIST A2 IS MARKED WITH</a:t>
-            </a:r>
-            <a:endParaRPr lang="en-US" sz="1100" dirty="0"/>
-          </a:p>
-        </p:txBody>
-      </p:sp>
-      <p:sp>
-        <p:nvSpPr>
-          <p:cNvPr id="4" name="Shape 2"/>
-          <p:cNvSpPr/>
-          <p:nvPr/>
-        </p:nvSpPr>
-        <p:spPr>
-          <a:xfrm>
-            <a:off x="822960" y="786384"/>
-            <a:ext cx="10543032" cy="0"/>
+          <p:cNvPr id="5" name="Shape 2"/>
+          <p:cNvSpPr/>
+          <p:nvPr/>
+        </p:nvSpPr>
+        <p:spPr>
+          <a:xfrm>
+            <a:off x="457200" y="5230368"/>
+            <a:ext cx="8778240" cy="1243584"/>
+          </a:xfrm>
+          <a:prstGeom prst="rect">
+            <a:avLst/>
+          </a:prstGeom>
+          <a:solidFill>
+            <a:srgbClr val="FAF8F1"/>
+          </a:solidFill>
+          <a:ln/>
+        </p:spPr>
+      </p:sp>
+      <p:sp>
+        <p:nvSpPr>
+          <p:cNvPr id="6" name="Shape 3"/>
+          <p:cNvSpPr/>
+          <p:nvPr/>
+        </p:nvSpPr>
+        <p:spPr>
+          <a:xfrm>
+            <a:off x="676656" y="5468112"/>
+            <a:ext cx="731520" cy="0"/>
           </a:xfrm>
           <a:prstGeom prst="line">
             <a:avLst/>
           </a:prstGeom>
           <a:noFill/>
-          <a:ln w="9525">
-            <a:solidFill>
-              <a:srgbClr val="D9D4C4"/>
-            </a:solidFill>
-            <a:prstDash val="solid"/>
-          </a:ln>
-        </p:spPr>
-      </p:sp>
-      <p:sp>
-        <p:nvSpPr>
-          <p:cNvPr id="5" name="Text 3"/>
-          <p:cNvSpPr/>
-          <p:nvPr/>
-        </p:nvSpPr>
-        <p:spPr>
-          <a:xfrm>
-            <a:off x="822960" y="932688"/>
-            <a:ext cx="10543032" cy="640080"/>
-          </a:xfrm>
-          <a:prstGeom prst="rect">
-            <a:avLst/>
-          </a:prstGeom>
-          <a:noFill/>
-          <a:ln/>
-        </p:spPr>
-        <p:txBody>
-          <a:bodyPr wrap="square" lIns="0" tIns="0" rIns="0" bIns="0" rtlCol="0" anchor="ctr"/>
-          <a:lstStyle/>
-          <a:p>
-            <a:pPr indent="0" marL="0">
-              <a:buNone/>
-            </a:pPr>
-            <a:r>
-              <a:rPr lang="en-US" sz="3200" dirty="0">
-                <a:solidFill>
-                  <a:srgbClr val="24313F"/>
-                </a:solidFill>
-                <a:latin typeface="Georgia" pitchFamily="34" charset="0"/>
-                <a:ea typeface="Georgia" pitchFamily="34" charset="-122"/>
-                <a:cs typeface="Georgia" pitchFamily="34" charset="-120"/>
-              </a:rPr>
-              <a:t>Post by post, findings as actions</a:t>
-            </a:r>
-            <a:endParaRPr lang="en-US" sz="3200" dirty="0"/>
-          </a:p>
-        </p:txBody>
-      </p:sp>
-      <p:sp>
-        <p:nvSpPr>
-          <p:cNvPr id="6" name="Shape 4"/>
-          <p:cNvSpPr/>
-          <p:nvPr/>
-        </p:nvSpPr>
-        <p:spPr>
-          <a:xfrm>
-            <a:off x="822960" y="1783080"/>
-            <a:ext cx="2361438" cy="548640"/>
-          </a:xfrm>
-          <a:prstGeom prst="rect">
-            <a:avLst/>
-          </a:prstGeom>
-          <a:solidFill>
-            <a:srgbClr val="E8EFE7"/>
-          </a:solidFill>
-          <a:ln/>
-        </p:spPr>
-      </p:sp>
-      <p:sp>
-        <p:nvSpPr>
-          <p:cNvPr id="7" name="Text 5"/>
-          <p:cNvSpPr/>
-          <p:nvPr/>
-        </p:nvSpPr>
-        <p:spPr>
-          <a:xfrm>
-            <a:off x="987552" y="1783080"/>
-            <a:ext cx="2087118" cy="548640"/>
-          </a:xfrm>
-          <a:prstGeom prst="rect">
-            <a:avLst/>
-          </a:prstGeom>
-          <a:noFill/>
-          <a:ln/>
-        </p:spPr>
-        <p:txBody>
-          <a:bodyPr wrap="square" lIns="0" tIns="0" rIns="0" bIns="0" rtlCol="0" anchor="ctr"/>
-          <a:lstStyle/>
-          <a:p>
-            <a:pPr indent="0" marL="0">
-              <a:buNone/>
-            </a:pPr>
-            <a:r>
-              <a:rPr lang="en-US" sz="1400" dirty="0">
-                <a:solidFill>
-                  <a:srgbClr val="24313F"/>
-                </a:solidFill>
-                <a:latin typeface="Georgia" pitchFamily="34" charset="0"/>
-                <a:ea typeface="Georgia" pitchFamily="34" charset="-122"/>
-                <a:cs typeface="Georgia" pitchFamily="34" charset="-120"/>
-              </a:rPr>
-              <a:t>Brief and group</a:t>
-            </a:r>
-            <a:endParaRPr lang="en-US" sz="1400" dirty="0"/>
-          </a:p>
-        </p:txBody>
-      </p:sp>
-      <p:sp>
-        <p:nvSpPr>
-          <p:cNvPr id="8" name="Shape 6"/>
-          <p:cNvSpPr/>
-          <p:nvPr/>
-        </p:nvSpPr>
-        <p:spPr>
-          <a:xfrm>
-            <a:off x="3550158" y="1783080"/>
-            <a:ext cx="2361438" cy="548640"/>
-          </a:xfrm>
-          <a:prstGeom prst="rect">
-            <a:avLst/>
-          </a:prstGeom>
-          <a:solidFill>
-            <a:srgbClr val="E8EFE7"/>
-          </a:solidFill>
-          <a:ln/>
-        </p:spPr>
-      </p:sp>
-      <p:sp>
-        <p:nvSpPr>
-          <p:cNvPr id="9" name="Text 7"/>
-          <p:cNvSpPr/>
-          <p:nvPr/>
-        </p:nvSpPr>
-        <p:spPr>
-          <a:xfrm>
-            <a:off x="3714750" y="1783080"/>
-            <a:ext cx="2087118" cy="548640"/>
-          </a:xfrm>
-          <a:prstGeom prst="rect">
-            <a:avLst/>
-          </a:prstGeom>
-          <a:noFill/>
-          <a:ln/>
-        </p:spPr>
-        <p:txBody>
-          <a:bodyPr wrap="square" lIns="0" tIns="0" rIns="0" bIns="0" rtlCol="0" anchor="ctr"/>
-          <a:lstStyle/>
-          <a:p>
-            <a:pPr indent="0" marL="0">
-              <a:buNone/>
-            </a:pPr>
-            <a:r>
-              <a:rPr lang="en-US" sz="1400" dirty="0">
-                <a:solidFill>
-                  <a:srgbClr val="24313F"/>
-                </a:solidFill>
-                <a:latin typeface="Georgia" pitchFamily="34" charset="0"/>
-                <a:ea typeface="Georgia" pitchFamily="34" charset="-122"/>
-                <a:cs typeface="Georgia" pitchFamily="34" charset="-120"/>
-              </a:rPr>
-              <a:t>Research</a:t>
-            </a:r>
-            <a:endParaRPr lang="en-US" sz="1400" dirty="0"/>
-          </a:p>
-        </p:txBody>
-      </p:sp>
-      <p:sp>
-        <p:nvSpPr>
-          <p:cNvPr id="10" name="Shape 8"/>
-          <p:cNvSpPr/>
-          <p:nvPr/>
-        </p:nvSpPr>
-        <p:spPr>
-          <a:xfrm>
-            <a:off x="6277356" y="1783080"/>
-            <a:ext cx="2361438" cy="548640"/>
-          </a:xfrm>
-          <a:prstGeom prst="rect">
-            <a:avLst/>
-          </a:prstGeom>
-          <a:solidFill>
-            <a:srgbClr val="E8EFE7"/>
-          </a:solidFill>
-          <a:ln/>
-        </p:spPr>
-      </p:sp>
-      <p:sp>
-        <p:nvSpPr>
-          <p:cNvPr id="11" name="Text 9"/>
-          <p:cNvSpPr/>
-          <p:nvPr/>
-        </p:nvSpPr>
-        <p:spPr>
-          <a:xfrm>
-            <a:off x="6441948" y="1783080"/>
-            <a:ext cx="2087118" cy="548640"/>
-          </a:xfrm>
-          <a:prstGeom prst="rect">
-            <a:avLst/>
-          </a:prstGeom>
-          <a:noFill/>
-          <a:ln/>
-        </p:spPr>
-        <p:txBody>
-          <a:bodyPr wrap="square" lIns="0" tIns="0" rIns="0" bIns="0" rtlCol="0" anchor="ctr"/>
-          <a:lstStyle/>
-          <a:p>
-            <a:pPr indent="0" marL="0">
-              <a:buNone/>
-            </a:pPr>
-            <a:r>
-              <a:rPr lang="en-US" sz="1400" dirty="0">
-                <a:solidFill>
-                  <a:srgbClr val="24313F"/>
-                </a:solidFill>
-                <a:latin typeface="Georgia" pitchFamily="34" charset="0"/>
-                <a:ea typeface="Georgia" pitchFamily="34" charset="-122"/>
-                <a:cs typeface="Georgia" pitchFamily="34" charset="-120"/>
-              </a:rPr>
-              <a:t>Audience profile</a:t>
-            </a:r>
-            <a:endParaRPr lang="en-US" sz="1400" dirty="0"/>
-          </a:p>
-        </p:txBody>
-      </p:sp>
-      <p:sp>
-        <p:nvSpPr>
-          <p:cNvPr id="12" name="Shape 10"/>
-          <p:cNvSpPr/>
-          <p:nvPr/>
-        </p:nvSpPr>
-        <p:spPr>
-          <a:xfrm>
-            <a:off x="9004554" y="1783080"/>
-            <a:ext cx="2361438" cy="548640"/>
-          </a:xfrm>
-          <a:prstGeom prst="rect">
-            <a:avLst/>
-          </a:prstGeom>
-          <a:solidFill>
-            <a:srgbClr val="E8EFE7"/>
-          </a:solidFill>
-          <a:ln/>
-        </p:spPr>
-      </p:sp>
-      <p:sp>
-        <p:nvSpPr>
-          <p:cNvPr id="13" name="Text 11"/>
-          <p:cNvSpPr/>
-          <p:nvPr/>
-        </p:nvSpPr>
-        <p:spPr>
-          <a:xfrm>
-            <a:off x="9169146" y="1783080"/>
-            <a:ext cx="2087118" cy="548640"/>
-          </a:xfrm>
-          <a:prstGeom prst="rect">
-            <a:avLst/>
-          </a:prstGeom>
-          <a:noFill/>
-          <a:ln/>
-        </p:spPr>
-        <p:txBody>
-          <a:bodyPr wrap="square" lIns="0" tIns="0" rIns="0" bIns="0" rtlCol="0" anchor="ctr"/>
-          <a:lstStyle/>
-          <a:p>
-            <a:pPr indent="0" marL="0">
-              <a:buNone/>
-            </a:pPr>
-            <a:r>
-              <a:rPr lang="en-US" sz="1400" dirty="0">
-                <a:solidFill>
-                  <a:srgbClr val="24313F"/>
-                </a:solidFill>
-                <a:latin typeface="Georgia" pitchFamily="34" charset="0"/>
-                <a:ea typeface="Georgia" pitchFamily="34" charset="-122"/>
-                <a:cs typeface="Georgia" pitchFamily="34" charset="-120"/>
-              </a:rPr>
-              <a:t>Pitch</a:t>
-            </a:r>
-            <a:endParaRPr lang="en-US" sz="1400" dirty="0"/>
-          </a:p>
-        </p:txBody>
-      </p:sp>
-      <p:sp>
-        <p:nvSpPr>
-          <p:cNvPr id="14" name="Shape 12"/>
-          <p:cNvSpPr/>
-          <p:nvPr/>
-        </p:nvSpPr>
-        <p:spPr>
-          <a:xfrm>
-            <a:off x="822960" y="2496312"/>
-            <a:ext cx="2361438" cy="548640"/>
-          </a:xfrm>
-          <a:prstGeom prst="rect">
-            <a:avLst/>
-          </a:prstGeom>
-          <a:solidFill>
-            <a:srgbClr val="E8EFE7"/>
-          </a:solidFill>
-          <a:ln/>
-        </p:spPr>
-      </p:sp>
-      <p:sp>
-        <p:nvSpPr>
-          <p:cNvPr id="15" name="Text 13"/>
-          <p:cNvSpPr/>
-          <p:nvPr/>
-        </p:nvSpPr>
-        <p:spPr>
-          <a:xfrm>
-            <a:off x="987552" y="2496312"/>
-            <a:ext cx="2087118" cy="548640"/>
-          </a:xfrm>
-          <a:prstGeom prst="rect">
-            <a:avLst/>
-          </a:prstGeom>
-          <a:noFill/>
-          <a:ln/>
-        </p:spPr>
-        <p:txBody>
-          <a:bodyPr wrap="square" lIns="0" tIns="0" rIns="0" bIns="0" rtlCol="0" anchor="ctr"/>
-          <a:lstStyle/>
-          <a:p>
-            <a:pPr indent="0" marL="0">
-              <a:buNone/>
-            </a:pPr>
-            <a:r>
-              <a:rPr lang="en-US" sz="1400" dirty="0">
-                <a:solidFill>
-                  <a:srgbClr val="24313F"/>
-                </a:solidFill>
-                <a:latin typeface="Georgia" pitchFamily="34" charset="0"/>
-                <a:ea typeface="Georgia" pitchFamily="34" charset="-122"/>
-                <a:cs typeface="Georgia" pitchFamily="34" charset="-120"/>
-              </a:rPr>
-              <a:t>Planning suite</a:t>
-            </a:r>
-            <a:endParaRPr lang="en-US" sz="1400" dirty="0"/>
-          </a:p>
-        </p:txBody>
-      </p:sp>
-      <p:sp>
-        <p:nvSpPr>
-          <p:cNvPr id="16" name="Shape 14"/>
-          <p:cNvSpPr/>
-          <p:nvPr/>
-        </p:nvSpPr>
-        <p:spPr>
-          <a:xfrm>
-            <a:off x="3550158" y="2496312"/>
-            <a:ext cx="2361438" cy="548640"/>
-          </a:xfrm>
-          <a:prstGeom prst="rect">
-            <a:avLst/>
-          </a:prstGeom>
-          <a:solidFill>
-            <a:srgbClr val="E8EFE7"/>
-          </a:solidFill>
-          <a:ln/>
-        </p:spPr>
-      </p:sp>
-      <p:sp>
-        <p:nvSpPr>
-          <p:cNvPr id="17" name="Text 15"/>
-          <p:cNvSpPr/>
-          <p:nvPr/>
-        </p:nvSpPr>
-        <p:spPr>
-          <a:xfrm>
-            <a:off x="3714750" y="2496312"/>
-            <a:ext cx="2087118" cy="548640"/>
-          </a:xfrm>
-          <a:prstGeom prst="rect">
-            <a:avLst/>
-          </a:prstGeom>
-          <a:noFill/>
-          <a:ln/>
-        </p:spPr>
-        <p:txBody>
-          <a:bodyPr wrap="square" lIns="0" tIns="0" rIns="0" bIns="0" rtlCol="0" anchor="ctr"/>
-          <a:lstStyle/>
-          <a:p>
-            <a:pPr indent="0" marL="0">
-              <a:buNone/>
-            </a:pPr>
-            <a:r>
-              <a:rPr lang="en-US" sz="1400" dirty="0">
-                <a:solidFill>
-                  <a:srgbClr val="24313F"/>
-                </a:solidFill>
-                <a:latin typeface="Georgia" pitchFamily="34" charset="0"/>
-                <a:ea typeface="Georgia" pitchFamily="34" charset="-122"/>
-                <a:cs typeface="Georgia" pitchFamily="34" charset="-120"/>
-              </a:rPr>
-              <a:t>CS3 camera build</a:t>
-            </a:r>
-            <a:endParaRPr lang="en-US" sz="1400" dirty="0"/>
-          </a:p>
-        </p:txBody>
-      </p:sp>
-      <p:sp>
-        <p:nvSpPr>
-          <p:cNvPr id="18" name="Shape 16"/>
-          <p:cNvSpPr/>
-          <p:nvPr/>
-        </p:nvSpPr>
-        <p:spPr>
-          <a:xfrm>
-            <a:off x="6277356" y="2496312"/>
-            <a:ext cx="2361438" cy="548640"/>
-          </a:xfrm>
-          <a:prstGeom prst="rect">
-            <a:avLst/>
-          </a:prstGeom>
-          <a:solidFill>
-            <a:srgbClr val="E8EFE7"/>
-          </a:solidFill>
-          <a:ln/>
-        </p:spPr>
-      </p:sp>
-      <p:sp>
-        <p:nvSpPr>
-          <p:cNvPr id="19" name="Text 17"/>
-          <p:cNvSpPr/>
-          <p:nvPr/>
-        </p:nvSpPr>
-        <p:spPr>
-          <a:xfrm>
-            <a:off x="6441948" y="2496312"/>
-            <a:ext cx="2087118" cy="548640"/>
-          </a:xfrm>
-          <a:prstGeom prst="rect">
-            <a:avLst/>
-          </a:prstGeom>
-          <a:noFill/>
-          <a:ln/>
-        </p:spPr>
-        <p:txBody>
-          <a:bodyPr wrap="square" lIns="0" tIns="0" rIns="0" bIns="0" rtlCol="0" anchor="ctr"/>
-          <a:lstStyle/>
-          <a:p>
-            <a:pPr indent="0" marL="0">
-              <a:buNone/>
-            </a:pPr>
-            <a:r>
-              <a:rPr lang="en-US" sz="1400" dirty="0">
-                <a:solidFill>
-                  <a:srgbClr val="24313F"/>
-                </a:solidFill>
-                <a:latin typeface="Georgia" pitchFamily="34" charset="0"/>
-                <a:ea typeface="Georgia" pitchFamily="34" charset="-122"/>
-                <a:cs typeface="Georgia" pitchFamily="34" charset="-120"/>
-              </a:rPr>
-              <a:t>CS4 soundscape</a:t>
-            </a:r>
-            <a:endParaRPr lang="en-US" sz="1400" dirty="0"/>
-          </a:p>
-        </p:txBody>
-      </p:sp>
-      <p:sp>
-        <p:nvSpPr>
-          <p:cNvPr id="20" name="Shape 18"/>
-          <p:cNvSpPr/>
-          <p:nvPr/>
-        </p:nvSpPr>
-        <p:spPr>
-          <a:xfrm>
-            <a:off x="9004554" y="2496312"/>
-            <a:ext cx="2361438" cy="548640"/>
-          </a:xfrm>
-          <a:prstGeom prst="rect">
-            <a:avLst/>
-          </a:prstGeom>
-          <a:solidFill>
-            <a:srgbClr val="E8EFE7"/>
-          </a:solidFill>
-          <a:ln/>
-        </p:spPr>
-      </p:sp>
-      <p:sp>
-        <p:nvSpPr>
-          <p:cNvPr id="21" name="Text 19"/>
-          <p:cNvSpPr/>
-          <p:nvPr/>
-        </p:nvSpPr>
-        <p:spPr>
-          <a:xfrm>
-            <a:off x="9169146" y="2496312"/>
-            <a:ext cx="2087118" cy="548640"/>
-          </a:xfrm>
-          <a:prstGeom prst="rect">
-            <a:avLst/>
-          </a:prstGeom>
-          <a:noFill/>
-          <a:ln/>
-        </p:spPr>
-        <p:txBody>
-          <a:bodyPr wrap="square" lIns="0" tIns="0" rIns="0" bIns="0" rtlCol="0" anchor="ctr"/>
-          <a:lstStyle/>
-          <a:p>
-            <a:pPr indent="0" marL="0">
-              <a:buNone/>
-            </a:pPr>
-            <a:r>
-              <a:rPr lang="en-US" sz="1400" dirty="0">
-                <a:solidFill>
-                  <a:srgbClr val="24313F"/>
-                </a:solidFill>
-                <a:latin typeface="Georgia" pitchFamily="34" charset="0"/>
-                <a:ea typeface="Georgia" pitchFamily="34" charset="-122"/>
-                <a:cs typeface="Georgia" pitchFamily="34" charset="-120"/>
-              </a:rPr>
-              <a:t>CS5 design board</a:t>
-            </a:r>
-            <a:endParaRPr lang="en-US" sz="1400" dirty="0"/>
-          </a:p>
-        </p:txBody>
-      </p:sp>
-      <p:sp>
-        <p:nvSpPr>
-          <p:cNvPr id="22" name="Shape 20"/>
-          <p:cNvSpPr/>
-          <p:nvPr/>
-        </p:nvSpPr>
-        <p:spPr>
-          <a:xfrm>
-            <a:off x="822960" y="3209544"/>
-            <a:ext cx="2361438" cy="548640"/>
-          </a:xfrm>
-          <a:prstGeom prst="rect">
-            <a:avLst/>
-          </a:prstGeom>
-          <a:solidFill>
-            <a:srgbClr val="E8EFE7"/>
-          </a:solidFill>
-          <a:ln/>
-        </p:spPr>
-      </p:sp>
-      <p:sp>
-        <p:nvSpPr>
-          <p:cNvPr id="23" name="Text 21"/>
-          <p:cNvSpPr/>
-          <p:nvPr/>
-        </p:nvSpPr>
-        <p:spPr>
-          <a:xfrm>
-            <a:off x="987552" y="3209544"/>
-            <a:ext cx="2087118" cy="548640"/>
-          </a:xfrm>
-          <a:prstGeom prst="rect">
-            <a:avLst/>
-          </a:prstGeom>
-          <a:noFill/>
-          <a:ln/>
-        </p:spPr>
-        <p:txBody>
-          <a:bodyPr wrap="square" lIns="0" tIns="0" rIns="0" bIns="0" rtlCol="0" anchor="ctr"/>
-          <a:lstStyle/>
-          <a:p>
-            <a:pPr indent="0" marL="0">
-              <a:buNone/>
-            </a:pPr>
-            <a:r>
-              <a:rPr lang="en-US" sz="1400" dirty="0">
-                <a:solidFill>
-                  <a:srgbClr val="24313F"/>
-                </a:solidFill>
-                <a:latin typeface="Georgia" pitchFamily="34" charset="0"/>
-                <a:ea typeface="Georgia" pitchFamily="34" charset="-122"/>
-                <a:cs typeface="Georgia" pitchFamily="34" charset="-120"/>
-              </a:rPr>
-              <a:t>CS6 edit, both versions</a:t>
-            </a:r>
-            <a:endParaRPr lang="en-US" sz="1400" dirty="0"/>
-          </a:p>
-        </p:txBody>
-      </p:sp>
-      <p:sp>
-        <p:nvSpPr>
-          <p:cNvPr id="24" name="Shape 22"/>
-          <p:cNvSpPr/>
-          <p:nvPr/>
-        </p:nvSpPr>
-        <p:spPr>
-          <a:xfrm>
-            <a:off x="3550158" y="3209544"/>
-            <a:ext cx="2361438" cy="548640"/>
-          </a:xfrm>
-          <a:prstGeom prst="rect">
-            <a:avLst/>
-          </a:prstGeom>
-          <a:solidFill>
-            <a:srgbClr val="E8EFE7"/>
-          </a:solidFill>
-          <a:ln/>
-        </p:spPr>
-      </p:sp>
-      <p:sp>
-        <p:nvSpPr>
-          <p:cNvPr id="25" name="Text 23"/>
-          <p:cNvSpPr/>
-          <p:nvPr/>
-        </p:nvSpPr>
-        <p:spPr>
-          <a:xfrm>
-            <a:off x="3714750" y="3209544"/>
-            <a:ext cx="2087118" cy="548640"/>
-          </a:xfrm>
-          <a:prstGeom prst="rect">
-            <a:avLst/>
-          </a:prstGeom>
-          <a:noFill/>
-          <a:ln/>
-        </p:spPr>
-        <p:txBody>
-          <a:bodyPr wrap="square" lIns="0" tIns="0" rIns="0" bIns="0" rtlCol="0" anchor="ctr"/>
-          <a:lstStyle/>
-          <a:p>
-            <a:pPr indent="0" marL="0">
-              <a:buNone/>
-            </a:pPr>
-            <a:r>
-              <a:rPr lang="en-US" sz="1400" dirty="0">
-                <a:solidFill>
-                  <a:srgbClr val="24313F"/>
-                </a:solidFill>
-                <a:latin typeface="Georgia" pitchFamily="34" charset="0"/>
-                <a:ea typeface="Georgia" pitchFamily="34" charset="-122"/>
-                <a:cs typeface="Georgia" pitchFamily="34" charset="-120"/>
-              </a:rPr>
-              <a:t>Genre contract</a:t>
-            </a:r>
-            <a:endParaRPr lang="en-US" sz="1400" dirty="0"/>
-          </a:p>
-        </p:txBody>
-      </p:sp>
-      <p:sp>
-        <p:nvSpPr>
-          <p:cNvPr id="26" name="Shape 24"/>
-          <p:cNvSpPr/>
-          <p:nvPr/>
-        </p:nvSpPr>
-        <p:spPr>
-          <a:xfrm>
-            <a:off x="6277356" y="3209544"/>
-            <a:ext cx="2361438" cy="548640"/>
-          </a:xfrm>
-          <a:prstGeom prst="rect">
-            <a:avLst/>
-          </a:prstGeom>
-          <a:solidFill>
-            <a:srgbClr val="E8EFE7"/>
-          </a:solidFill>
-          <a:ln/>
-        </p:spPr>
-      </p:sp>
-      <p:sp>
-        <p:nvSpPr>
-          <p:cNvPr id="27" name="Text 25"/>
-          <p:cNvSpPr/>
-          <p:nvPr/>
-        </p:nvSpPr>
-        <p:spPr>
-          <a:xfrm>
-            <a:off x="6441948" y="3209544"/>
-            <a:ext cx="2087118" cy="548640"/>
-          </a:xfrm>
-          <a:prstGeom prst="rect">
-            <a:avLst/>
-          </a:prstGeom>
-          <a:noFill/>
-          <a:ln/>
-        </p:spPr>
-        <p:txBody>
-          <a:bodyPr wrap="square" lIns="0" tIns="0" rIns="0" bIns="0" rtlCol="0" anchor="ctr"/>
-          <a:lstStyle/>
-          <a:p>
-            <a:pPr indent="0" marL="0">
-              <a:buNone/>
-            </a:pPr>
-            <a:r>
-              <a:rPr lang="en-US" sz="1400" dirty="0">
-                <a:solidFill>
-                  <a:srgbClr val="24313F"/>
-                </a:solidFill>
-                <a:latin typeface="Georgia" pitchFamily="34" charset="0"/>
-                <a:ea typeface="Georgia" pitchFamily="34" charset="-122"/>
-                <a:cs typeface="Georgia" pitchFamily="34" charset="-120"/>
-              </a:rPr>
-              <a:t>Production log</a:t>
-            </a:r>
-            <a:endParaRPr lang="en-US" sz="1400" dirty="0"/>
-          </a:p>
-        </p:txBody>
-      </p:sp>
-      <p:sp>
-        <p:nvSpPr>
-          <p:cNvPr id="28" name="Shape 26"/>
-          <p:cNvSpPr/>
-          <p:nvPr/>
-        </p:nvSpPr>
-        <p:spPr>
-          <a:xfrm>
-            <a:off x="9004554" y="3209544"/>
-            <a:ext cx="2361438" cy="548640"/>
-          </a:xfrm>
-          <a:prstGeom prst="rect">
-            <a:avLst/>
-          </a:prstGeom>
-          <a:solidFill>
-            <a:srgbClr val="E8EFE7"/>
-          </a:solidFill>
-          <a:ln/>
-        </p:spPr>
-      </p:sp>
-      <p:sp>
-        <p:nvSpPr>
-          <p:cNvPr id="29" name="Text 27"/>
-          <p:cNvSpPr/>
-          <p:nvPr/>
-        </p:nvSpPr>
-        <p:spPr>
-          <a:xfrm>
-            <a:off x="9169146" y="3209544"/>
-            <a:ext cx="2087118" cy="548640"/>
-          </a:xfrm>
-          <a:prstGeom prst="rect">
-            <a:avLst/>
-          </a:prstGeom>
-          <a:noFill/>
-          <a:ln/>
-        </p:spPr>
-        <p:txBody>
-          <a:bodyPr wrap="square" lIns="0" tIns="0" rIns="0" bIns="0" rtlCol="0" anchor="ctr"/>
-          <a:lstStyle/>
-          <a:p>
-            <a:pPr indent="0" marL="0">
-              <a:buNone/>
-            </a:pPr>
-            <a:r>
-              <a:rPr lang="en-US" sz="1400" dirty="0">
-                <a:solidFill>
-                  <a:srgbClr val="24313F"/>
-                </a:solidFill>
-                <a:latin typeface="Georgia" pitchFamily="34" charset="0"/>
-                <a:ea typeface="Georgia" pitchFamily="34" charset="-122"/>
-                <a:cs typeface="Georgia" pitchFamily="34" charset="-120"/>
-              </a:rPr>
-              <a:t>Early evidence</a:t>
-            </a:r>
-            <a:endParaRPr lang="en-US" sz="1400" dirty="0"/>
-          </a:p>
-        </p:txBody>
-      </p:sp>
-      <p:sp>
-        <p:nvSpPr>
-          <p:cNvPr id="30" name="Text 28"/>
-          <p:cNvSpPr/>
-          <p:nvPr/>
-        </p:nvSpPr>
-        <p:spPr>
-          <a:xfrm>
-            <a:off x="822960" y="4069080"/>
-            <a:ext cx="10424160" cy="1097280"/>
-          </a:xfrm>
-          <a:prstGeom prst="rect">
-            <a:avLst/>
-          </a:prstGeom>
-          <a:noFill/>
-          <a:ln/>
-        </p:spPr>
-        <p:txBody>
-          <a:bodyPr wrap="square" lIns="0" tIns="0" rIns="0" bIns="0" rtlCol="0" anchor="t"/>
-          <a:lstStyle/>
-          <a:p>
-            <a:pPr indent="0" marL="0">
-              <a:lnSpc>
-                <a:spcPts val="2300"/>
-              </a:lnSpc>
-              <a:buNone/>
-            </a:pPr>
-            <a:r>
-              <a:rPr lang="en-US" sz="1700" dirty="0">
-                <a:solidFill>
-                  <a:srgbClr val="24313F"/>
-                </a:solidFill>
-                <a:latin typeface="Georgia" pitchFamily="34" charset="0"/>
-                <a:ea typeface="Georgia" pitchFamily="34" charset="-122"/>
-                <a:cs typeface="Georgia" pitchFamily="34" charset="-120"/>
-              </a:rPr>
-              <a:t>Every post dated on the day it happened, contributions labelled, no gaps. The four technical builds are named on this checklist for the first time: they are Component 1 evidence under Cambridge's own portfolio structure, and a blog missing them is missing marks it already earned in class.</a:t>
-            </a:r>
-            <a:endParaRPr lang="en-US" sz="1700" dirty="0"/>
-          </a:p>
-        </p:txBody>
-      </p:sp>
-      <p:sp>
-        <p:nvSpPr>
-          <p:cNvPr id="31" name="Shape 29"/>
-          <p:cNvSpPr/>
-          <p:nvPr/>
-        </p:nvSpPr>
-        <p:spPr>
-          <a:xfrm>
-            <a:off x="822960" y="5303520"/>
-            <a:ext cx="914400" cy="0"/>
-          </a:xfrm>
-          <a:prstGeom prst="line">
-            <a:avLst/>
-          </a:prstGeom>
-          <a:noFill/>
-          <a:ln w="31750">
+          <a:ln w="28575">
             <a:solidFill>
               <a:srgbClr val="8C3A38"/>
             </a:solidFill>
@@ -3042,30 +2426,72 @@
       </p:sp>
       <p:sp>
         <p:nvSpPr>
-          <p:cNvPr id="32" name="Text 30"/>
-          <p:cNvSpPr/>
-          <p:nvPr/>
-        </p:nvSpPr>
-        <p:spPr>
-          <a:xfrm>
-            <a:off x="822960" y="5486400"/>
-            <a:ext cx="10424160" cy="457200"/>
-          </a:xfrm>
-          <a:prstGeom prst="rect">
-            <a:avLst/>
-          </a:prstGeom>
-          <a:noFill/>
-          <a:ln/>
-        </p:spPr>
-        <p:txBody>
-          <a:bodyPr wrap="square" lIns="0" tIns="0" rIns="0" bIns="0" rtlCol="0" anchor="ctr"/>
+          <p:cNvPr id="7" name="Text 4"/>
+          <p:cNvSpPr/>
+          <p:nvPr/>
+        </p:nvSpPr>
+        <p:spPr>
+          <a:xfrm>
+            <a:off x="676656" y="5541264"/>
+            <a:ext cx="8339328" cy="585216"/>
+          </a:xfrm>
+          <a:prstGeom prst="rect">
+            <a:avLst/>
+          </a:prstGeom>
+          <a:noFill/>
+          <a:ln/>
+        </p:spPr>
+        <p:txBody>
+          <a:bodyPr wrap="square" lIns="0" tIns="0" rIns="0" bIns="0" rtlCol="0" anchor="t"/>
           <a:lstStyle/>
           <a:p>
             <a:pPr indent="0" marL="0">
-              <a:buNone/>
-            </a:pPr>
-            <a:r>
-              <a:rPr lang="en-US" sz="1250" i="1" dirty="0">
+              <a:lnSpc>
+                <a:spcPts val="2200"/>
+              </a:lnSpc>
+              <a:buNone/>
+            </a:pPr>
+            <a:r>
+              <a:rPr lang="en-US" sz="1800" dirty="0">
+                <a:solidFill>
+                  <a:srgbClr val="24313F"/>
+                </a:solidFill>
+                <a:latin typeface="Georgia" pitchFamily="34" charset="0"/>
+                <a:ea typeface="Georgia" pitchFamily="34" charset="-122"/>
+                <a:cs typeface="Georgia" pitchFamily="34" charset="-120"/>
+              </a:rPr>
+              <a:t>Every blog read by a peer against the same checklist A2 is marked with, three days before it is due.</a:t>
+            </a:r>
+            <a:endParaRPr lang="en-US" sz="1800" dirty="0"/>
+          </a:p>
+        </p:txBody>
+      </p:sp>
+      <p:sp>
+        <p:nvSpPr>
+          <p:cNvPr id="8" name="Text 5"/>
+          <p:cNvSpPr/>
+          <p:nvPr/>
+        </p:nvSpPr>
+        <p:spPr>
+          <a:xfrm>
+            <a:off x="676656" y="6181344"/>
+            <a:ext cx="8339328" cy="256032"/>
+          </a:xfrm>
+          <a:prstGeom prst="rect">
+            <a:avLst/>
+          </a:prstGeom>
+          <a:noFill/>
+          <a:ln/>
+        </p:spPr>
+        <p:txBody>
+          <a:bodyPr wrap="square" lIns="0" tIns="0" rIns="0" bIns="0" rtlCol="0" anchor="ctr"/>
+          <a:lstStyle/>
+          <a:p>
+            <a:pPr indent="0" marL="0">
+              <a:buNone/>
+            </a:pPr>
+            <a:r>
+              <a:rPr lang="en-US" sz="950" spc="50" kern="0" dirty="0">
                 <a:solidFill>
                   <a:srgbClr val="7A7F72"/>
                 </a:solidFill>
@@ -3073,110 +2499,9 @@
                 <a:ea typeface="Arial" pitchFamily="34" charset="-122"/>
                 <a:cs typeface="Arial" pitchFamily="34" charset="-120"/>
               </a:rPr>
-              <a:t>Findings written as actions, not comments. Post 3 has no audience data, add the survey screenshot beats more detail. Three teaching days to Monday.</a:t>
-            </a:r>
-            <a:endParaRPr lang="en-US" sz="1250" dirty="0"/>
-          </a:p>
-        </p:txBody>
-      </p:sp>
-      <p:sp>
-        <p:nvSpPr>
-          <p:cNvPr id="33" name="Shape 31"/>
-          <p:cNvSpPr/>
-          <p:nvPr/>
-        </p:nvSpPr>
-        <p:spPr>
-          <a:xfrm>
-            <a:off x="822960" y="6382512"/>
-            <a:ext cx="10543032" cy="0"/>
-          </a:xfrm>
-          <a:prstGeom prst="line">
-            <a:avLst/>
-          </a:prstGeom>
-          <a:noFill/>
-          <a:ln w="9525">
-            <a:solidFill>
-              <a:srgbClr val="D9D4C4"/>
-            </a:solidFill>
-            <a:prstDash val="solid"/>
-          </a:ln>
-        </p:spPr>
-      </p:sp>
-      <p:sp>
-        <p:nvSpPr>
-          <p:cNvPr id="34" name="Text 32"/>
-          <p:cNvSpPr/>
-          <p:nvPr/>
-        </p:nvSpPr>
-        <p:spPr>
-          <a:xfrm>
-            <a:off x="822960" y="6419088"/>
-            <a:ext cx="7315200" cy="274320"/>
-          </a:xfrm>
-          <a:prstGeom prst="rect">
-            <a:avLst/>
-          </a:prstGeom>
-          <a:noFill/>
-          <a:ln/>
-        </p:spPr>
-        <p:txBody>
-          <a:bodyPr wrap="square" lIns="0" tIns="0" rIns="0" bIns="0" rtlCol="0" anchor="ctr"/>
-          <a:lstStyle/>
-          <a:p>
-            <a:pPr indent="0" marL="0">
-              <a:buNone/>
-            </a:pPr>
-            <a:r>
-              <a:rPr lang="en-US" sz="900" spc="150" kern="0" dirty="0">
-                <a:solidFill>
-                  <a:srgbClr val="7A7F72"/>
-                </a:solidFill>
-                <a:latin typeface="Arial" pitchFamily="34" charset="0"/>
-                <a:ea typeface="Arial" pitchFamily="34" charset="-122"/>
-                <a:cs typeface="Arial" pitchFamily="34" charset="-120"/>
-              </a:rPr>
-              <a:t>MEDIA STUDIES 9607 · SEMESTER I</a:t>
-            </a:r>
-            <a:endParaRPr lang="en-US" sz="900" dirty="0"/>
-          </a:p>
-        </p:txBody>
-      </p:sp>
-      <p:sp>
-        <p:nvSpPr>
-          <p:cNvPr id="35" name="Text 33"/>
-          <p:cNvSpPr/>
-          <p:nvPr/>
-        </p:nvSpPr>
-        <p:spPr>
-          <a:xfrm>
-            <a:off x="10268712" y="6355080"/>
-            <a:ext cx="1097280" cy="365760"/>
-          </a:xfrm>
-          <a:prstGeom prst="rect">
-            <a:avLst/>
-          </a:prstGeom>
-          <a:noFill/>
-          <a:ln/>
-        </p:spPr>
-        <p:txBody>
-          <a:bodyPr wrap="square" lIns="0" tIns="0" rIns="0" bIns="0" rtlCol="0" anchor="ctr"/>
-          <a:lstStyle/>
-          <a:p>
-            <a:pPr algn="r" indent="0" marL="0">
-              <a:buNone/>
-            </a:pPr>
-            <a:r>
-              <a:rPr lang="en-US" sz="1600" dirty="0">
-                <a:solidFill>
-                  <a:srgbClr val="A3C1AD"/>
-                </a:solidFill>
-                <a:latin typeface="Georgia" pitchFamily="34" charset="0"/>
-                <a:ea typeface="Georgia" pitchFamily="34" charset="-122"/>
-                <a:cs typeface="Georgia" pitchFamily="34" charset="-120"/>
-              </a:rPr>
-              <a:t>04</a:t>
-            </a:r>
-            <a:endParaRPr lang="en-US" sz="1600" dirty="0"/>
+              <a:t>Frances Benjamin Johnston, a Geography class, Hampton, c. 1899</a:t>
+            </a:r>
+            <a:endParaRPr lang="en-US" sz="950" dirty="0"/>
           </a:p>
         </p:txBody>
       </p:sp>
@@ -3245,7 +2570,7 @@
                 <a:ea typeface="Arial" pitchFamily="34" charset="-122"/>
                 <a:cs typeface="Arial" pitchFamily="34" charset="-120"/>
               </a:rPr>
-              <a:t>DELIVERABLE · CS5</a:t>
+              <a:t>CS9 · THE AUDIT</a:t>
             </a:r>
             <a:endParaRPr lang="en-US" sz="1100" dirty="0"/>
           </a:p>
@@ -3284,7 +2609,7 @@
                 <a:ea typeface="Arial" pitchFamily="34" charset="-122"/>
                 <a:cs typeface="Arial" pitchFamily="34" charset="-120"/>
               </a:rPr>
-              <a:t>THE AUDIT THAT MAKES A2 SAFE</a:t>
+              <a:t>THE SAME CHECKLIST A2 IS MARKED WITH</a:t>
             </a:r>
             <a:endParaRPr lang="en-US" sz="1100" dirty="0"/>
           </a:p>
@@ -3321,8 +2646,8 @@
         </p:nvSpPr>
         <p:spPr>
           <a:xfrm>
-            <a:off x="822960" y="1280160"/>
-            <a:ext cx="10543032" cy="914400"/>
+            <a:off x="822960" y="932688"/>
+            <a:ext cx="10543032" cy="640080"/>
           </a:xfrm>
           <a:prstGeom prst="rect">
             <a:avLst/>
@@ -3338,7 +2663,7 @@
               <a:buNone/>
             </a:pPr>
             <a:r>
-              <a:rPr lang="en-US" sz="3600" dirty="0">
+              <a:rPr lang="en-US" sz="3200" dirty="0">
                 <a:solidFill>
                   <a:srgbClr val="24313F"/>
                 </a:solidFill>
@@ -3346,9 +2671,9 @@
                 <a:ea typeface="Georgia" pitchFamily="34" charset="-122"/>
                 <a:cs typeface="Georgia" pitchFamily="34" charset="-120"/>
               </a:rPr>
-              <a:t>Three teaching days to Monday</a:t>
-            </a:r>
-            <a:endParaRPr lang="en-US" sz="3600" dirty="0"/>
+              <a:t>Post by post, findings as actions</a:t>
+            </a:r>
+            <a:endParaRPr lang="en-US" sz="3200" dirty="0"/>
           </a:p>
         </p:txBody>
       </p:sp>
@@ -3360,7 +2685,757 @@
         </p:nvSpPr>
         <p:spPr>
           <a:xfrm>
-            <a:off x="822960" y="2514600"/>
+            <a:off x="822960" y="1783080"/>
+            <a:ext cx="2361438" cy="548640"/>
+          </a:xfrm>
+          <a:prstGeom prst="rect">
+            <a:avLst/>
+          </a:prstGeom>
+          <a:solidFill>
+            <a:srgbClr val="E8EFE7"/>
+          </a:solidFill>
+          <a:ln/>
+        </p:spPr>
+      </p:sp>
+      <p:sp>
+        <p:nvSpPr>
+          <p:cNvPr id="7" name="Text 5"/>
+          <p:cNvSpPr/>
+          <p:nvPr/>
+        </p:nvSpPr>
+        <p:spPr>
+          <a:xfrm>
+            <a:off x="987552" y="1783080"/>
+            <a:ext cx="2087118" cy="548640"/>
+          </a:xfrm>
+          <a:prstGeom prst="rect">
+            <a:avLst/>
+          </a:prstGeom>
+          <a:noFill/>
+          <a:ln/>
+        </p:spPr>
+        <p:txBody>
+          <a:bodyPr wrap="square" lIns="0" tIns="0" rIns="0" bIns="0" rtlCol="0" anchor="ctr"/>
+          <a:lstStyle/>
+          <a:p>
+            <a:pPr indent="0" marL="0">
+              <a:buNone/>
+            </a:pPr>
+            <a:r>
+              <a:rPr lang="en-US" sz="1400" dirty="0">
+                <a:solidFill>
+                  <a:srgbClr val="24313F"/>
+                </a:solidFill>
+                <a:latin typeface="Georgia" pitchFamily="34" charset="0"/>
+                <a:ea typeface="Georgia" pitchFamily="34" charset="-122"/>
+                <a:cs typeface="Georgia" pitchFamily="34" charset="-120"/>
+              </a:rPr>
+              <a:t>Brief and group</a:t>
+            </a:r>
+            <a:endParaRPr lang="en-US" sz="1400" dirty="0"/>
+          </a:p>
+        </p:txBody>
+      </p:sp>
+      <p:sp>
+        <p:nvSpPr>
+          <p:cNvPr id="8" name="Shape 6"/>
+          <p:cNvSpPr/>
+          <p:nvPr/>
+        </p:nvSpPr>
+        <p:spPr>
+          <a:xfrm>
+            <a:off x="3550158" y="1783080"/>
+            <a:ext cx="2361438" cy="548640"/>
+          </a:xfrm>
+          <a:prstGeom prst="rect">
+            <a:avLst/>
+          </a:prstGeom>
+          <a:solidFill>
+            <a:srgbClr val="E8EFE7"/>
+          </a:solidFill>
+          <a:ln/>
+        </p:spPr>
+      </p:sp>
+      <p:sp>
+        <p:nvSpPr>
+          <p:cNvPr id="9" name="Text 7"/>
+          <p:cNvSpPr/>
+          <p:nvPr/>
+        </p:nvSpPr>
+        <p:spPr>
+          <a:xfrm>
+            <a:off x="3714750" y="1783080"/>
+            <a:ext cx="2087118" cy="548640"/>
+          </a:xfrm>
+          <a:prstGeom prst="rect">
+            <a:avLst/>
+          </a:prstGeom>
+          <a:noFill/>
+          <a:ln/>
+        </p:spPr>
+        <p:txBody>
+          <a:bodyPr wrap="square" lIns="0" tIns="0" rIns="0" bIns="0" rtlCol="0" anchor="ctr"/>
+          <a:lstStyle/>
+          <a:p>
+            <a:pPr indent="0" marL="0">
+              <a:buNone/>
+            </a:pPr>
+            <a:r>
+              <a:rPr lang="en-US" sz="1400" dirty="0">
+                <a:solidFill>
+                  <a:srgbClr val="24313F"/>
+                </a:solidFill>
+                <a:latin typeface="Georgia" pitchFamily="34" charset="0"/>
+                <a:ea typeface="Georgia" pitchFamily="34" charset="-122"/>
+                <a:cs typeface="Georgia" pitchFamily="34" charset="-120"/>
+              </a:rPr>
+              <a:t>Research</a:t>
+            </a:r>
+            <a:endParaRPr lang="en-US" sz="1400" dirty="0"/>
+          </a:p>
+        </p:txBody>
+      </p:sp>
+      <p:sp>
+        <p:nvSpPr>
+          <p:cNvPr id="10" name="Shape 8"/>
+          <p:cNvSpPr/>
+          <p:nvPr/>
+        </p:nvSpPr>
+        <p:spPr>
+          <a:xfrm>
+            <a:off x="6277356" y="1783080"/>
+            <a:ext cx="2361438" cy="548640"/>
+          </a:xfrm>
+          <a:prstGeom prst="rect">
+            <a:avLst/>
+          </a:prstGeom>
+          <a:solidFill>
+            <a:srgbClr val="E8EFE7"/>
+          </a:solidFill>
+          <a:ln/>
+        </p:spPr>
+      </p:sp>
+      <p:sp>
+        <p:nvSpPr>
+          <p:cNvPr id="11" name="Text 9"/>
+          <p:cNvSpPr/>
+          <p:nvPr/>
+        </p:nvSpPr>
+        <p:spPr>
+          <a:xfrm>
+            <a:off x="6441948" y="1783080"/>
+            <a:ext cx="2087118" cy="548640"/>
+          </a:xfrm>
+          <a:prstGeom prst="rect">
+            <a:avLst/>
+          </a:prstGeom>
+          <a:noFill/>
+          <a:ln/>
+        </p:spPr>
+        <p:txBody>
+          <a:bodyPr wrap="square" lIns="0" tIns="0" rIns="0" bIns="0" rtlCol="0" anchor="ctr"/>
+          <a:lstStyle/>
+          <a:p>
+            <a:pPr indent="0" marL="0">
+              <a:buNone/>
+            </a:pPr>
+            <a:r>
+              <a:rPr lang="en-US" sz="1400" dirty="0">
+                <a:solidFill>
+                  <a:srgbClr val="24313F"/>
+                </a:solidFill>
+                <a:latin typeface="Georgia" pitchFamily="34" charset="0"/>
+                <a:ea typeface="Georgia" pitchFamily="34" charset="-122"/>
+                <a:cs typeface="Georgia" pitchFamily="34" charset="-120"/>
+              </a:rPr>
+              <a:t>Audience profile</a:t>
+            </a:r>
+            <a:endParaRPr lang="en-US" sz="1400" dirty="0"/>
+          </a:p>
+        </p:txBody>
+      </p:sp>
+      <p:sp>
+        <p:nvSpPr>
+          <p:cNvPr id="12" name="Shape 10"/>
+          <p:cNvSpPr/>
+          <p:nvPr/>
+        </p:nvSpPr>
+        <p:spPr>
+          <a:xfrm>
+            <a:off x="9004554" y="1783080"/>
+            <a:ext cx="2361438" cy="548640"/>
+          </a:xfrm>
+          <a:prstGeom prst="rect">
+            <a:avLst/>
+          </a:prstGeom>
+          <a:solidFill>
+            <a:srgbClr val="E8EFE7"/>
+          </a:solidFill>
+          <a:ln/>
+        </p:spPr>
+      </p:sp>
+      <p:sp>
+        <p:nvSpPr>
+          <p:cNvPr id="13" name="Text 11"/>
+          <p:cNvSpPr/>
+          <p:nvPr/>
+        </p:nvSpPr>
+        <p:spPr>
+          <a:xfrm>
+            <a:off x="9169146" y="1783080"/>
+            <a:ext cx="2087118" cy="548640"/>
+          </a:xfrm>
+          <a:prstGeom prst="rect">
+            <a:avLst/>
+          </a:prstGeom>
+          <a:noFill/>
+          <a:ln/>
+        </p:spPr>
+        <p:txBody>
+          <a:bodyPr wrap="square" lIns="0" tIns="0" rIns="0" bIns="0" rtlCol="0" anchor="ctr"/>
+          <a:lstStyle/>
+          <a:p>
+            <a:pPr indent="0" marL="0">
+              <a:buNone/>
+            </a:pPr>
+            <a:r>
+              <a:rPr lang="en-US" sz="1400" dirty="0">
+                <a:solidFill>
+                  <a:srgbClr val="24313F"/>
+                </a:solidFill>
+                <a:latin typeface="Georgia" pitchFamily="34" charset="0"/>
+                <a:ea typeface="Georgia" pitchFamily="34" charset="-122"/>
+                <a:cs typeface="Georgia" pitchFamily="34" charset="-120"/>
+              </a:rPr>
+              <a:t>Pitch</a:t>
+            </a:r>
+            <a:endParaRPr lang="en-US" sz="1400" dirty="0"/>
+          </a:p>
+        </p:txBody>
+      </p:sp>
+      <p:sp>
+        <p:nvSpPr>
+          <p:cNvPr id="14" name="Shape 12"/>
+          <p:cNvSpPr/>
+          <p:nvPr/>
+        </p:nvSpPr>
+        <p:spPr>
+          <a:xfrm>
+            <a:off x="822960" y="2496312"/>
+            <a:ext cx="2361438" cy="548640"/>
+          </a:xfrm>
+          <a:prstGeom prst="rect">
+            <a:avLst/>
+          </a:prstGeom>
+          <a:solidFill>
+            <a:srgbClr val="E8EFE7"/>
+          </a:solidFill>
+          <a:ln/>
+        </p:spPr>
+      </p:sp>
+      <p:sp>
+        <p:nvSpPr>
+          <p:cNvPr id="15" name="Text 13"/>
+          <p:cNvSpPr/>
+          <p:nvPr/>
+        </p:nvSpPr>
+        <p:spPr>
+          <a:xfrm>
+            <a:off x="987552" y="2496312"/>
+            <a:ext cx="2087118" cy="548640"/>
+          </a:xfrm>
+          <a:prstGeom prst="rect">
+            <a:avLst/>
+          </a:prstGeom>
+          <a:noFill/>
+          <a:ln/>
+        </p:spPr>
+        <p:txBody>
+          <a:bodyPr wrap="square" lIns="0" tIns="0" rIns="0" bIns="0" rtlCol="0" anchor="ctr"/>
+          <a:lstStyle/>
+          <a:p>
+            <a:pPr indent="0" marL="0">
+              <a:buNone/>
+            </a:pPr>
+            <a:r>
+              <a:rPr lang="en-US" sz="1400" dirty="0">
+                <a:solidFill>
+                  <a:srgbClr val="24313F"/>
+                </a:solidFill>
+                <a:latin typeface="Georgia" pitchFamily="34" charset="0"/>
+                <a:ea typeface="Georgia" pitchFamily="34" charset="-122"/>
+                <a:cs typeface="Georgia" pitchFamily="34" charset="-120"/>
+              </a:rPr>
+              <a:t>Planning suite</a:t>
+            </a:r>
+            <a:endParaRPr lang="en-US" sz="1400" dirty="0"/>
+          </a:p>
+        </p:txBody>
+      </p:sp>
+      <p:sp>
+        <p:nvSpPr>
+          <p:cNvPr id="16" name="Shape 14"/>
+          <p:cNvSpPr/>
+          <p:nvPr/>
+        </p:nvSpPr>
+        <p:spPr>
+          <a:xfrm>
+            <a:off x="3550158" y="2496312"/>
+            <a:ext cx="2361438" cy="548640"/>
+          </a:xfrm>
+          <a:prstGeom prst="rect">
+            <a:avLst/>
+          </a:prstGeom>
+          <a:solidFill>
+            <a:srgbClr val="E8EFE7"/>
+          </a:solidFill>
+          <a:ln/>
+        </p:spPr>
+      </p:sp>
+      <p:sp>
+        <p:nvSpPr>
+          <p:cNvPr id="17" name="Text 15"/>
+          <p:cNvSpPr/>
+          <p:nvPr/>
+        </p:nvSpPr>
+        <p:spPr>
+          <a:xfrm>
+            <a:off x="3714750" y="2496312"/>
+            <a:ext cx="2087118" cy="548640"/>
+          </a:xfrm>
+          <a:prstGeom prst="rect">
+            <a:avLst/>
+          </a:prstGeom>
+          <a:noFill/>
+          <a:ln/>
+        </p:spPr>
+        <p:txBody>
+          <a:bodyPr wrap="square" lIns="0" tIns="0" rIns="0" bIns="0" rtlCol="0" anchor="ctr"/>
+          <a:lstStyle/>
+          <a:p>
+            <a:pPr indent="0" marL="0">
+              <a:buNone/>
+            </a:pPr>
+            <a:r>
+              <a:rPr lang="en-US" sz="1400" dirty="0">
+                <a:solidFill>
+                  <a:srgbClr val="24313F"/>
+                </a:solidFill>
+                <a:latin typeface="Georgia" pitchFamily="34" charset="0"/>
+                <a:ea typeface="Georgia" pitchFamily="34" charset="-122"/>
+                <a:cs typeface="Georgia" pitchFamily="34" charset="-120"/>
+              </a:rPr>
+              <a:t>CS3 camera build</a:t>
+            </a:r>
+            <a:endParaRPr lang="en-US" sz="1400" dirty="0"/>
+          </a:p>
+        </p:txBody>
+      </p:sp>
+      <p:sp>
+        <p:nvSpPr>
+          <p:cNvPr id="18" name="Shape 16"/>
+          <p:cNvSpPr/>
+          <p:nvPr/>
+        </p:nvSpPr>
+        <p:spPr>
+          <a:xfrm>
+            <a:off x="6277356" y="2496312"/>
+            <a:ext cx="2361438" cy="548640"/>
+          </a:xfrm>
+          <a:prstGeom prst="rect">
+            <a:avLst/>
+          </a:prstGeom>
+          <a:solidFill>
+            <a:srgbClr val="E8EFE7"/>
+          </a:solidFill>
+          <a:ln/>
+        </p:spPr>
+      </p:sp>
+      <p:sp>
+        <p:nvSpPr>
+          <p:cNvPr id="19" name="Text 17"/>
+          <p:cNvSpPr/>
+          <p:nvPr/>
+        </p:nvSpPr>
+        <p:spPr>
+          <a:xfrm>
+            <a:off x="6441948" y="2496312"/>
+            <a:ext cx="2087118" cy="548640"/>
+          </a:xfrm>
+          <a:prstGeom prst="rect">
+            <a:avLst/>
+          </a:prstGeom>
+          <a:noFill/>
+          <a:ln/>
+        </p:spPr>
+        <p:txBody>
+          <a:bodyPr wrap="square" lIns="0" tIns="0" rIns="0" bIns="0" rtlCol="0" anchor="ctr"/>
+          <a:lstStyle/>
+          <a:p>
+            <a:pPr indent="0" marL="0">
+              <a:buNone/>
+            </a:pPr>
+            <a:r>
+              <a:rPr lang="en-US" sz="1400" dirty="0">
+                <a:solidFill>
+                  <a:srgbClr val="24313F"/>
+                </a:solidFill>
+                <a:latin typeface="Georgia" pitchFamily="34" charset="0"/>
+                <a:ea typeface="Georgia" pitchFamily="34" charset="-122"/>
+                <a:cs typeface="Georgia" pitchFamily="34" charset="-120"/>
+              </a:rPr>
+              <a:t>CS4 soundscape</a:t>
+            </a:r>
+            <a:endParaRPr lang="en-US" sz="1400" dirty="0"/>
+          </a:p>
+        </p:txBody>
+      </p:sp>
+      <p:sp>
+        <p:nvSpPr>
+          <p:cNvPr id="20" name="Shape 18"/>
+          <p:cNvSpPr/>
+          <p:nvPr/>
+        </p:nvSpPr>
+        <p:spPr>
+          <a:xfrm>
+            <a:off x="9004554" y="2496312"/>
+            <a:ext cx="2361438" cy="548640"/>
+          </a:xfrm>
+          <a:prstGeom prst="rect">
+            <a:avLst/>
+          </a:prstGeom>
+          <a:solidFill>
+            <a:srgbClr val="E8EFE7"/>
+          </a:solidFill>
+          <a:ln/>
+        </p:spPr>
+      </p:sp>
+      <p:sp>
+        <p:nvSpPr>
+          <p:cNvPr id="21" name="Text 19"/>
+          <p:cNvSpPr/>
+          <p:nvPr/>
+        </p:nvSpPr>
+        <p:spPr>
+          <a:xfrm>
+            <a:off x="9169146" y="2496312"/>
+            <a:ext cx="2087118" cy="548640"/>
+          </a:xfrm>
+          <a:prstGeom prst="rect">
+            <a:avLst/>
+          </a:prstGeom>
+          <a:noFill/>
+          <a:ln/>
+        </p:spPr>
+        <p:txBody>
+          <a:bodyPr wrap="square" lIns="0" tIns="0" rIns="0" bIns="0" rtlCol="0" anchor="ctr"/>
+          <a:lstStyle/>
+          <a:p>
+            <a:pPr indent="0" marL="0">
+              <a:buNone/>
+            </a:pPr>
+            <a:r>
+              <a:rPr lang="en-US" sz="1400" dirty="0">
+                <a:solidFill>
+                  <a:srgbClr val="24313F"/>
+                </a:solidFill>
+                <a:latin typeface="Georgia" pitchFamily="34" charset="0"/>
+                <a:ea typeface="Georgia" pitchFamily="34" charset="-122"/>
+                <a:cs typeface="Georgia" pitchFamily="34" charset="-120"/>
+              </a:rPr>
+              <a:t>CS5 design board</a:t>
+            </a:r>
+            <a:endParaRPr lang="en-US" sz="1400" dirty="0"/>
+          </a:p>
+        </p:txBody>
+      </p:sp>
+      <p:sp>
+        <p:nvSpPr>
+          <p:cNvPr id="22" name="Shape 20"/>
+          <p:cNvSpPr/>
+          <p:nvPr/>
+        </p:nvSpPr>
+        <p:spPr>
+          <a:xfrm>
+            <a:off x="822960" y="3209544"/>
+            <a:ext cx="2361438" cy="548640"/>
+          </a:xfrm>
+          <a:prstGeom prst="rect">
+            <a:avLst/>
+          </a:prstGeom>
+          <a:solidFill>
+            <a:srgbClr val="E8EFE7"/>
+          </a:solidFill>
+          <a:ln/>
+        </p:spPr>
+      </p:sp>
+      <p:sp>
+        <p:nvSpPr>
+          <p:cNvPr id="23" name="Text 21"/>
+          <p:cNvSpPr/>
+          <p:nvPr/>
+        </p:nvSpPr>
+        <p:spPr>
+          <a:xfrm>
+            <a:off x="987552" y="3209544"/>
+            <a:ext cx="2087118" cy="548640"/>
+          </a:xfrm>
+          <a:prstGeom prst="rect">
+            <a:avLst/>
+          </a:prstGeom>
+          <a:noFill/>
+          <a:ln/>
+        </p:spPr>
+        <p:txBody>
+          <a:bodyPr wrap="square" lIns="0" tIns="0" rIns="0" bIns="0" rtlCol="0" anchor="ctr"/>
+          <a:lstStyle/>
+          <a:p>
+            <a:pPr indent="0" marL="0">
+              <a:buNone/>
+            </a:pPr>
+            <a:r>
+              <a:rPr lang="en-US" sz="1400" dirty="0">
+                <a:solidFill>
+                  <a:srgbClr val="24313F"/>
+                </a:solidFill>
+                <a:latin typeface="Georgia" pitchFamily="34" charset="0"/>
+                <a:ea typeface="Georgia" pitchFamily="34" charset="-122"/>
+                <a:cs typeface="Georgia" pitchFamily="34" charset="-120"/>
+              </a:rPr>
+              <a:t>CS6 edit, both versions</a:t>
+            </a:r>
+            <a:endParaRPr lang="en-US" sz="1400" dirty="0"/>
+          </a:p>
+        </p:txBody>
+      </p:sp>
+      <p:sp>
+        <p:nvSpPr>
+          <p:cNvPr id="24" name="Shape 22"/>
+          <p:cNvSpPr/>
+          <p:nvPr/>
+        </p:nvSpPr>
+        <p:spPr>
+          <a:xfrm>
+            <a:off x="3550158" y="3209544"/>
+            <a:ext cx="2361438" cy="548640"/>
+          </a:xfrm>
+          <a:prstGeom prst="rect">
+            <a:avLst/>
+          </a:prstGeom>
+          <a:solidFill>
+            <a:srgbClr val="E8EFE7"/>
+          </a:solidFill>
+          <a:ln/>
+        </p:spPr>
+      </p:sp>
+      <p:sp>
+        <p:nvSpPr>
+          <p:cNvPr id="25" name="Text 23"/>
+          <p:cNvSpPr/>
+          <p:nvPr/>
+        </p:nvSpPr>
+        <p:spPr>
+          <a:xfrm>
+            <a:off x="3714750" y="3209544"/>
+            <a:ext cx="2087118" cy="548640"/>
+          </a:xfrm>
+          <a:prstGeom prst="rect">
+            <a:avLst/>
+          </a:prstGeom>
+          <a:noFill/>
+          <a:ln/>
+        </p:spPr>
+        <p:txBody>
+          <a:bodyPr wrap="square" lIns="0" tIns="0" rIns="0" bIns="0" rtlCol="0" anchor="ctr"/>
+          <a:lstStyle/>
+          <a:p>
+            <a:pPr indent="0" marL="0">
+              <a:buNone/>
+            </a:pPr>
+            <a:r>
+              <a:rPr lang="en-US" sz="1400" dirty="0">
+                <a:solidFill>
+                  <a:srgbClr val="24313F"/>
+                </a:solidFill>
+                <a:latin typeface="Georgia" pitchFamily="34" charset="0"/>
+                <a:ea typeface="Georgia" pitchFamily="34" charset="-122"/>
+                <a:cs typeface="Georgia" pitchFamily="34" charset="-120"/>
+              </a:rPr>
+              <a:t>Genre contract</a:t>
+            </a:r>
+            <a:endParaRPr lang="en-US" sz="1400" dirty="0"/>
+          </a:p>
+        </p:txBody>
+      </p:sp>
+      <p:sp>
+        <p:nvSpPr>
+          <p:cNvPr id="26" name="Shape 24"/>
+          <p:cNvSpPr/>
+          <p:nvPr/>
+        </p:nvSpPr>
+        <p:spPr>
+          <a:xfrm>
+            <a:off x="6277356" y="3209544"/>
+            <a:ext cx="2361438" cy="548640"/>
+          </a:xfrm>
+          <a:prstGeom prst="rect">
+            <a:avLst/>
+          </a:prstGeom>
+          <a:solidFill>
+            <a:srgbClr val="E8EFE7"/>
+          </a:solidFill>
+          <a:ln/>
+        </p:spPr>
+      </p:sp>
+      <p:sp>
+        <p:nvSpPr>
+          <p:cNvPr id="27" name="Text 25"/>
+          <p:cNvSpPr/>
+          <p:nvPr/>
+        </p:nvSpPr>
+        <p:spPr>
+          <a:xfrm>
+            <a:off x="6441948" y="3209544"/>
+            <a:ext cx="2087118" cy="548640"/>
+          </a:xfrm>
+          <a:prstGeom prst="rect">
+            <a:avLst/>
+          </a:prstGeom>
+          <a:noFill/>
+          <a:ln/>
+        </p:spPr>
+        <p:txBody>
+          <a:bodyPr wrap="square" lIns="0" tIns="0" rIns="0" bIns="0" rtlCol="0" anchor="ctr"/>
+          <a:lstStyle/>
+          <a:p>
+            <a:pPr indent="0" marL="0">
+              <a:buNone/>
+            </a:pPr>
+            <a:r>
+              <a:rPr lang="en-US" sz="1400" dirty="0">
+                <a:solidFill>
+                  <a:srgbClr val="24313F"/>
+                </a:solidFill>
+                <a:latin typeface="Georgia" pitchFamily="34" charset="0"/>
+                <a:ea typeface="Georgia" pitchFamily="34" charset="-122"/>
+                <a:cs typeface="Georgia" pitchFamily="34" charset="-120"/>
+              </a:rPr>
+              <a:t>Production log</a:t>
+            </a:r>
+            <a:endParaRPr lang="en-US" sz="1400" dirty="0"/>
+          </a:p>
+        </p:txBody>
+      </p:sp>
+      <p:sp>
+        <p:nvSpPr>
+          <p:cNvPr id="28" name="Shape 26"/>
+          <p:cNvSpPr/>
+          <p:nvPr/>
+        </p:nvSpPr>
+        <p:spPr>
+          <a:xfrm>
+            <a:off x="9004554" y="3209544"/>
+            <a:ext cx="2361438" cy="548640"/>
+          </a:xfrm>
+          <a:prstGeom prst="rect">
+            <a:avLst/>
+          </a:prstGeom>
+          <a:solidFill>
+            <a:srgbClr val="E8EFE7"/>
+          </a:solidFill>
+          <a:ln/>
+        </p:spPr>
+      </p:sp>
+      <p:sp>
+        <p:nvSpPr>
+          <p:cNvPr id="29" name="Text 27"/>
+          <p:cNvSpPr/>
+          <p:nvPr/>
+        </p:nvSpPr>
+        <p:spPr>
+          <a:xfrm>
+            <a:off x="9169146" y="3209544"/>
+            <a:ext cx="2087118" cy="548640"/>
+          </a:xfrm>
+          <a:prstGeom prst="rect">
+            <a:avLst/>
+          </a:prstGeom>
+          <a:noFill/>
+          <a:ln/>
+        </p:spPr>
+        <p:txBody>
+          <a:bodyPr wrap="square" lIns="0" tIns="0" rIns="0" bIns="0" rtlCol="0" anchor="ctr"/>
+          <a:lstStyle/>
+          <a:p>
+            <a:pPr indent="0" marL="0">
+              <a:buNone/>
+            </a:pPr>
+            <a:r>
+              <a:rPr lang="en-US" sz="1400" dirty="0">
+                <a:solidFill>
+                  <a:srgbClr val="24313F"/>
+                </a:solidFill>
+                <a:latin typeface="Georgia" pitchFamily="34" charset="0"/>
+                <a:ea typeface="Georgia" pitchFamily="34" charset="-122"/>
+                <a:cs typeface="Georgia" pitchFamily="34" charset="-120"/>
+              </a:rPr>
+              <a:t>Early evidence</a:t>
+            </a:r>
+            <a:endParaRPr lang="en-US" sz="1400" dirty="0"/>
+          </a:p>
+        </p:txBody>
+      </p:sp>
+      <p:sp>
+        <p:nvSpPr>
+          <p:cNvPr id="30" name="Text 28"/>
+          <p:cNvSpPr/>
+          <p:nvPr/>
+        </p:nvSpPr>
+        <p:spPr>
+          <a:xfrm>
+            <a:off x="822960" y="4069080"/>
+            <a:ext cx="10424160" cy="1097280"/>
+          </a:xfrm>
+          <a:prstGeom prst="rect">
+            <a:avLst/>
+          </a:prstGeom>
+          <a:noFill/>
+          <a:ln/>
+        </p:spPr>
+        <p:txBody>
+          <a:bodyPr wrap="square" lIns="0" tIns="0" rIns="0" bIns="0" rtlCol="0" anchor="t"/>
+          <a:lstStyle/>
+          <a:p>
+            <a:pPr indent="0" marL="0">
+              <a:lnSpc>
+                <a:spcPts val="2300"/>
+              </a:lnSpc>
+              <a:buNone/>
+            </a:pPr>
+            <a:r>
+              <a:rPr lang="en-US" sz="1700" dirty="0">
+                <a:solidFill>
+                  <a:srgbClr val="24313F"/>
+                </a:solidFill>
+                <a:latin typeface="Georgia" pitchFamily="34" charset="0"/>
+                <a:ea typeface="Georgia" pitchFamily="34" charset="-122"/>
+                <a:cs typeface="Georgia" pitchFamily="34" charset="-120"/>
+              </a:rPr>
+              <a:t>Every post dated on the day it happened, contributions labelled, no gaps. The four technical builds are named on this checklist for the first time: they are Component 1 evidence under Cambridge's own portfolio structure, and a blog missing them is missing marks it already earned in class.</a:t>
+            </a:r>
+            <a:endParaRPr lang="en-US" sz="1700" dirty="0"/>
+          </a:p>
+        </p:txBody>
+      </p:sp>
+      <p:sp>
+        <p:nvSpPr>
+          <p:cNvPr id="31" name="Shape 29"/>
+          <p:cNvSpPr/>
+          <p:nvPr/>
+        </p:nvSpPr>
+        <p:spPr>
+          <a:xfrm>
+            <a:off x="822960" y="5303520"/>
             <a:ext cx="914400" cy="0"/>
           </a:xfrm>
           <a:prstGeom prst="line">
@@ -3377,49 +3452,46 @@
       </p:sp>
       <p:sp>
         <p:nvSpPr>
-          <p:cNvPr id="7" name="Text 5"/>
-          <p:cNvSpPr/>
-          <p:nvPr/>
-        </p:nvSpPr>
-        <p:spPr>
-          <a:xfrm>
-            <a:off x="822960" y="2743200"/>
-            <a:ext cx="9875520" cy="1920240"/>
-          </a:xfrm>
-          <a:prstGeom prst="rect">
-            <a:avLst/>
-          </a:prstGeom>
-          <a:noFill/>
-          <a:ln/>
-        </p:spPr>
-        <p:txBody>
-          <a:bodyPr wrap="square" lIns="0" tIns="0" rIns="0" bIns="0" rtlCol="0" anchor="t"/>
+          <p:cNvPr id="32" name="Text 30"/>
+          <p:cNvSpPr/>
+          <p:nvPr/>
+        </p:nvSpPr>
+        <p:spPr>
+          <a:xfrm>
+            <a:off x="822960" y="5486400"/>
+            <a:ext cx="10424160" cy="457200"/>
+          </a:xfrm>
+          <a:prstGeom prst="rect">
+            <a:avLst/>
+          </a:prstGeom>
+          <a:noFill/>
+          <a:ln/>
+        </p:spPr>
+        <p:txBody>
+          <a:bodyPr wrap="square" lIns="0" tIns="0" rIns="0" bIns="0" rtlCol="0" anchor="ctr"/>
           <a:lstStyle/>
           <a:p>
             <a:pPr indent="0" marL="0">
-              <a:lnSpc>
-                <a:spcPts val="2800"/>
-              </a:lnSpc>
-              <a:buNone/>
-            </a:pPr>
-            <a:r>
-              <a:rPr lang="en-US" sz="2000" dirty="0">
-                <a:solidFill>
-                  <a:srgbClr val="24313F"/>
-                </a:solidFill>
-                <a:latin typeface="Georgia" pitchFamily="34" charset="0"/>
-                <a:ea typeface="Georgia" pitchFamily="34" charset="-122"/>
-                <a:cs typeface="Georgia" pitchFamily="34" charset="-120"/>
-              </a:rPr>
-              <a:t>CS5 is a peer blog audit against the mid-point checklist, the same instrument A2 is marked with. It is placed with working days to spare on purpose, so the deadline surprises nobody. A2 is submitted work, not a sitting: it is due the Monday after this lesson ends.</a:t>
-            </a:r>
-            <a:endParaRPr lang="en-US" sz="2000" dirty="0"/>
-          </a:p>
-        </p:txBody>
-      </p:sp>
-      <p:sp>
-        <p:nvSpPr>
-          <p:cNvPr id="8" name="Shape 6"/>
+              <a:buNone/>
+            </a:pPr>
+            <a:r>
+              <a:rPr lang="en-US" sz="1250" i="1" dirty="0">
+                <a:solidFill>
+                  <a:srgbClr val="7A7F72"/>
+                </a:solidFill>
+                <a:latin typeface="Arial" pitchFamily="34" charset="0"/>
+                <a:ea typeface="Arial" pitchFamily="34" charset="-122"/>
+                <a:cs typeface="Arial" pitchFamily="34" charset="-120"/>
+              </a:rPr>
+              <a:t>Findings written as actions, not comments. Post 3 has no audience data, add the survey screenshot beats more detail. Three teaching days to Monday.</a:t>
+            </a:r>
+            <a:endParaRPr lang="en-US" sz="1250" dirty="0"/>
+          </a:p>
+        </p:txBody>
+      </p:sp>
+      <p:sp>
+        <p:nvSpPr>
+          <p:cNvPr id="33" name="Shape 31"/>
           <p:cNvSpPr/>
           <p:nvPr/>
         </p:nvSpPr>
@@ -3442,7 +3514,7 @@
       </p:sp>
       <p:sp>
         <p:nvSpPr>
-          <p:cNvPr id="9" name="Text 7"/>
+          <p:cNvPr id="34" name="Text 32"/>
           <p:cNvSpPr/>
           <p:nvPr/>
         </p:nvSpPr>
@@ -3481,7 +3553,7 @@
       </p:sp>
       <p:sp>
         <p:nvSpPr>
-          <p:cNvPr id="10" name="Text 8"/>
+          <p:cNvPr id="35" name="Text 33"/>
           <p:cNvSpPr/>
           <p:nvPr/>
         </p:nvSpPr>
@@ -3529,6 +3601,812 @@
 <file path=ppt/slides/slide12.xml><?xml version="1.0" encoding="utf-8"?>
 <p:sld xmlns:a="http://schemas.openxmlformats.org/drawingml/2006/main" xmlns:r="http://schemas.openxmlformats.org/officeDocument/2006/relationships" xmlns:p="http://schemas.openxmlformats.org/presentationml/2006/main">
   <p:cSld name="Slide 12">
+    <p:bg>
+      <p:bgPr>
+        <a:solidFill>
+          <a:srgbClr val="FAF8F1"/>
+        </a:solidFill>
+      </p:bgPr>
+    </p:bg>
+    <p:spTree>
+      <p:nvGrpSpPr>
+        <p:cNvPr id="1" name=""/>
+        <p:cNvGrpSpPr/>
+        <p:nvPr/>
+      </p:nvGrpSpPr>
+      <p:grpSpPr>
+        <a:xfrm>
+          <a:off x="0" y="0"/>
+          <a:ext cx="0" cy="0"/>
+          <a:chOff x="0" y="0"/>
+          <a:chExt cx="0" cy="0"/>
+        </a:xfrm>
+      </p:grpSpPr>
+      <p:sp>
+        <p:nvSpPr>
+          <p:cNvPr id="2" name="Text 0"/>
+          <p:cNvSpPr/>
+          <p:nvPr/>
+        </p:nvSpPr>
+        <p:spPr>
+          <a:xfrm>
+            <a:off x="822960" y="457200"/>
+            <a:ext cx="6400800" cy="274320"/>
+          </a:xfrm>
+          <a:prstGeom prst="rect">
+            <a:avLst/>
+          </a:prstGeom>
+          <a:noFill/>
+          <a:ln/>
+        </p:spPr>
+        <p:txBody>
+          <a:bodyPr wrap="square" lIns="0" tIns="0" rIns="0" bIns="0" rtlCol="0" anchor="ctr"/>
+          <a:lstStyle/>
+          <a:p>
+            <a:pPr algn="l" indent="0" marL="0">
+              <a:buNone/>
+            </a:pPr>
+            <a:r>
+              <a:rPr lang="en-US" sz="1100" b="1" spc="250" kern="0" dirty="0">
+                <a:solidFill>
+                  <a:srgbClr val="4A6B5D"/>
+                </a:solidFill>
+                <a:latin typeface="Arial" pitchFamily="34" charset="0"/>
+                <a:ea typeface="Arial" pitchFamily="34" charset="-122"/>
+                <a:cs typeface="Arial" pitchFamily="34" charset="-120"/>
+              </a:rPr>
+              <a:t>DELIVERABLE · CS9</a:t>
+            </a:r>
+            <a:endParaRPr lang="en-US" sz="1100" dirty="0"/>
+          </a:p>
+        </p:txBody>
+      </p:sp>
+      <p:sp>
+        <p:nvSpPr>
+          <p:cNvPr id="3" name="Text 1"/>
+          <p:cNvSpPr/>
+          <p:nvPr/>
+        </p:nvSpPr>
+        <p:spPr>
+          <a:xfrm>
+            <a:off x="6793992" y="457200"/>
+            <a:ext cx="4572000" cy="274320"/>
+          </a:xfrm>
+          <a:prstGeom prst="rect">
+            <a:avLst/>
+          </a:prstGeom>
+          <a:noFill/>
+          <a:ln/>
+        </p:spPr>
+        <p:txBody>
+          <a:bodyPr wrap="square" lIns="0" tIns="0" rIns="0" bIns="0" rtlCol="0" anchor="ctr"/>
+          <a:lstStyle/>
+          <a:p>
+            <a:pPr algn="r" indent="0" marL="0">
+              <a:buNone/>
+            </a:pPr>
+            <a:r>
+              <a:rPr lang="en-US" sz="1100" b="1" spc="250" kern="0" dirty="0">
+                <a:solidFill>
+                  <a:srgbClr val="7A7F72"/>
+                </a:solidFill>
+                <a:latin typeface="Arial" pitchFamily="34" charset="0"/>
+                <a:ea typeface="Arial" pitchFamily="34" charset="-122"/>
+                <a:cs typeface="Arial" pitchFamily="34" charset="-120"/>
+              </a:rPr>
+              <a:t>THE AUDIT THAT MAKES A2 SAFE</a:t>
+            </a:r>
+            <a:endParaRPr lang="en-US" sz="1100" dirty="0"/>
+          </a:p>
+        </p:txBody>
+      </p:sp>
+      <p:sp>
+        <p:nvSpPr>
+          <p:cNvPr id="4" name="Shape 2"/>
+          <p:cNvSpPr/>
+          <p:nvPr/>
+        </p:nvSpPr>
+        <p:spPr>
+          <a:xfrm>
+            <a:off x="822960" y="786384"/>
+            <a:ext cx="10543032" cy="0"/>
+          </a:xfrm>
+          <a:prstGeom prst="line">
+            <a:avLst/>
+          </a:prstGeom>
+          <a:noFill/>
+          <a:ln w="9525">
+            <a:solidFill>
+              <a:srgbClr val="D9D4C4"/>
+            </a:solidFill>
+            <a:prstDash val="solid"/>
+          </a:ln>
+        </p:spPr>
+      </p:sp>
+      <p:sp>
+        <p:nvSpPr>
+          <p:cNvPr id="5" name="Text 3"/>
+          <p:cNvSpPr/>
+          <p:nvPr/>
+        </p:nvSpPr>
+        <p:spPr>
+          <a:xfrm>
+            <a:off x="822960" y="1280160"/>
+            <a:ext cx="10543032" cy="914400"/>
+          </a:xfrm>
+          <a:prstGeom prst="rect">
+            <a:avLst/>
+          </a:prstGeom>
+          <a:noFill/>
+          <a:ln/>
+        </p:spPr>
+        <p:txBody>
+          <a:bodyPr wrap="square" lIns="0" tIns="0" rIns="0" bIns="0" rtlCol="0" anchor="ctr"/>
+          <a:lstStyle/>
+          <a:p>
+            <a:pPr indent="0" marL="0">
+              <a:buNone/>
+            </a:pPr>
+            <a:r>
+              <a:rPr lang="en-US" sz="3600" dirty="0">
+                <a:solidFill>
+                  <a:srgbClr val="24313F"/>
+                </a:solidFill>
+                <a:latin typeface="Georgia" pitchFamily="34" charset="0"/>
+                <a:ea typeface="Georgia" pitchFamily="34" charset="-122"/>
+                <a:cs typeface="Georgia" pitchFamily="34" charset="-120"/>
+              </a:rPr>
+              <a:t>Three teaching days to Monday</a:t>
+            </a:r>
+            <a:endParaRPr lang="en-US" sz="3600" dirty="0"/>
+          </a:p>
+        </p:txBody>
+      </p:sp>
+      <p:sp>
+        <p:nvSpPr>
+          <p:cNvPr id="6" name="Shape 4"/>
+          <p:cNvSpPr/>
+          <p:nvPr/>
+        </p:nvSpPr>
+        <p:spPr>
+          <a:xfrm>
+            <a:off x="822960" y="2514600"/>
+            <a:ext cx="914400" cy="0"/>
+          </a:xfrm>
+          <a:prstGeom prst="line">
+            <a:avLst/>
+          </a:prstGeom>
+          <a:noFill/>
+          <a:ln w="31750">
+            <a:solidFill>
+              <a:srgbClr val="8C3A38"/>
+            </a:solidFill>
+            <a:prstDash val="solid"/>
+          </a:ln>
+        </p:spPr>
+      </p:sp>
+      <p:sp>
+        <p:nvSpPr>
+          <p:cNvPr id="7" name="Text 5"/>
+          <p:cNvSpPr/>
+          <p:nvPr/>
+        </p:nvSpPr>
+        <p:spPr>
+          <a:xfrm>
+            <a:off x="822960" y="2743200"/>
+            <a:ext cx="9875520" cy="1920240"/>
+          </a:xfrm>
+          <a:prstGeom prst="rect">
+            <a:avLst/>
+          </a:prstGeom>
+          <a:noFill/>
+          <a:ln/>
+        </p:spPr>
+        <p:txBody>
+          <a:bodyPr wrap="square" lIns="0" tIns="0" rIns="0" bIns="0" rtlCol="0" anchor="t"/>
+          <a:lstStyle/>
+          <a:p>
+            <a:pPr indent="0" marL="0">
+              <a:lnSpc>
+                <a:spcPts val="2800"/>
+              </a:lnSpc>
+              <a:buNone/>
+            </a:pPr>
+            <a:r>
+              <a:rPr lang="en-US" sz="2000" dirty="0">
+                <a:solidFill>
+                  <a:srgbClr val="24313F"/>
+                </a:solidFill>
+                <a:latin typeface="Georgia" pitchFamily="34" charset="0"/>
+                <a:ea typeface="Georgia" pitchFamily="34" charset="-122"/>
+                <a:cs typeface="Georgia" pitchFamily="34" charset="-120"/>
+              </a:rPr>
+              <a:t>CS9 is a peer blog audit against the mid-point checklist, the same instrument A2 is marked with. It is placed with working days to spare on purpose, so the deadline surprises nobody. A2 is submitted work, not a sitting: it is due the Monday after this lesson ends.</a:t>
+            </a:r>
+            <a:endParaRPr lang="en-US" sz="2000" dirty="0"/>
+          </a:p>
+        </p:txBody>
+      </p:sp>
+      <p:sp>
+        <p:nvSpPr>
+          <p:cNvPr id="8" name="Shape 6"/>
+          <p:cNvSpPr/>
+          <p:nvPr/>
+        </p:nvSpPr>
+        <p:spPr>
+          <a:xfrm>
+            <a:off x="822960" y="6382512"/>
+            <a:ext cx="10543032" cy="0"/>
+          </a:xfrm>
+          <a:prstGeom prst="line">
+            <a:avLst/>
+          </a:prstGeom>
+          <a:noFill/>
+          <a:ln w="9525">
+            <a:solidFill>
+              <a:srgbClr val="D9D4C4"/>
+            </a:solidFill>
+            <a:prstDash val="solid"/>
+          </a:ln>
+        </p:spPr>
+      </p:sp>
+      <p:sp>
+        <p:nvSpPr>
+          <p:cNvPr id="9" name="Text 7"/>
+          <p:cNvSpPr/>
+          <p:nvPr/>
+        </p:nvSpPr>
+        <p:spPr>
+          <a:xfrm>
+            <a:off x="822960" y="6419088"/>
+            <a:ext cx="7315200" cy="274320"/>
+          </a:xfrm>
+          <a:prstGeom prst="rect">
+            <a:avLst/>
+          </a:prstGeom>
+          <a:noFill/>
+          <a:ln/>
+        </p:spPr>
+        <p:txBody>
+          <a:bodyPr wrap="square" lIns="0" tIns="0" rIns="0" bIns="0" rtlCol="0" anchor="ctr"/>
+          <a:lstStyle/>
+          <a:p>
+            <a:pPr indent="0" marL="0">
+              <a:buNone/>
+            </a:pPr>
+            <a:r>
+              <a:rPr lang="en-US" sz="900" spc="150" kern="0" dirty="0">
+                <a:solidFill>
+                  <a:srgbClr val="7A7F72"/>
+                </a:solidFill>
+                <a:latin typeface="Arial" pitchFamily="34" charset="0"/>
+                <a:ea typeface="Arial" pitchFamily="34" charset="-122"/>
+                <a:cs typeface="Arial" pitchFamily="34" charset="-120"/>
+              </a:rPr>
+              <a:t>MEDIA STUDIES 9607 · SEMESTER I</a:t>
+            </a:r>
+            <a:endParaRPr lang="en-US" sz="900" dirty="0"/>
+          </a:p>
+        </p:txBody>
+      </p:sp>
+      <p:sp>
+        <p:nvSpPr>
+          <p:cNvPr id="10" name="Text 8"/>
+          <p:cNvSpPr/>
+          <p:nvPr/>
+        </p:nvSpPr>
+        <p:spPr>
+          <a:xfrm>
+            <a:off x="10268712" y="6355080"/>
+            <a:ext cx="1097280" cy="365760"/>
+          </a:xfrm>
+          <a:prstGeom prst="rect">
+            <a:avLst/>
+          </a:prstGeom>
+          <a:noFill/>
+          <a:ln/>
+        </p:spPr>
+        <p:txBody>
+          <a:bodyPr wrap="square" lIns="0" tIns="0" rIns="0" bIns="0" rtlCol="0" anchor="ctr"/>
+          <a:lstStyle/>
+          <a:p>
+            <a:pPr algn="r" indent="0" marL="0">
+              <a:buNone/>
+            </a:pPr>
+            <a:r>
+              <a:rPr lang="en-US" sz="1600" dirty="0">
+                <a:solidFill>
+                  <a:srgbClr val="A3C1AD"/>
+                </a:solidFill>
+                <a:latin typeface="Georgia" pitchFamily="34" charset="0"/>
+                <a:ea typeface="Georgia" pitchFamily="34" charset="-122"/>
+                <a:cs typeface="Georgia" pitchFamily="34" charset="-120"/>
+              </a:rPr>
+              <a:t>06</a:t>
+            </a:r>
+            <a:endParaRPr lang="en-US" sz="1600" dirty="0"/>
+          </a:p>
+        </p:txBody>
+      </p:sp>
+    </p:spTree>
+  </p:cSld>
+  <p:clrMapOvr>
+    <a:masterClrMapping/>
+  </p:clrMapOvr>
+</p:sld>
+</file>
+
+<file path=ppt/slides/slide13.xml><?xml version="1.0" encoding="utf-8"?>
+<p:sld xmlns:a="http://schemas.openxmlformats.org/drawingml/2006/main" xmlns:r="http://schemas.openxmlformats.org/officeDocument/2006/relationships" xmlns:p="http://schemas.openxmlformats.org/presentationml/2006/main">
+  <p:cSld name="Slide 13">
+    <p:bg>
+      <p:bgPr>
+        <a:solidFill>
+          <a:srgbClr val="FAF8F1"/>
+        </a:solidFill>
+      </p:bgPr>
+    </p:bg>
+    <p:spTree>
+      <p:nvGrpSpPr>
+        <p:cNvPr id="1" name=""/>
+        <p:cNvGrpSpPr/>
+        <p:nvPr/>
+      </p:nvGrpSpPr>
+      <p:grpSpPr>
+        <a:xfrm>
+          <a:off x="0" y="0"/>
+          <a:ext cx="0" cy="0"/>
+          <a:chOff x="0" y="0"/>
+          <a:chExt cx="0" cy="0"/>
+        </a:xfrm>
+      </p:grpSpPr>
+      <p:sp>
+        <p:nvSpPr>
+          <p:cNvPr id="2" name="Text 0"/>
+          <p:cNvSpPr/>
+          <p:nvPr/>
+        </p:nvSpPr>
+        <p:spPr>
+          <a:xfrm>
+            <a:off x="822960" y="457200"/>
+            <a:ext cx="6400800" cy="274320"/>
+          </a:xfrm>
+          <a:prstGeom prst="rect">
+            <a:avLst/>
+          </a:prstGeom>
+          <a:noFill/>
+          <a:ln/>
+        </p:spPr>
+        <p:txBody>
+          <a:bodyPr wrap="square" lIns="0" tIns="0" rIns="0" bIns="0" rtlCol="0" anchor="ctr"/>
+          <a:lstStyle/>
+          <a:p>
+            <a:pPr algn="l" indent="0" marL="0">
+              <a:buNone/>
+            </a:pPr>
+            <a:r>
+              <a:rPr lang="en-US" sz="1100" b="1" spc="250" kern="0" dirty="0">
+                <a:solidFill>
+                  <a:srgbClr val="4A6B5D"/>
+                </a:solidFill>
+                <a:latin typeface="Arial" pitchFamily="34" charset="0"/>
+                <a:ea typeface="Arial" pitchFamily="34" charset="-122"/>
+                <a:cs typeface="Arial" pitchFamily="34" charset="-120"/>
+              </a:rPr>
+              <a:t>FRIDAY · NARRATIVE UNDER LOAD</a:t>
+            </a:r>
+            <a:endParaRPr lang="en-US" sz="1100" dirty="0"/>
+          </a:p>
+        </p:txBody>
+      </p:sp>
+      <p:sp>
+        <p:nvSpPr>
+          <p:cNvPr id="3" name="Text 1"/>
+          <p:cNvSpPr/>
+          <p:nvPr/>
+        </p:nvSpPr>
+        <p:spPr>
+          <a:xfrm>
+            <a:off x="6793992" y="457200"/>
+            <a:ext cx="4572000" cy="274320"/>
+          </a:xfrm>
+          <a:prstGeom prst="rect">
+            <a:avLst/>
+          </a:prstGeom>
+          <a:noFill/>
+          <a:ln/>
+        </p:spPr>
+        <p:txBody>
+          <a:bodyPr wrap="square" lIns="0" tIns="0" rIns="0" bIns="0" rtlCol="0" anchor="ctr"/>
+          <a:lstStyle/>
+          <a:p>
+            <a:pPr algn="r" indent="0" marL="0">
+              <a:buNone/>
+            </a:pPr>
+            <a:r>
+              <a:rPr lang="en-US" sz="1100" b="1" spc="250" kern="0" dirty="0">
+                <a:solidFill>
+                  <a:srgbClr val="7A7F72"/>
+                </a:solidFill>
+                <a:latin typeface="Arial" pitchFamily="34" charset="0"/>
+                <a:ea typeface="Arial" pitchFamily="34" charset="-122"/>
+                <a:cs typeface="Arial" pitchFamily="34" charset="-120"/>
+              </a:rPr>
+              <a:t>THE STRAIN IS WHERE THE MARKS ARE</a:t>
+            </a:r>
+            <a:endParaRPr lang="en-US" sz="1100" dirty="0"/>
+          </a:p>
+        </p:txBody>
+      </p:sp>
+      <p:sp>
+        <p:nvSpPr>
+          <p:cNvPr id="4" name="Shape 2"/>
+          <p:cNvSpPr/>
+          <p:nvPr/>
+        </p:nvSpPr>
+        <p:spPr>
+          <a:xfrm>
+            <a:off x="822960" y="786384"/>
+            <a:ext cx="10543032" cy="0"/>
+          </a:xfrm>
+          <a:prstGeom prst="line">
+            <a:avLst/>
+          </a:prstGeom>
+          <a:noFill/>
+          <a:ln w="9525">
+            <a:solidFill>
+              <a:srgbClr val="D9D4C4"/>
+            </a:solidFill>
+            <a:prstDash val="solid"/>
+          </a:ln>
+        </p:spPr>
+      </p:sp>
+      <p:sp>
+        <p:nvSpPr>
+          <p:cNvPr id="5" name="Text 3"/>
+          <p:cNvSpPr/>
+          <p:nvPr/>
+        </p:nvSpPr>
+        <p:spPr>
+          <a:xfrm>
+            <a:off x="822960" y="960120"/>
+            <a:ext cx="6766560" cy="822960"/>
+          </a:xfrm>
+          <a:prstGeom prst="rect">
+            <a:avLst/>
+          </a:prstGeom>
+          <a:noFill/>
+          <a:ln/>
+        </p:spPr>
+        <p:txBody>
+          <a:bodyPr wrap="square" lIns="0" tIns="0" rIns="0" bIns="0" rtlCol="0" anchor="ctr"/>
+          <a:lstStyle/>
+          <a:p>
+            <a:pPr indent="0" marL="0">
+              <a:buNone/>
+            </a:pPr>
+            <a:r>
+              <a:rPr lang="en-US" sz="2800" dirty="0">
+                <a:solidFill>
+                  <a:srgbClr val="24313F"/>
+                </a:solidFill>
+                <a:latin typeface="Georgia" pitchFamily="34" charset="0"/>
+                <a:ea typeface="Georgia" pitchFamily="34" charset="-122"/>
+                <a:cs typeface="Georgia" pitchFamily="34" charset="-120"/>
+              </a:rPr>
+              <a:t>The exam sentence, rehearsed aloud</a:t>
+            </a:r>
+            <a:endParaRPr lang="en-US" sz="2800" dirty="0"/>
+          </a:p>
+        </p:txBody>
+      </p:sp>
+      <p:sp>
+        <p:nvSpPr>
+          <p:cNvPr id="6" name="Shape 4"/>
+          <p:cNvSpPr/>
+          <p:nvPr/>
+        </p:nvSpPr>
+        <p:spPr>
+          <a:xfrm>
+            <a:off x="822960" y="1828800"/>
+            <a:ext cx="6766560" cy="1371600"/>
+          </a:xfrm>
+          <a:prstGeom prst="rect">
+            <a:avLst/>
+          </a:prstGeom>
+          <a:solidFill>
+            <a:srgbClr val="E8EFE7"/>
+          </a:solidFill>
+          <a:ln/>
+        </p:spPr>
+      </p:sp>
+      <p:sp>
+        <p:nvSpPr>
+          <p:cNvPr id="7" name="Text 5"/>
+          <p:cNvSpPr/>
+          <p:nvPr/>
+        </p:nvSpPr>
+        <p:spPr>
+          <a:xfrm>
+            <a:off x="1051560" y="1920240"/>
+            <a:ext cx="6309360" cy="1188720"/>
+          </a:xfrm>
+          <a:prstGeom prst="rect">
+            <a:avLst/>
+          </a:prstGeom>
+          <a:noFill/>
+          <a:ln/>
+        </p:spPr>
+        <p:txBody>
+          <a:bodyPr wrap="square" lIns="0" tIns="0" rIns="0" bIns="0" rtlCol="0" anchor="ctr"/>
+          <a:lstStyle/>
+          <a:p>
+            <a:pPr indent="0" marL="0">
+              <a:lnSpc>
+                <a:spcPts val="2600"/>
+              </a:lnSpc>
+              <a:buNone/>
+            </a:pPr>
+            <a:r>
+              <a:rPr lang="en-US" sz="1900" i="1" dirty="0">
+                <a:solidFill>
+                  <a:srgbClr val="24313F"/>
+                </a:solidFill>
+                <a:latin typeface="Georgia" pitchFamily="34" charset="0"/>
+                <a:ea typeface="Georgia" pitchFamily="34" charset="-122"/>
+                <a:cs typeface="Georgia" pitchFamily="34" charset="-120"/>
+              </a:rPr>
+              <a:t>“Todorov's model illuminates X, although the extract complicates it by Y.”</a:t>
+            </a:r>
+            <a:endParaRPr lang="en-US" sz="1900" dirty="0"/>
+          </a:p>
+        </p:txBody>
+      </p:sp>
+      <p:sp>
+        <p:nvSpPr>
+          <p:cNvPr id="8" name="Text 6"/>
+          <p:cNvSpPr/>
+          <p:nvPr/>
+        </p:nvSpPr>
+        <p:spPr>
+          <a:xfrm>
+            <a:off x="822960" y="3429000"/>
+            <a:ext cx="6766560" cy="2103120"/>
+          </a:xfrm>
+          <a:prstGeom prst="rect">
+            <a:avLst/>
+          </a:prstGeom>
+          <a:noFill/>
+          <a:ln/>
+        </p:spPr>
+        <p:txBody>
+          <a:bodyPr wrap="square" lIns="0" tIns="0" rIns="0" bIns="0" rtlCol="0" anchor="t"/>
+          <a:lstStyle/>
+          <a:p>
+            <a:pPr indent="0" marL="0">
+              <a:lnSpc>
+                <a:spcPts val="2200"/>
+              </a:lnSpc>
+              <a:buNone/>
+            </a:pPr>
+            <a:r>
+              <a:rPr lang="en-US" sz="1550" dirty="0">
+                <a:solidFill>
+                  <a:srgbClr val="24313F"/>
+                </a:solidFill>
+                <a:latin typeface="Georgia" pitchFamily="34" charset="0"/>
+                <a:ea typeface="Georgia" pitchFamily="34" charset="-122"/>
+                <a:cs typeface="Georgia" pitchFamily="34" charset="-120"/>
+              </a:rPr>
+              <a:t>The second half is where the marks are. The strain log feeds Y: the false hero who is also the donor, the trailer that hides its villain on purpose, the film told out of order. Coursebook 3.2 closes on Dil Chahta Hai for exactly this reason: the arc is there, and the culture it runs in is not Hollywood's.</a:t>
+            </a:r>
+            <a:endParaRPr lang="en-US" sz="1550" dirty="0"/>
+          </a:p>
+        </p:txBody>
+      </p:sp>
+      <p:sp>
+        <p:nvSpPr>
+          <p:cNvPr id="9" name="Shape 7"/>
+          <p:cNvSpPr/>
+          <p:nvPr/>
+        </p:nvSpPr>
+        <p:spPr>
+          <a:xfrm>
+            <a:off x="7543800" y="1097280"/>
+            <a:ext cx="3822192" cy="3931920"/>
+          </a:xfrm>
+          <a:prstGeom prst="rect">
+            <a:avLst/>
+          </a:prstGeom>
+          <a:solidFill>
+            <a:srgbClr val="FAF8F1"/>
+          </a:solidFill>
+          <a:ln w="9525">
+            <a:solidFill>
+              <a:srgbClr val="D9D4C4"/>
+            </a:solidFill>
+            <a:prstDash val="solid"/>
+          </a:ln>
+        </p:spPr>
+      </p:sp>
+      <p:pic>
+        <p:nvPicPr>
+          <p:cNvPr id="10" name="Image 0" descr="/Users/dogan/Documents/Vaults/Courses/wiki/classes/media-studies/decks/_build/img/knives-family.jpg">    </p:cNvPr>
+          <p:cNvPicPr>
+            <a:picLocks noChangeAspect="1"/>
+          </p:cNvPicPr>
+          <p:nvPr/>
+        </p:nvPicPr>
+        <p:blipFill>
+          <a:blip r:embed="rId1"/>
+          <a:stretch>
+            <a:fillRect/>
+          </a:stretch>
+        </p:blipFill>
+        <p:spPr>
+          <a:xfrm>
+            <a:off x="7671816" y="2097869"/>
+            <a:ext cx="3566160" cy="1930741"/>
+          </a:xfrm>
+          <a:prstGeom prst="rect">
+            <a:avLst/>
+          </a:prstGeom>
+        </p:spPr>
+      </p:pic>
+      <p:sp>
+        <p:nvSpPr>
+          <p:cNvPr id="11" name="Text 8"/>
+          <p:cNvSpPr/>
+          <p:nvPr/>
+        </p:nvSpPr>
+        <p:spPr>
+          <a:xfrm>
+            <a:off x="7543800" y="5074920"/>
+            <a:ext cx="3822192" cy="548640"/>
+          </a:xfrm>
+          <a:prstGeom prst="rect">
+            <a:avLst/>
+          </a:prstGeom>
+          <a:noFill/>
+          <a:ln/>
+        </p:spPr>
+        <p:txBody>
+          <a:bodyPr wrap="square" lIns="0" tIns="0" rIns="0" bIns="0" rtlCol="0" anchor="t"/>
+          <a:lstStyle/>
+          <a:p>
+            <a:pPr algn="ctr" indent="0" marL="0">
+              <a:lnSpc>
+                <a:spcPts val="1300"/>
+              </a:lnSpc>
+              <a:buNone/>
+            </a:pPr>
+            <a:r>
+              <a:rPr lang="en-US" sz="1000" dirty="0">
+                <a:solidFill>
+                  <a:srgbClr val="7A7F72"/>
+                </a:solidFill>
+                <a:latin typeface="Arial" pitchFamily="34" charset="0"/>
+                <a:ea typeface="Arial" pitchFamily="34" charset="-122"/>
+                <a:cs typeface="Arial" pitchFamily="34" charset="-120"/>
+              </a:rPr>
+              <a:t>Knives Out (2019): Propp on a trailer. A withheld villain is a marketing decision.</a:t>
+            </a:r>
+            <a:endParaRPr lang="en-US" sz="1000" dirty="0"/>
+          </a:p>
+        </p:txBody>
+      </p:sp>
+      <p:sp>
+        <p:nvSpPr>
+          <p:cNvPr id="12" name="Shape 9"/>
+          <p:cNvSpPr/>
+          <p:nvPr/>
+        </p:nvSpPr>
+        <p:spPr>
+          <a:xfrm>
+            <a:off x="822960" y="6382512"/>
+            <a:ext cx="10543032" cy="0"/>
+          </a:xfrm>
+          <a:prstGeom prst="line">
+            <a:avLst/>
+          </a:prstGeom>
+          <a:noFill/>
+          <a:ln w="9525">
+            <a:solidFill>
+              <a:srgbClr val="D9D4C4"/>
+            </a:solidFill>
+            <a:prstDash val="solid"/>
+          </a:ln>
+        </p:spPr>
+      </p:sp>
+      <p:sp>
+        <p:nvSpPr>
+          <p:cNvPr id="13" name="Text 10"/>
+          <p:cNvSpPr/>
+          <p:nvPr/>
+        </p:nvSpPr>
+        <p:spPr>
+          <a:xfrm>
+            <a:off x="822960" y="6419088"/>
+            <a:ext cx="7315200" cy="274320"/>
+          </a:xfrm>
+          <a:prstGeom prst="rect">
+            <a:avLst/>
+          </a:prstGeom>
+          <a:noFill/>
+          <a:ln/>
+        </p:spPr>
+        <p:txBody>
+          <a:bodyPr wrap="square" lIns="0" tIns="0" rIns="0" bIns="0" rtlCol="0" anchor="ctr"/>
+          <a:lstStyle/>
+          <a:p>
+            <a:pPr indent="0" marL="0">
+              <a:buNone/>
+            </a:pPr>
+            <a:r>
+              <a:rPr lang="en-US" sz="900" spc="150" kern="0" dirty="0">
+                <a:solidFill>
+                  <a:srgbClr val="7A7F72"/>
+                </a:solidFill>
+                <a:latin typeface="Arial" pitchFamily="34" charset="0"/>
+                <a:ea typeface="Arial" pitchFamily="34" charset="-122"/>
+                <a:cs typeface="Arial" pitchFamily="34" charset="-120"/>
+              </a:rPr>
+              <a:t>MEDIA STUDIES 9607 · SEMESTER I</a:t>
+            </a:r>
+            <a:endParaRPr lang="en-US" sz="900" dirty="0"/>
+          </a:p>
+        </p:txBody>
+      </p:sp>
+      <p:sp>
+        <p:nvSpPr>
+          <p:cNvPr id="14" name="Text 11"/>
+          <p:cNvSpPr/>
+          <p:nvPr/>
+        </p:nvSpPr>
+        <p:spPr>
+          <a:xfrm>
+            <a:off x="10268712" y="6355080"/>
+            <a:ext cx="1097280" cy="365760"/>
+          </a:xfrm>
+          <a:prstGeom prst="rect">
+            <a:avLst/>
+          </a:prstGeom>
+          <a:noFill/>
+          <a:ln/>
+        </p:spPr>
+        <p:txBody>
+          <a:bodyPr wrap="square" lIns="0" tIns="0" rIns="0" bIns="0" rtlCol="0" anchor="ctr"/>
+          <a:lstStyle/>
+          <a:p>
+            <a:pPr algn="r" indent="0" marL="0">
+              <a:buNone/>
+            </a:pPr>
+            <a:r>
+              <a:rPr lang="en-US" sz="1600" dirty="0">
+                <a:solidFill>
+                  <a:srgbClr val="A3C1AD"/>
+                </a:solidFill>
+                <a:latin typeface="Georgia" pitchFamily="34" charset="0"/>
+                <a:ea typeface="Georgia" pitchFamily="34" charset="-122"/>
+                <a:cs typeface="Georgia" pitchFamily="34" charset="-120"/>
+              </a:rPr>
+              <a:t>07</a:t>
+            </a:r>
+            <a:endParaRPr lang="en-US" sz="1600" dirty="0"/>
+          </a:p>
+        </p:txBody>
+      </p:sp>
+    </p:spTree>
+  </p:cSld>
+  <p:clrMapOvr>
+    <a:masterClrMapping/>
+  </p:clrMapOvr>
+</p:sld>
+</file>
+
+<file path=ppt/slides/slide14.xml><?xml version="1.0" encoding="utf-8"?>
+<p:sld xmlns:a="http://schemas.openxmlformats.org/drawingml/2006/main" xmlns:r="http://schemas.openxmlformats.org/officeDocument/2006/relationships" xmlns:p="http://schemas.openxmlformats.org/presentationml/2006/main">
+  <p:cSld name="Slide 14">
     <p:bg>
       <p:bgPr>
         <a:solidFill>
@@ -3811,7 +4689,7 @@
                 <a:ea typeface="Georgia" pitchFamily="34" charset="-122"/>
                 <a:cs typeface="Georgia" pitchFamily="34" charset="-120"/>
               </a:rPr>
-              <a:t>06</a:t>
+              <a:t>08</a:t>
             </a:r>
             <a:endParaRPr lang="en-US" sz="1600" dirty="0"/>
           </a:p>
@@ -4153,8 +5031,8 @@
         </p:nvSpPr>
         <p:spPr>
           <a:xfrm>
-            <a:off x="822960" y="932688"/>
-            <a:ext cx="10543032" cy="640080"/>
+            <a:off x="822960" y="914400"/>
+            <a:ext cx="10543032" cy="548640"/>
           </a:xfrm>
           <a:prstGeom prst="rect">
             <a:avLst/>
@@ -4170,7 +5048,7 @@
               <a:buNone/>
             </a:pPr>
             <a:r>
-              <a:rPr lang="en-US" sz="3200" dirty="0">
+              <a:rPr lang="en-US" sz="3000" dirty="0">
                 <a:solidFill>
                   <a:srgbClr val="24313F"/>
                 </a:solidFill>
@@ -4180,7 +5058,7 @@
               </a:rPr>
               <a:t>Five stages, one movement</a:t>
             </a:r>
-            <a:endParaRPr lang="en-US" sz="3200" dirty="0"/>
+            <a:endParaRPr lang="en-US" sz="3000" dirty="0"/>
           </a:p>
         </p:txBody>
       </p:sp>
@@ -4192,7 +5070,7 @@
         </p:nvSpPr>
         <p:spPr>
           <a:xfrm>
-            <a:off x="1877263" y="3657600"/>
+            <a:off x="1877263" y="2212848"/>
             <a:ext cx="8434426" cy="0"/>
           </a:xfrm>
           <a:prstGeom prst="line">
@@ -4215,8 +5093,8 @@
         </p:nvSpPr>
         <p:spPr>
           <a:xfrm>
-            <a:off x="1602943" y="3383280"/>
-            <a:ext cx="548640" cy="548640"/>
+            <a:off x="1630375" y="1965960"/>
+            <a:ext cx="493776" cy="493776"/>
           </a:xfrm>
           <a:prstGeom prst="ellipse">
             <a:avLst/>
@@ -4234,7 +5112,7 @@
               <a:buNone/>
             </a:pPr>
             <a:r>
-              <a:rPr lang="en-US" sz="2200" dirty="0">
+              <a:rPr lang="en-US" sz="1900" dirty="0">
                 <a:solidFill>
                   <a:srgbClr val="FAF8F1"/>
                 </a:solidFill>
@@ -4244,7 +5122,7 @@
               </a:rPr>
               <a:t>1</a:t>
             </a:r>
-            <a:endParaRPr lang="en-US" sz="2200" dirty="0"/>
+            <a:endParaRPr lang="en-US" sz="1900" dirty="0"/>
           </a:p>
         </p:txBody>
       </p:sp>
@@ -4256,8 +5134,8 @@
         </p:nvSpPr>
         <p:spPr>
           <a:xfrm>
-            <a:off x="914400" y="2606040"/>
-            <a:ext cx="1925726" cy="640080"/>
+            <a:off x="896112" y="1316736"/>
+            <a:ext cx="1962302" cy="548640"/>
           </a:xfrm>
           <a:prstGeom prst="rect">
             <a:avLst/>
@@ -4273,7 +5151,7 @@
               <a:buNone/>
             </a:pPr>
             <a:r>
-              <a:rPr lang="en-US" sz="1700" dirty="0">
+              <a:rPr lang="en-US" sz="1550" dirty="0">
                 <a:solidFill>
                   <a:srgbClr val="24313F"/>
                 </a:solidFill>
@@ -4283,7 +5161,7 @@
               </a:rPr>
               <a:t>Equilibrium</a:t>
             </a:r>
-            <a:endParaRPr lang="en-US" sz="1700" dirty="0"/>
+            <a:endParaRPr lang="en-US" sz="1550" dirty="0"/>
           </a:p>
         </p:txBody>
       </p:sp>
@@ -4295,8 +5173,8 @@
         </p:nvSpPr>
         <p:spPr>
           <a:xfrm>
-            <a:off x="914400" y="4069080"/>
-            <a:ext cx="1925726" cy="457200"/>
+            <a:off x="896112" y="2542032"/>
+            <a:ext cx="1962302" cy="365760"/>
           </a:xfrm>
           <a:prstGeom prst="rect">
             <a:avLst/>
@@ -4312,7 +5190,7 @@
               <a:buNone/>
             </a:pPr>
             <a:r>
-              <a:rPr lang="en-US" sz="1150" i="1" dirty="0">
+              <a:rPr lang="en-US" sz="1050" i="1" dirty="0">
                 <a:solidFill>
                   <a:srgbClr val="7A7F72"/>
                 </a:solidFill>
@@ -4322,540 +5200,27 @@
               </a:rPr>
               <a:t>a stable world</a:t>
             </a:r>
-            <a:endParaRPr lang="en-US" sz="1150" dirty="0"/>
-          </a:p>
-        </p:txBody>
-      </p:sp>
-      <p:sp>
-        <p:nvSpPr>
-          <p:cNvPr id="10" name="Text 8"/>
-          <p:cNvSpPr/>
-          <p:nvPr/>
-        </p:nvSpPr>
-        <p:spPr>
-          <a:xfrm>
-            <a:off x="3711550" y="3383280"/>
-            <a:ext cx="548640" cy="548640"/>
-          </a:xfrm>
-          <a:prstGeom prst="ellipse">
+            <a:endParaRPr lang="en-US" sz="1050" dirty="0"/>
+          </a:p>
+        </p:txBody>
+      </p:sp>
+      <p:sp>
+        <p:nvSpPr>
+          <p:cNvPr id="10" name="Shape 8"/>
+          <p:cNvSpPr/>
+          <p:nvPr/>
+        </p:nvSpPr>
+        <p:spPr>
+          <a:xfrm>
+            <a:off x="914400" y="3063240"/>
+            <a:ext cx="1925726" cy="1481328"/>
+          </a:xfrm>
+          <a:prstGeom prst="rect">
             <a:avLst/>
           </a:prstGeom>
           <a:solidFill>
-            <a:srgbClr val="4A6B5D"/>
+            <a:srgbClr val="FAF8F1"/>
           </a:solidFill>
-          <a:ln/>
-        </p:spPr>
-        <p:txBody>
-          <a:bodyPr wrap="square" lIns="0" tIns="0" rIns="0" bIns="0" rtlCol="0" anchor="ctr"/>
-          <a:lstStyle/>
-          <a:p>
-            <a:pPr algn="ctr" indent="0" marL="0">
-              <a:buNone/>
-            </a:pPr>
-            <a:r>
-              <a:rPr lang="en-US" sz="2200" dirty="0">
-                <a:solidFill>
-                  <a:srgbClr val="FAF8F1"/>
-                </a:solidFill>
-                <a:latin typeface="Georgia" pitchFamily="34" charset="0"/>
-                <a:ea typeface="Georgia" pitchFamily="34" charset="-122"/>
-                <a:cs typeface="Georgia" pitchFamily="34" charset="-120"/>
-              </a:rPr>
-              <a:t>2</a:t>
-            </a:r>
-            <a:endParaRPr lang="en-US" sz="2200" dirty="0"/>
-          </a:p>
-        </p:txBody>
-      </p:sp>
-      <p:sp>
-        <p:nvSpPr>
-          <p:cNvPr id="11" name="Text 9"/>
-          <p:cNvSpPr/>
-          <p:nvPr/>
-        </p:nvSpPr>
-        <p:spPr>
-          <a:xfrm>
-            <a:off x="3023006" y="2606040"/>
-            <a:ext cx="1925726" cy="640080"/>
-          </a:xfrm>
-          <a:prstGeom prst="rect">
-            <a:avLst/>
-          </a:prstGeom>
-          <a:noFill/>
-          <a:ln/>
-        </p:spPr>
-        <p:txBody>
-          <a:bodyPr wrap="square" lIns="0" tIns="0" rIns="0" bIns="0" rtlCol="0" anchor="b"/>
-          <a:lstStyle/>
-          <a:p>
-            <a:pPr algn="ctr" indent="0" marL="0">
-              <a:buNone/>
-            </a:pPr>
-            <a:r>
-              <a:rPr lang="en-US" sz="1700" dirty="0">
-                <a:solidFill>
-                  <a:srgbClr val="24313F"/>
-                </a:solidFill>
-                <a:latin typeface="Georgia" pitchFamily="34" charset="0"/>
-                <a:ea typeface="Georgia" pitchFamily="34" charset="-122"/>
-                <a:cs typeface="Georgia" pitchFamily="34" charset="-120"/>
-              </a:rPr>
-              <a:t>Disruption</a:t>
-            </a:r>
-            <a:endParaRPr lang="en-US" sz="1700" dirty="0"/>
-          </a:p>
-        </p:txBody>
-      </p:sp>
-      <p:sp>
-        <p:nvSpPr>
-          <p:cNvPr id="12" name="Text 10"/>
-          <p:cNvSpPr/>
-          <p:nvPr/>
-        </p:nvSpPr>
-        <p:spPr>
-          <a:xfrm>
-            <a:off x="3023006" y="4069080"/>
-            <a:ext cx="1925726" cy="457200"/>
-          </a:xfrm>
-          <a:prstGeom prst="rect">
-            <a:avLst/>
-          </a:prstGeom>
-          <a:noFill/>
-          <a:ln/>
-        </p:spPr>
-        <p:txBody>
-          <a:bodyPr wrap="square" lIns="0" tIns="0" rIns="0" bIns="0" rtlCol="0" anchor="ctr"/>
-          <a:lstStyle/>
-          <a:p>
-            <a:pPr algn="ctr" indent="0" marL="0">
-              <a:buNone/>
-            </a:pPr>
-            <a:r>
-              <a:rPr lang="en-US" sz="1150" i="1" dirty="0">
-                <a:solidFill>
-                  <a:srgbClr val="7A7F72"/>
-                </a:solidFill>
-                <a:latin typeface="Arial" pitchFamily="34" charset="0"/>
-                <a:ea typeface="Arial" pitchFamily="34" charset="-122"/>
-                <a:cs typeface="Arial" pitchFamily="34" charset="-120"/>
-              </a:rPr>
-              <a:t>a force breaks it</a:t>
-            </a:r>
-            <a:endParaRPr lang="en-US" sz="1150" dirty="0"/>
-          </a:p>
-        </p:txBody>
-      </p:sp>
-      <p:sp>
-        <p:nvSpPr>
-          <p:cNvPr id="13" name="Text 11"/>
-          <p:cNvSpPr/>
-          <p:nvPr/>
-        </p:nvSpPr>
-        <p:spPr>
-          <a:xfrm>
-            <a:off x="5820156" y="3383280"/>
-            <a:ext cx="548640" cy="548640"/>
-          </a:xfrm>
-          <a:prstGeom prst="ellipse">
-            <a:avLst/>
-          </a:prstGeom>
-          <a:solidFill>
-            <a:srgbClr val="4A6B5D"/>
-          </a:solidFill>
-          <a:ln/>
-        </p:spPr>
-        <p:txBody>
-          <a:bodyPr wrap="square" lIns="0" tIns="0" rIns="0" bIns="0" rtlCol="0" anchor="ctr"/>
-          <a:lstStyle/>
-          <a:p>
-            <a:pPr algn="ctr" indent="0" marL="0">
-              <a:buNone/>
-            </a:pPr>
-            <a:r>
-              <a:rPr lang="en-US" sz="2200" dirty="0">
-                <a:solidFill>
-                  <a:srgbClr val="FAF8F1"/>
-                </a:solidFill>
-                <a:latin typeface="Georgia" pitchFamily="34" charset="0"/>
-                <a:ea typeface="Georgia" pitchFamily="34" charset="-122"/>
-                <a:cs typeface="Georgia" pitchFamily="34" charset="-120"/>
-              </a:rPr>
-              <a:t>3</a:t>
-            </a:r>
-            <a:endParaRPr lang="en-US" sz="2200" dirty="0"/>
-          </a:p>
-        </p:txBody>
-      </p:sp>
-      <p:sp>
-        <p:nvSpPr>
-          <p:cNvPr id="14" name="Text 12"/>
-          <p:cNvSpPr/>
-          <p:nvPr/>
-        </p:nvSpPr>
-        <p:spPr>
-          <a:xfrm>
-            <a:off x="5131613" y="2606040"/>
-            <a:ext cx="1925726" cy="640080"/>
-          </a:xfrm>
-          <a:prstGeom prst="rect">
-            <a:avLst/>
-          </a:prstGeom>
-          <a:noFill/>
-          <a:ln/>
-        </p:spPr>
-        <p:txBody>
-          <a:bodyPr wrap="square" lIns="0" tIns="0" rIns="0" bIns="0" rtlCol="0" anchor="b"/>
-          <a:lstStyle/>
-          <a:p>
-            <a:pPr algn="ctr" indent="0" marL="0">
-              <a:buNone/>
-            </a:pPr>
-            <a:r>
-              <a:rPr lang="en-US" sz="1700" dirty="0">
-                <a:solidFill>
-                  <a:srgbClr val="24313F"/>
-                </a:solidFill>
-                <a:latin typeface="Georgia" pitchFamily="34" charset="0"/>
-                <a:ea typeface="Georgia" pitchFamily="34" charset="-122"/>
-                <a:cs typeface="Georgia" pitchFamily="34" charset="-120"/>
-              </a:rPr>
-              <a:t>Recognition</a:t>
-            </a:r>
-            <a:endParaRPr lang="en-US" sz="1700" dirty="0"/>
-          </a:p>
-        </p:txBody>
-      </p:sp>
-      <p:sp>
-        <p:nvSpPr>
-          <p:cNvPr id="15" name="Text 13"/>
-          <p:cNvSpPr/>
-          <p:nvPr/>
-        </p:nvSpPr>
-        <p:spPr>
-          <a:xfrm>
-            <a:off x="5131613" y="4069080"/>
-            <a:ext cx="1925726" cy="457200"/>
-          </a:xfrm>
-          <a:prstGeom prst="rect">
-            <a:avLst/>
-          </a:prstGeom>
-          <a:noFill/>
-          <a:ln/>
-        </p:spPr>
-        <p:txBody>
-          <a:bodyPr wrap="square" lIns="0" tIns="0" rIns="0" bIns="0" rtlCol="0" anchor="ctr"/>
-          <a:lstStyle/>
-          <a:p>
-            <a:pPr algn="ctr" indent="0" marL="0">
-              <a:buNone/>
-            </a:pPr>
-            <a:r>
-              <a:rPr lang="en-US" sz="1150" i="1" dirty="0">
-                <a:solidFill>
-                  <a:srgbClr val="7A7F72"/>
-                </a:solidFill>
-                <a:latin typeface="Arial" pitchFamily="34" charset="0"/>
-                <a:ea typeface="Arial" pitchFamily="34" charset="-122"/>
-                <a:cs typeface="Arial" pitchFamily="34" charset="-120"/>
-              </a:rPr>
-              <a:t>the break is seen</a:t>
-            </a:r>
-            <a:endParaRPr lang="en-US" sz="1150" dirty="0"/>
-          </a:p>
-        </p:txBody>
-      </p:sp>
-      <p:sp>
-        <p:nvSpPr>
-          <p:cNvPr id="16" name="Text 14"/>
-          <p:cNvSpPr/>
-          <p:nvPr/>
-        </p:nvSpPr>
-        <p:spPr>
-          <a:xfrm>
-            <a:off x="7928762" y="3383280"/>
-            <a:ext cx="548640" cy="548640"/>
-          </a:xfrm>
-          <a:prstGeom prst="ellipse">
-            <a:avLst/>
-          </a:prstGeom>
-          <a:solidFill>
-            <a:srgbClr val="4A6B5D"/>
-          </a:solidFill>
-          <a:ln/>
-        </p:spPr>
-        <p:txBody>
-          <a:bodyPr wrap="square" lIns="0" tIns="0" rIns="0" bIns="0" rtlCol="0" anchor="ctr"/>
-          <a:lstStyle/>
-          <a:p>
-            <a:pPr algn="ctr" indent="0" marL="0">
-              <a:buNone/>
-            </a:pPr>
-            <a:r>
-              <a:rPr lang="en-US" sz="2200" dirty="0">
-                <a:solidFill>
-                  <a:srgbClr val="FAF8F1"/>
-                </a:solidFill>
-                <a:latin typeface="Georgia" pitchFamily="34" charset="0"/>
-                <a:ea typeface="Georgia" pitchFamily="34" charset="-122"/>
-                <a:cs typeface="Georgia" pitchFamily="34" charset="-120"/>
-              </a:rPr>
-              <a:t>4</a:t>
-            </a:r>
-            <a:endParaRPr lang="en-US" sz="2200" dirty="0"/>
-          </a:p>
-        </p:txBody>
-      </p:sp>
-      <p:sp>
-        <p:nvSpPr>
-          <p:cNvPr id="17" name="Text 15"/>
-          <p:cNvSpPr/>
-          <p:nvPr/>
-        </p:nvSpPr>
-        <p:spPr>
-          <a:xfrm>
-            <a:off x="7240219" y="2606040"/>
-            <a:ext cx="1925726" cy="640080"/>
-          </a:xfrm>
-          <a:prstGeom prst="rect">
-            <a:avLst/>
-          </a:prstGeom>
-          <a:noFill/>
-          <a:ln/>
-        </p:spPr>
-        <p:txBody>
-          <a:bodyPr wrap="square" lIns="0" tIns="0" rIns="0" bIns="0" rtlCol="0" anchor="b"/>
-          <a:lstStyle/>
-          <a:p>
-            <a:pPr algn="ctr" indent="0" marL="0">
-              <a:buNone/>
-            </a:pPr>
-            <a:r>
-              <a:rPr lang="en-US" sz="1700" dirty="0">
-                <a:solidFill>
-                  <a:srgbClr val="24313F"/>
-                </a:solidFill>
-                <a:latin typeface="Georgia" pitchFamily="34" charset="0"/>
-                <a:ea typeface="Georgia" pitchFamily="34" charset="-122"/>
-                <a:cs typeface="Georgia" pitchFamily="34" charset="-120"/>
-              </a:rPr>
-              <a:t>Repair</a:t>
-            </a:r>
-            <a:endParaRPr lang="en-US" sz="1700" dirty="0"/>
-          </a:p>
-        </p:txBody>
-      </p:sp>
-      <p:sp>
-        <p:nvSpPr>
-          <p:cNvPr id="18" name="Text 16"/>
-          <p:cNvSpPr/>
-          <p:nvPr/>
-        </p:nvSpPr>
-        <p:spPr>
-          <a:xfrm>
-            <a:off x="7240219" y="4069080"/>
-            <a:ext cx="1925726" cy="457200"/>
-          </a:xfrm>
-          <a:prstGeom prst="rect">
-            <a:avLst/>
-          </a:prstGeom>
-          <a:noFill/>
-          <a:ln/>
-        </p:spPr>
-        <p:txBody>
-          <a:bodyPr wrap="square" lIns="0" tIns="0" rIns="0" bIns="0" rtlCol="0" anchor="ctr"/>
-          <a:lstStyle/>
-          <a:p>
-            <a:pPr algn="ctr" indent="0" marL="0">
-              <a:buNone/>
-            </a:pPr>
-            <a:r>
-              <a:rPr lang="en-US" sz="1150" i="1" dirty="0">
-                <a:solidFill>
-                  <a:srgbClr val="7A7F72"/>
-                </a:solidFill>
-                <a:latin typeface="Arial" pitchFamily="34" charset="0"/>
-                <a:ea typeface="Arial" pitchFamily="34" charset="-122"/>
-                <a:cs typeface="Arial" pitchFamily="34" charset="-120"/>
-              </a:rPr>
-              <a:t>an attempt to fix</a:t>
-            </a:r>
-            <a:endParaRPr lang="en-US" sz="1150" dirty="0"/>
-          </a:p>
-        </p:txBody>
-      </p:sp>
-      <p:sp>
-        <p:nvSpPr>
-          <p:cNvPr id="19" name="Text 17"/>
-          <p:cNvSpPr/>
-          <p:nvPr/>
-        </p:nvSpPr>
-        <p:spPr>
-          <a:xfrm>
-            <a:off x="10037369" y="3383280"/>
-            <a:ext cx="548640" cy="548640"/>
-          </a:xfrm>
-          <a:prstGeom prst="ellipse">
-            <a:avLst/>
-          </a:prstGeom>
-          <a:solidFill>
-            <a:srgbClr val="4A6B5D"/>
-          </a:solidFill>
-          <a:ln/>
-        </p:spPr>
-        <p:txBody>
-          <a:bodyPr wrap="square" lIns="0" tIns="0" rIns="0" bIns="0" rtlCol="0" anchor="ctr"/>
-          <a:lstStyle/>
-          <a:p>
-            <a:pPr algn="ctr" indent="0" marL="0">
-              <a:buNone/>
-            </a:pPr>
-            <a:r>
-              <a:rPr lang="en-US" sz="2200" dirty="0">
-                <a:solidFill>
-                  <a:srgbClr val="FAF8F1"/>
-                </a:solidFill>
-                <a:latin typeface="Georgia" pitchFamily="34" charset="0"/>
-                <a:ea typeface="Georgia" pitchFamily="34" charset="-122"/>
-                <a:cs typeface="Georgia" pitchFamily="34" charset="-120"/>
-              </a:rPr>
-              <a:t>5</a:t>
-            </a:r>
-            <a:endParaRPr lang="en-US" sz="2200" dirty="0"/>
-          </a:p>
-        </p:txBody>
-      </p:sp>
-      <p:sp>
-        <p:nvSpPr>
-          <p:cNvPr id="20" name="Text 18"/>
-          <p:cNvSpPr/>
-          <p:nvPr/>
-        </p:nvSpPr>
-        <p:spPr>
-          <a:xfrm>
-            <a:off x="9348826" y="2606040"/>
-            <a:ext cx="1925726" cy="640080"/>
-          </a:xfrm>
-          <a:prstGeom prst="rect">
-            <a:avLst/>
-          </a:prstGeom>
-          <a:noFill/>
-          <a:ln/>
-        </p:spPr>
-        <p:txBody>
-          <a:bodyPr wrap="square" lIns="0" tIns="0" rIns="0" bIns="0" rtlCol="0" anchor="b"/>
-          <a:lstStyle/>
-          <a:p>
-            <a:pPr algn="ctr" indent="0" marL="0">
-              <a:buNone/>
-            </a:pPr>
-            <a:r>
-              <a:rPr lang="en-US" sz="1700" dirty="0">
-                <a:solidFill>
-                  <a:srgbClr val="24313F"/>
-                </a:solidFill>
-                <a:latin typeface="Georgia" pitchFamily="34" charset="0"/>
-                <a:ea typeface="Georgia" pitchFamily="34" charset="-122"/>
-                <a:cs typeface="Georgia" pitchFamily="34" charset="-120"/>
-              </a:rPr>
-              <a:t>New equilibrium</a:t>
-            </a:r>
-            <a:endParaRPr lang="en-US" sz="1700" dirty="0"/>
-          </a:p>
-        </p:txBody>
-      </p:sp>
-      <p:sp>
-        <p:nvSpPr>
-          <p:cNvPr id="21" name="Text 19"/>
-          <p:cNvSpPr/>
-          <p:nvPr/>
-        </p:nvSpPr>
-        <p:spPr>
-          <a:xfrm>
-            <a:off x="9348826" y="4069080"/>
-            <a:ext cx="1925726" cy="457200"/>
-          </a:xfrm>
-          <a:prstGeom prst="rect">
-            <a:avLst/>
-          </a:prstGeom>
-          <a:noFill/>
-          <a:ln/>
-        </p:spPr>
-        <p:txBody>
-          <a:bodyPr wrap="square" lIns="0" tIns="0" rIns="0" bIns="0" rtlCol="0" anchor="ctr"/>
-          <a:lstStyle/>
-          <a:p>
-            <a:pPr algn="ctr" indent="0" marL="0">
-              <a:buNone/>
-            </a:pPr>
-            <a:r>
-              <a:rPr lang="en-US" sz="1150" i="1" dirty="0">
-                <a:solidFill>
-                  <a:srgbClr val="7A7F72"/>
-                </a:solidFill>
-                <a:latin typeface="Arial" pitchFamily="34" charset="0"/>
-                <a:ea typeface="Arial" pitchFamily="34" charset="-122"/>
-                <a:cs typeface="Arial" pitchFamily="34" charset="-120"/>
-              </a:rPr>
-              <a:t>a changed calm</a:t>
-            </a:r>
-            <a:endParaRPr lang="en-US" sz="1150" dirty="0"/>
-          </a:p>
-        </p:txBody>
-      </p:sp>
-      <p:sp>
-        <p:nvSpPr>
-          <p:cNvPr id="22" name="Text 20"/>
-          <p:cNvSpPr/>
-          <p:nvPr/>
-        </p:nvSpPr>
-        <p:spPr>
-          <a:xfrm>
-            <a:off x="822960" y="5120640"/>
-            <a:ext cx="10543032" cy="457200"/>
-          </a:xfrm>
-          <a:prstGeom prst="rect">
-            <a:avLst/>
-          </a:prstGeom>
-          <a:noFill/>
-          <a:ln/>
-        </p:spPr>
-        <p:txBody>
-          <a:bodyPr wrap="square" lIns="0" tIns="0" rIns="0" bIns="0" rtlCol="0" anchor="ctr"/>
-          <a:lstStyle/>
-          <a:p>
-            <a:pPr indent="0" marL="0">
-              <a:buNone/>
-            </a:pPr>
-            <a:r>
-              <a:rPr lang="en-US" sz="1250" i="1" dirty="0">
-                <a:solidFill>
-                  <a:srgbClr val="7A7F72"/>
-                </a:solidFill>
-                <a:latin typeface="Arial" pitchFamily="34" charset="0"/>
-                <a:ea typeface="Arial" pitchFamily="34" charset="-122"/>
-                <a:cs typeface="Arial" pitchFamily="34" charset="-120"/>
-              </a:rPr>
-              <a:t>The caveat that earns marks: the model fails on non-linear narratives, and saying so is the top-band move.</a:t>
-            </a:r>
-            <a:endParaRPr lang="en-US" sz="1250" dirty="0"/>
-          </a:p>
-        </p:txBody>
-      </p:sp>
-      <p:sp>
-        <p:nvSpPr>
-          <p:cNvPr id="23" name="Shape 21"/>
-          <p:cNvSpPr/>
-          <p:nvPr/>
-        </p:nvSpPr>
-        <p:spPr>
-          <a:xfrm>
-            <a:off x="822960" y="6382512"/>
-            <a:ext cx="10543032" cy="0"/>
-          </a:xfrm>
-          <a:prstGeom prst="line">
-            <a:avLst/>
-          </a:prstGeom>
-          <a:noFill/>
           <a:ln w="9525">
             <a:solidFill>
               <a:srgbClr val="D9D4C4"/>
@@ -4864,32 +5229,136 @@
           </a:ln>
         </p:spPr>
       </p:sp>
-      <p:sp>
-        <p:nvSpPr>
-          <p:cNvPr id="24" name="Text 22"/>
-          <p:cNvSpPr/>
-          <p:nvPr/>
-        </p:nvSpPr>
-        <p:spPr>
-          <a:xfrm>
-            <a:off x="822960" y="6419088"/>
-            <a:ext cx="7315200" cy="274320"/>
-          </a:xfrm>
-          <a:prstGeom prst="rect">
-            <a:avLst/>
-          </a:prstGeom>
-          <a:noFill/>
-          <a:ln/>
-        </p:spPr>
-        <p:txBody>
-          <a:bodyPr wrap="square" lIns="0" tIns="0" rIns="0" bIns="0" rtlCol="0" anchor="ctr"/>
-          <a:lstStyle/>
-          <a:p>
-            <a:pPr indent="0" marL="0">
-              <a:buNone/>
-            </a:pPr>
-            <a:r>
-              <a:rPr lang="en-US" sz="900" spc="150" kern="0" dirty="0">
+      <p:pic>
+        <p:nvPicPr>
+          <p:cNvPr id="11" name="Image 0" descr="/Users/dogan/Documents/Vaults/Courses/wiki/classes/media-studies/decks/_build/img/toystory-staffmeeting.jpg">    </p:cNvPr>
+          <p:cNvPicPr>
+            <a:picLocks noChangeAspect="1"/>
+          </p:cNvPicPr>
+          <p:nvPr/>
+        </p:nvPicPr>
+        <p:blipFill>
+          <a:blip r:embed="rId1"/>
+          <a:stretch>
+            <a:fillRect/>
+          </a:stretch>
+        </p:blipFill>
+        <p:spPr>
+          <a:xfrm>
+            <a:off x="987552" y="3228928"/>
+            <a:ext cx="1779422" cy="1149952"/>
+          </a:xfrm>
+          <a:prstGeom prst="rect">
+            <a:avLst/>
+          </a:prstGeom>
+        </p:spPr>
+      </p:pic>
+      <p:sp>
+        <p:nvSpPr>
+          <p:cNvPr id="12" name="Text 9"/>
+          <p:cNvSpPr/>
+          <p:nvPr/>
+        </p:nvSpPr>
+        <p:spPr>
+          <a:xfrm>
+            <a:off x="3738982" y="1965960"/>
+            <a:ext cx="493776" cy="493776"/>
+          </a:xfrm>
+          <a:prstGeom prst="ellipse">
+            <a:avLst/>
+          </a:prstGeom>
+          <a:solidFill>
+            <a:srgbClr val="4A6B5D"/>
+          </a:solidFill>
+          <a:ln/>
+        </p:spPr>
+        <p:txBody>
+          <a:bodyPr wrap="square" lIns="0" tIns="0" rIns="0" bIns="0" rtlCol="0" anchor="ctr"/>
+          <a:lstStyle/>
+          <a:p>
+            <a:pPr algn="ctr" indent="0" marL="0">
+              <a:buNone/>
+            </a:pPr>
+            <a:r>
+              <a:rPr lang="en-US" sz="1900" dirty="0">
+                <a:solidFill>
+                  <a:srgbClr val="FAF8F1"/>
+                </a:solidFill>
+                <a:latin typeface="Georgia" pitchFamily="34" charset="0"/>
+                <a:ea typeface="Georgia" pitchFamily="34" charset="-122"/>
+                <a:cs typeface="Georgia" pitchFamily="34" charset="-120"/>
+              </a:rPr>
+              <a:t>2</a:t>
+            </a:r>
+            <a:endParaRPr lang="en-US" sz="1900" dirty="0"/>
+          </a:p>
+        </p:txBody>
+      </p:sp>
+      <p:sp>
+        <p:nvSpPr>
+          <p:cNvPr id="13" name="Text 10"/>
+          <p:cNvSpPr/>
+          <p:nvPr/>
+        </p:nvSpPr>
+        <p:spPr>
+          <a:xfrm>
+            <a:off x="3004718" y="1316736"/>
+            <a:ext cx="1962302" cy="548640"/>
+          </a:xfrm>
+          <a:prstGeom prst="rect">
+            <a:avLst/>
+          </a:prstGeom>
+          <a:noFill/>
+          <a:ln/>
+        </p:spPr>
+        <p:txBody>
+          <a:bodyPr wrap="square" lIns="0" tIns="0" rIns="0" bIns="0" rtlCol="0" anchor="b"/>
+          <a:lstStyle/>
+          <a:p>
+            <a:pPr algn="ctr" indent="0" marL="0">
+              <a:buNone/>
+            </a:pPr>
+            <a:r>
+              <a:rPr lang="en-US" sz="1550" dirty="0">
+                <a:solidFill>
+                  <a:srgbClr val="24313F"/>
+                </a:solidFill>
+                <a:latin typeface="Georgia" pitchFamily="34" charset="0"/>
+                <a:ea typeface="Georgia" pitchFamily="34" charset="-122"/>
+                <a:cs typeface="Georgia" pitchFamily="34" charset="-120"/>
+              </a:rPr>
+              <a:t>Disruption</a:t>
+            </a:r>
+            <a:endParaRPr lang="en-US" sz="1550" dirty="0"/>
+          </a:p>
+        </p:txBody>
+      </p:sp>
+      <p:sp>
+        <p:nvSpPr>
+          <p:cNvPr id="14" name="Text 11"/>
+          <p:cNvSpPr/>
+          <p:nvPr/>
+        </p:nvSpPr>
+        <p:spPr>
+          <a:xfrm>
+            <a:off x="3004718" y="2542032"/>
+            <a:ext cx="1962302" cy="365760"/>
+          </a:xfrm>
+          <a:prstGeom prst="rect">
+            <a:avLst/>
+          </a:prstGeom>
+          <a:noFill/>
+          <a:ln/>
+        </p:spPr>
+        <p:txBody>
+          <a:bodyPr wrap="square" lIns="0" tIns="0" rIns="0" bIns="0" rtlCol="0" anchor="ctr"/>
+          <a:lstStyle/>
+          <a:p>
+            <a:pPr algn="ctr" indent="0" marL="0">
+              <a:buNone/>
+            </a:pPr>
+            <a:r>
+              <a:rPr lang="en-US" sz="1050" i="1" dirty="0">
                 <a:solidFill>
                   <a:srgbClr val="7A7F72"/>
                 </a:solidFill>
@@ -4897,6 +5366,722 @@
                 <a:ea typeface="Arial" pitchFamily="34" charset="-122"/>
                 <a:cs typeface="Arial" pitchFamily="34" charset="-120"/>
               </a:rPr>
+              <a:t>a force breaks it</a:t>
+            </a:r>
+            <a:endParaRPr lang="en-US" sz="1050" dirty="0"/>
+          </a:p>
+        </p:txBody>
+      </p:sp>
+      <p:sp>
+        <p:nvSpPr>
+          <p:cNvPr id="15" name="Shape 12"/>
+          <p:cNvSpPr/>
+          <p:nvPr/>
+        </p:nvSpPr>
+        <p:spPr>
+          <a:xfrm>
+            <a:off x="3023006" y="3063240"/>
+            <a:ext cx="1925726" cy="1481328"/>
+          </a:xfrm>
+          <a:prstGeom prst="rect">
+            <a:avLst/>
+          </a:prstGeom>
+          <a:solidFill>
+            <a:srgbClr val="FAF8F1"/>
+          </a:solidFill>
+          <a:ln w="9525">
+            <a:solidFill>
+              <a:srgbClr val="D9D4C4"/>
+            </a:solidFill>
+            <a:prstDash val="solid"/>
+          </a:ln>
+        </p:spPr>
+      </p:sp>
+      <p:pic>
+        <p:nvPicPr>
+          <p:cNvPr id="16" name="Image 1" descr="/Users/dogan/Documents/Vaults/Courses/wiki/classes/media-studies/decks/_build/img/toystory-buzz-unwrapped.jpg">    </p:cNvPr>
+          <p:cNvPicPr>
+            <a:picLocks noChangeAspect="1"/>
+          </p:cNvPicPr>
+          <p:nvPr/>
+        </p:nvPicPr>
+        <p:blipFill>
+          <a:blip r:embed="rId2"/>
+          <a:stretch>
+            <a:fillRect/>
+          </a:stretch>
+        </p:blipFill>
+        <p:spPr>
+          <a:xfrm>
+            <a:off x="3096158" y="3228928"/>
+            <a:ext cx="1779422" cy="1149952"/>
+          </a:xfrm>
+          <a:prstGeom prst="rect">
+            <a:avLst/>
+          </a:prstGeom>
+        </p:spPr>
+      </p:pic>
+      <p:sp>
+        <p:nvSpPr>
+          <p:cNvPr id="17" name="Text 13"/>
+          <p:cNvSpPr/>
+          <p:nvPr/>
+        </p:nvSpPr>
+        <p:spPr>
+          <a:xfrm>
+            <a:off x="5847588" y="1965960"/>
+            <a:ext cx="493776" cy="493776"/>
+          </a:xfrm>
+          <a:prstGeom prst="ellipse">
+            <a:avLst/>
+          </a:prstGeom>
+          <a:solidFill>
+            <a:srgbClr val="4A6B5D"/>
+          </a:solidFill>
+          <a:ln/>
+        </p:spPr>
+        <p:txBody>
+          <a:bodyPr wrap="square" lIns="0" tIns="0" rIns="0" bIns="0" rtlCol="0" anchor="ctr"/>
+          <a:lstStyle/>
+          <a:p>
+            <a:pPr algn="ctr" indent="0" marL="0">
+              <a:buNone/>
+            </a:pPr>
+            <a:r>
+              <a:rPr lang="en-US" sz="1900" dirty="0">
+                <a:solidFill>
+                  <a:srgbClr val="FAF8F1"/>
+                </a:solidFill>
+                <a:latin typeface="Georgia" pitchFamily="34" charset="0"/>
+                <a:ea typeface="Georgia" pitchFamily="34" charset="-122"/>
+                <a:cs typeface="Georgia" pitchFamily="34" charset="-120"/>
+              </a:rPr>
+              <a:t>3</a:t>
+            </a:r>
+            <a:endParaRPr lang="en-US" sz="1900" dirty="0"/>
+          </a:p>
+        </p:txBody>
+      </p:sp>
+      <p:sp>
+        <p:nvSpPr>
+          <p:cNvPr id="18" name="Text 14"/>
+          <p:cNvSpPr/>
+          <p:nvPr/>
+        </p:nvSpPr>
+        <p:spPr>
+          <a:xfrm>
+            <a:off x="5113325" y="1316736"/>
+            <a:ext cx="1962302" cy="548640"/>
+          </a:xfrm>
+          <a:prstGeom prst="rect">
+            <a:avLst/>
+          </a:prstGeom>
+          <a:noFill/>
+          <a:ln/>
+        </p:spPr>
+        <p:txBody>
+          <a:bodyPr wrap="square" lIns="0" tIns="0" rIns="0" bIns="0" rtlCol="0" anchor="b"/>
+          <a:lstStyle/>
+          <a:p>
+            <a:pPr algn="ctr" indent="0" marL="0">
+              <a:buNone/>
+            </a:pPr>
+            <a:r>
+              <a:rPr lang="en-US" sz="1550" dirty="0">
+                <a:solidFill>
+                  <a:srgbClr val="24313F"/>
+                </a:solidFill>
+                <a:latin typeface="Georgia" pitchFamily="34" charset="0"/>
+                <a:ea typeface="Georgia" pitchFamily="34" charset="-122"/>
+                <a:cs typeface="Georgia" pitchFamily="34" charset="-120"/>
+              </a:rPr>
+              <a:t>Recognition</a:t>
+            </a:r>
+            <a:endParaRPr lang="en-US" sz="1550" dirty="0"/>
+          </a:p>
+        </p:txBody>
+      </p:sp>
+      <p:sp>
+        <p:nvSpPr>
+          <p:cNvPr id="19" name="Text 15"/>
+          <p:cNvSpPr/>
+          <p:nvPr/>
+        </p:nvSpPr>
+        <p:spPr>
+          <a:xfrm>
+            <a:off x="5113325" y="2542032"/>
+            <a:ext cx="1962302" cy="365760"/>
+          </a:xfrm>
+          <a:prstGeom prst="rect">
+            <a:avLst/>
+          </a:prstGeom>
+          <a:noFill/>
+          <a:ln/>
+        </p:spPr>
+        <p:txBody>
+          <a:bodyPr wrap="square" lIns="0" tIns="0" rIns="0" bIns="0" rtlCol="0" anchor="ctr"/>
+          <a:lstStyle/>
+          <a:p>
+            <a:pPr algn="ctr" indent="0" marL="0">
+              <a:buNone/>
+            </a:pPr>
+            <a:r>
+              <a:rPr lang="en-US" sz="1050" i="1" dirty="0">
+                <a:solidFill>
+                  <a:srgbClr val="7A7F72"/>
+                </a:solidFill>
+                <a:latin typeface="Arial" pitchFamily="34" charset="0"/>
+                <a:ea typeface="Arial" pitchFamily="34" charset="-122"/>
+                <a:cs typeface="Arial" pitchFamily="34" charset="-120"/>
+              </a:rPr>
+              <a:t>the break is seen</a:t>
+            </a:r>
+            <a:endParaRPr lang="en-US" sz="1050" dirty="0"/>
+          </a:p>
+        </p:txBody>
+      </p:sp>
+      <p:sp>
+        <p:nvSpPr>
+          <p:cNvPr id="20" name="Shape 16"/>
+          <p:cNvSpPr/>
+          <p:nvPr/>
+        </p:nvSpPr>
+        <p:spPr>
+          <a:xfrm>
+            <a:off x="5131613" y="3063240"/>
+            <a:ext cx="1925726" cy="1481328"/>
+          </a:xfrm>
+          <a:prstGeom prst="rect">
+            <a:avLst/>
+          </a:prstGeom>
+          <a:solidFill>
+            <a:srgbClr val="FAF8F1"/>
+          </a:solidFill>
+          <a:ln w="9525">
+            <a:solidFill>
+              <a:srgbClr val="D9D4C4"/>
+            </a:solidFill>
+            <a:prstDash val="solid"/>
+          </a:ln>
+        </p:spPr>
+      </p:sp>
+      <p:pic>
+        <p:nvPicPr>
+          <p:cNvPr id="21" name="Image 2" descr="/Users/dogan/Documents/Vaults/Courses/wiki/classes/media-studies/decks/_build/img/toystory-woody-window.jpg">    </p:cNvPr>
+          <p:cNvPicPr>
+            <a:picLocks noChangeAspect="1"/>
+          </p:cNvPicPr>
+          <p:nvPr/>
+        </p:nvPicPr>
+        <p:blipFill>
+          <a:blip r:embed="rId3"/>
+          <a:stretch>
+            <a:fillRect/>
+          </a:stretch>
+        </p:blipFill>
+        <p:spPr>
+          <a:xfrm>
+            <a:off x="5204765" y="3228928"/>
+            <a:ext cx="1779422" cy="1149952"/>
+          </a:xfrm>
+          <a:prstGeom prst="rect">
+            <a:avLst/>
+          </a:prstGeom>
+        </p:spPr>
+      </p:pic>
+      <p:sp>
+        <p:nvSpPr>
+          <p:cNvPr id="22" name="Text 17"/>
+          <p:cNvSpPr/>
+          <p:nvPr/>
+        </p:nvSpPr>
+        <p:spPr>
+          <a:xfrm>
+            <a:off x="7956194" y="1965960"/>
+            <a:ext cx="493776" cy="493776"/>
+          </a:xfrm>
+          <a:prstGeom prst="ellipse">
+            <a:avLst/>
+          </a:prstGeom>
+          <a:solidFill>
+            <a:srgbClr val="4A6B5D"/>
+          </a:solidFill>
+          <a:ln/>
+        </p:spPr>
+        <p:txBody>
+          <a:bodyPr wrap="square" lIns="0" tIns="0" rIns="0" bIns="0" rtlCol="0" anchor="ctr"/>
+          <a:lstStyle/>
+          <a:p>
+            <a:pPr algn="ctr" indent="0" marL="0">
+              <a:buNone/>
+            </a:pPr>
+            <a:r>
+              <a:rPr lang="en-US" sz="1900" dirty="0">
+                <a:solidFill>
+                  <a:srgbClr val="FAF8F1"/>
+                </a:solidFill>
+                <a:latin typeface="Georgia" pitchFamily="34" charset="0"/>
+                <a:ea typeface="Georgia" pitchFamily="34" charset="-122"/>
+                <a:cs typeface="Georgia" pitchFamily="34" charset="-120"/>
+              </a:rPr>
+              <a:t>4</a:t>
+            </a:r>
+            <a:endParaRPr lang="en-US" sz="1900" dirty="0"/>
+          </a:p>
+        </p:txBody>
+      </p:sp>
+      <p:sp>
+        <p:nvSpPr>
+          <p:cNvPr id="23" name="Text 18"/>
+          <p:cNvSpPr/>
+          <p:nvPr/>
+        </p:nvSpPr>
+        <p:spPr>
+          <a:xfrm>
+            <a:off x="7221931" y="1316736"/>
+            <a:ext cx="1962302" cy="548640"/>
+          </a:xfrm>
+          <a:prstGeom prst="rect">
+            <a:avLst/>
+          </a:prstGeom>
+          <a:noFill/>
+          <a:ln/>
+        </p:spPr>
+        <p:txBody>
+          <a:bodyPr wrap="square" lIns="0" tIns="0" rIns="0" bIns="0" rtlCol="0" anchor="b"/>
+          <a:lstStyle/>
+          <a:p>
+            <a:pPr algn="ctr" indent="0" marL="0">
+              <a:buNone/>
+            </a:pPr>
+            <a:r>
+              <a:rPr lang="en-US" sz="1550" dirty="0">
+                <a:solidFill>
+                  <a:srgbClr val="24313F"/>
+                </a:solidFill>
+                <a:latin typeface="Georgia" pitchFamily="34" charset="0"/>
+                <a:ea typeface="Georgia" pitchFamily="34" charset="-122"/>
+                <a:cs typeface="Georgia" pitchFamily="34" charset="-120"/>
+              </a:rPr>
+              <a:t>Repair</a:t>
+            </a:r>
+            <a:endParaRPr lang="en-US" sz="1550" dirty="0"/>
+          </a:p>
+        </p:txBody>
+      </p:sp>
+      <p:sp>
+        <p:nvSpPr>
+          <p:cNvPr id="24" name="Text 19"/>
+          <p:cNvSpPr/>
+          <p:nvPr/>
+        </p:nvSpPr>
+        <p:spPr>
+          <a:xfrm>
+            <a:off x="7221931" y="2542032"/>
+            <a:ext cx="1962302" cy="365760"/>
+          </a:xfrm>
+          <a:prstGeom prst="rect">
+            <a:avLst/>
+          </a:prstGeom>
+          <a:noFill/>
+          <a:ln/>
+        </p:spPr>
+        <p:txBody>
+          <a:bodyPr wrap="square" lIns="0" tIns="0" rIns="0" bIns="0" rtlCol="0" anchor="ctr"/>
+          <a:lstStyle/>
+          <a:p>
+            <a:pPr algn="ctr" indent="0" marL="0">
+              <a:buNone/>
+            </a:pPr>
+            <a:r>
+              <a:rPr lang="en-US" sz="1050" i="1" dirty="0">
+                <a:solidFill>
+                  <a:srgbClr val="7A7F72"/>
+                </a:solidFill>
+                <a:latin typeface="Arial" pitchFamily="34" charset="0"/>
+                <a:ea typeface="Arial" pitchFamily="34" charset="-122"/>
+                <a:cs typeface="Arial" pitchFamily="34" charset="-120"/>
+              </a:rPr>
+              <a:t>an attempt to fix</a:t>
+            </a:r>
+            <a:endParaRPr lang="en-US" sz="1050" dirty="0"/>
+          </a:p>
+        </p:txBody>
+      </p:sp>
+      <p:sp>
+        <p:nvSpPr>
+          <p:cNvPr id="25" name="Shape 20"/>
+          <p:cNvSpPr/>
+          <p:nvPr/>
+        </p:nvSpPr>
+        <p:spPr>
+          <a:xfrm>
+            <a:off x="7240219" y="3063240"/>
+            <a:ext cx="1925726" cy="1481328"/>
+          </a:xfrm>
+          <a:prstGeom prst="rect">
+            <a:avLst/>
+          </a:prstGeom>
+          <a:solidFill>
+            <a:srgbClr val="FAF8F1"/>
+          </a:solidFill>
+          <a:ln w="9525">
+            <a:solidFill>
+              <a:srgbClr val="D9D4C4"/>
+            </a:solidFill>
+            <a:prstDash val="solid"/>
+          </a:ln>
+        </p:spPr>
+      </p:sp>
+      <p:pic>
+        <p:nvPicPr>
+          <p:cNvPr id="26" name="Image 3" descr="/Users/dogan/Documents/Vaults/Courses/wiki/classes/media-studies/decks/_build/img/toystory-sids-room.jpg">    </p:cNvPr>
+          <p:cNvPicPr>
+            <a:picLocks noChangeAspect="1"/>
+          </p:cNvPicPr>
+          <p:nvPr/>
+        </p:nvPicPr>
+        <p:blipFill>
+          <a:blip r:embed="rId4"/>
+          <a:stretch>
+            <a:fillRect/>
+          </a:stretch>
+        </p:blipFill>
+        <p:spPr>
+          <a:xfrm>
+            <a:off x="7313371" y="3305295"/>
+            <a:ext cx="1779422" cy="997218"/>
+          </a:xfrm>
+          <a:prstGeom prst="rect">
+            <a:avLst/>
+          </a:prstGeom>
+        </p:spPr>
+      </p:pic>
+      <p:sp>
+        <p:nvSpPr>
+          <p:cNvPr id="27" name="Text 21"/>
+          <p:cNvSpPr/>
+          <p:nvPr/>
+        </p:nvSpPr>
+        <p:spPr>
+          <a:xfrm>
+            <a:off x="10064801" y="1965960"/>
+            <a:ext cx="493776" cy="493776"/>
+          </a:xfrm>
+          <a:prstGeom prst="ellipse">
+            <a:avLst/>
+          </a:prstGeom>
+          <a:solidFill>
+            <a:srgbClr val="4A6B5D"/>
+          </a:solidFill>
+          <a:ln/>
+        </p:spPr>
+        <p:txBody>
+          <a:bodyPr wrap="square" lIns="0" tIns="0" rIns="0" bIns="0" rtlCol="0" anchor="ctr"/>
+          <a:lstStyle/>
+          <a:p>
+            <a:pPr algn="ctr" indent="0" marL="0">
+              <a:buNone/>
+            </a:pPr>
+            <a:r>
+              <a:rPr lang="en-US" sz="1900" dirty="0">
+                <a:solidFill>
+                  <a:srgbClr val="FAF8F1"/>
+                </a:solidFill>
+                <a:latin typeface="Georgia" pitchFamily="34" charset="0"/>
+                <a:ea typeface="Georgia" pitchFamily="34" charset="-122"/>
+                <a:cs typeface="Georgia" pitchFamily="34" charset="-120"/>
+              </a:rPr>
+              <a:t>5</a:t>
+            </a:r>
+            <a:endParaRPr lang="en-US" sz="1900" dirty="0"/>
+          </a:p>
+        </p:txBody>
+      </p:sp>
+      <p:sp>
+        <p:nvSpPr>
+          <p:cNvPr id="28" name="Text 22"/>
+          <p:cNvSpPr/>
+          <p:nvPr/>
+        </p:nvSpPr>
+        <p:spPr>
+          <a:xfrm>
+            <a:off x="9330538" y="1316736"/>
+            <a:ext cx="1962302" cy="548640"/>
+          </a:xfrm>
+          <a:prstGeom prst="rect">
+            <a:avLst/>
+          </a:prstGeom>
+          <a:noFill/>
+          <a:ln/>
+        </p:spPr>
+        <p:txBody>
+          <a:bodyPr wrap="square" lIns="0" tIns="0" rIns="0" bIns="0" rtlCol="0" anchor="b"/>
+          <a:lstStyle/>
+          <a:p>
+            <a:pPr algn="ctr" indent="0" marL="0">
+              <a:buNone/>
+            </a:pPr>
+            <a:r>
+              <a:rPr lang="en-US" sz="1550" dirty="0">
+                <a:solidFill>
+                  <a:srgbClr val="24313F"/>
+                </a:solidFill>
+                <a:latin typeface="Georgia" pitchFamily="34" charset="0"/>
+                <a:ea typeface="Georgia" pitchFamily="34" charset="-122"/>
+                <a:cs typeface="Georgia" pitchFamily="34" charset="-120"/>
+              </a:rPr>
+              <a:t>New equilibrium</a:t>
+            </a:r>
+            <a:endParaRPr lang="en-US" sz="1550" dirty="0"/>
+          </a:p>
+        </p:txBody>
+      </p:sp>
+      <p:sp>
+        <p:nvSpPr>
+          <p:cNvPr id="29" name="Text 23"/>
+          <p:cNvSpPr/>
+          <p:nvPr/>
+        </p:nvSpPr>
+        <p:spPr>
+          <a:xfrm>
+            <a:off x="9330538" y="2542032"/>
+            <a:ext cx="1962302" cy="365760"/>
+          </a:xfrm>
+          <a:prstGeom prst="rect">
+            <a:avLst/>
+          </a:prstGeom>
+          <a:noFill/>
+          <a:ln/>
+        </p:spPr>
+        <p:txBody>
+          <a:bodyPr wrap="square" lIns="0" tIns="0" rIns="0" bIns="0" rtlCol="0" anchor="ctr"/>
+          <a:lstStyle/>
+          <a:p>
+            <a:pPr algn="ctr" indent="0" marL="0">
+              <a:buNone/>
+            </a:pPr>
+            <a:r>
+              <a:rPr lang="en-US" sz="1050" i="1" dirty="0">
+                <a:solidFill>
+                  <a:srgbClr val="7A7F72"/>
+                </a:solidFill>
+                <a:latin typeface="Arial" pitchFamily="34" charset="0"/>
+                <a:ea typeface="Arial" pitchFamily="34" charset="-122"/>
+                <a:cs typeface="Arial" pitchFamily="34" charset="-120"/>
+              </a:rPr>
+              <a:t>a changed calm</a:t>
+            </a:r>
+            <a:endParaRPr lang="en-US" sz="1050" dirty="0"/>
+          </a:p>
+        </p:txBody>
+      </p:sp>
+      <p:sp>
+        <p:nvSpPr>
+          <p:cNvPr id="30" name="Shape 24"/>
+          <p:cNvSpPr/>
+          <p:nvPr/>
+        </p:nvSpPr>
+        <p:spPr>
+          <a:xfrm>
+            <a:off x="9348826" y="3063240"/>
+            <a:ext cx="1925726" cy="1481328"/>
+          </a:xfrm>
+          <a:prstGeom prst="rect">
+            <a:avLst/>
+          </a:prstGeom>
+          <a:solidFill>
+            <a:srgbClr val="FAF8F1"/>
+          </a:solidFill>
+          <a:ln w="9525">
+            <a:solidFill>
+              <a:srgbClr val="D9D4C4"/>
+            </a:solidFill>
+            <a:prstDash val="solid"/>
+          </a:ln>
+        </p:spPr>
+      </p:sp>
+      <p:pic>
+        <p:nvPicPr>
+          <p:cNvPr id="31" name="Image 4" descr="/Users/dogan/Documents/Vaults/Courses/wiki/classes/media-studies/decks/_build/img/toystory-reunited.jpg">    </p:cNvPr>
+          <p:cNvPicPr>
+            <a:picLocks noChangeAspect="1"/>
+          </p:cNvPicPr>
+          <p:nvPr/>
+        </p:nvPicPr>
+        <p:blipFill>
+          <a:blip r:embed="rId5"/>
+          <a:stretch>
+            <a:fillRect/>
+          </a:stretch>
+        </p:blipFill>
+        <p:spPr>
+          <a:xfrm>
+            <a:off x="9421978" y="3306778"/>
+            <a:ext cx="1779422" cy="994252"/>
+          </a:xfrm>
+          <a:prstGeom prst="rect">
+            <a:avLst/>
+          </a:prstGeom>
+        </p:spPr>
+      </p:pic>
+      <p:sp>
+        <p:nvSpPr>
+          <p:cNvPr id="32" name="Text 25"/>
+          <p:cNvSpPr/>
+          <p:nvPr/>
+        </p:nvSpPr>
+        <p:spPr>
+          <a:xfrm>
+            <a:off x="822960" y="4681728"/>
+            <a:ext cx="10543032" cy="365760"/>
+          </a:xfrm>
+          <a:prstGeom prst="rect">
+            <a:avLst/>
+          </a:prstGeom>
+          <a:noFill/>
+          <a:ln/>
+        </p:spPr>
+        <p:txBody>
+          <a:bodyPr wrap="square" lIns="0" tIns="0" rIns="0" bIns="0" rtlCol="0" anchor="ctr"/>
+          <a:lstStyle/>
+          <a:p>
+            <a:pPr algn="ctr" indent="0" marL="0">
+              <a:buNone/>
+            </a:pPr>
+            <a:r>
+              <a:rPr lang="en-US" sz="1100" dirty="0">
+                <a:solidFill>
+                  <a:srgbClr val="7A7F72"/>
+                </a:solidFill>
+                <a:latin typeface="Arial" pitchFamily="34" charset="0"/>
+                <a:ea typeface="Arial" pitchFamily="34" charset="-122"/>
+                <a:cs typeface="Arial" pitchFamily="34" charset="-120"/>
+              </a:rPr>
+              <a:t>Toy Story (1995, Pixar/Disney): the coursebook's own worked arc, one frame per stage. Woody's world, Buzz's arrival, the window, Sid's room, the bed shared.</a:t>
+            </a:r>
+            <a:endParaRPr lang="en-US" sz="1100" dirty="0"/>
+          </a:p>
+        </p:txBody>
+      </p:sp>
+      <p:sp>
+        <p:nvSpPr>
+          <p:cNvPr id="33" name="Shape 26"/>
+          <p:cNvSpPr/>
+          <p:nvPr/>
+        </p:nvSpPr>
+        <p:spPr>
+          <a:xfrm>
+            <a:off x="822960" y="5257800"/>
+            <a:ext cx="914400" cy="0"/>
+          </a:xfrm>
+          <a:prstGeom prst="line">
+            <a:avLst/>
+          </a:prstGeom>
+          <a:noFill/>
+          <a:ln w="31750">
+            <a:solidFill>
+              <a:srgbClr val="8C3A38"/>
+            </a:solidFill>
+            <a:prstDash val="solid"/>
+          </a:ln>
+        </p:spPr>
+      </p:sp>
+      <p:sp>
+        <p:nvSpPr>
+          <p:cNvPr id="34" name="Text 27"/>
+          <p:cNvSpPr/>
+          <p:nvPr/>
+        </p:nvSpPr>
+        <p:spPr>
+          <a:xfrm>
+            <a:off x="822960" y="5413248"/>
+            <a:ext cx="10543032" cy="411480"/>
+          </a:xfrm>
+          <a:prstGeom prst="rect">
+            <a:avLst/>
+          </a:prstGeom>
+          <a:noFill/>
+          <a:ln/>
+        </p:spPr>
+        <p:txBody>
+          <a:bodyPr wrap="square" lIns="0" tIns="0" rIns="0" bIns="0" rtlCol="0" anchor="ctr"/>
+          <a:lstStyle/>
+          <a:p>
+            <a:pPr indent="0" marL="0">
+              <a:buNone/>
+            </a:pPr>
+            <a:r>
+              <a:rPr lang="en-US" sz="1250" i="1" dirty="0">
+                <a:solidFill>
+                  <a:srgbClr val="7A7F72"/>
+                </a:solidFill>
+                <a:latin typeface="Arial" pitchFamily="34" charset="0"/>
+                <a:ea typeface="Arial" pitchFamily="34" charset="-122"/>
+                <a:cs typeface="Arial" pitchFamily="34" charset="-120"/>
+              </a:rPr>
+              <a:t>The caveat that earns marks: the model fails on non-linear narratives, and saying so is the top-band move.</a:t>
+            </a:r>
+            <a:endParaRPr lang="en-US" sz="1250" dirty="0"/>
+          </a:p>
+        </p:txBody>
+      </p:sp>
+      <p:sp>
+        <p:nvSpPr>
+          <p:cNvPr id="35" name="Shape 28"/>
+          <p:cNvSpPr/>
+          <p:nvPr/>
+        </p:nvSpPr>
+        <p:spPr>
+          <a:xfrm>
+            <a:off x="822960" y="6382512"/>
+            <a:ext cx="10543032" cy="0"/>
+          </a:xfrm>
+          <a:prstGeom prst="line">
+            <a:avLst/>
+          </a:prstGeom>
+          <a:noFill/>
+          <a:ln w="9525">
+            <a:solidFill>
+              <a:srgbClr val="D9D4C4"/>
+            </a:solidFill>
+            <a:prstDash val="solid"/>
+          </a:ln>
+        </p:spPr>
+      </p:sp>
+      <p:sp>
+        <p:nvSpPr>
+          <p:cNvPr id="36" name="Text 29"/>
+          <p:cNvSpPr/>
+          <p:nvPr/>
+        </p:nvSpPr>
+        <p:spPr>
+          <a:xfrm>
+            <a:off x="822960" y="6419088"/>
+            <a:ext cx="7315200" cy="274320"/>
+          </a:xfrm>
+          <a:prstGeom prst="rect">
+            <a:avLst/>
+          </a:prstGeom>
+          <a:noFill/>
+          <a:ln/>
+        </p:spPr>
+        <p:txBody>
+          <a:bodyPr wrap="square" lIns="0" tIns="0" rIns="0" bIns="0" rtlCol="0" anchor="ctr"/>
+          <a:lstStyle/>
+          <a:p>
+            <a:pPr indent="0" marL="0">
+              <a:buNone/>
+            </a:pPr>
+            <a:r>
+              <a:rPr lang="en-US" sz="900" spc="150" kern="0" dirty="0">
+                <a:solidFill>
+                  <a:srgbClr val="7A7F72"/>
+                </a:solidFill>
+                <a:latin typeface="Arial" pitchFamily="34" charset="0"/>
+                <a:ea typeface="Arial" pitchFamily="34" charset="-122"/>
+                <a:cs typeface="Arial" pitchFamily="34" charset="-120"/>
+              </a:rPr>
               <a:t>MEDIA STUDIES 9607 · SEMESTER I</a:t>
             </a:r>
             <a:endParaRPr lang="en-US" sz="900" dirty="0"/>
@@ -4905,7 +6090,7 @@
       </p:sp>
       <p:sp>
         <p:nvSpPr>
-          <p:cNvPr id="25" name="Text 23"/>
+          <p:cNvPr id="37" name="Text 30"/>
           <p:cNvSpPr/>
           <p:nvPr/>
         </p:nvSpPr>
@@ -5041,7 +6226,7 @@
               <a:buNone/>
             </a:pPr>
             <a:r>
-              <a:rPr lang="en-US" sz="4200" dirty="0">
+              <a:rPr lang="en-US" sz="4000" dirty="0">
                 <a:solidFill>
                   <a:srgbClr val="24313F"/>
                 </a:solidFill>
@@ -5049,9 +6234,9 @@
                 <a:ea typeface="Georgia" pitchFamily="34" charset="-122"/>
                 <a:cs typeface="Georgia" pitchFamily="34" charset="-120"/>
               </a:rPr>
-              <a:t>The minimal complete plot can be seen as the shift from one equilibrium to another.</a:t>
-            </a:r>
-            <a:endParaRPr lang="en-US" sz="4200" dirty="0"/>
+              <a:t>The minimal complete plot consists in the passage from one equilibrium to another.</a:t>
+            </a:r>
+            <a:endParaRPr lang="en-US" sz="4000" dirty="0"/>
           </a:p>
         </p:txBody>
       </p:sp>
@@ -5111,7 +6296,7 @@
                 <a:ea typeface="Arial" pitchFamily="34" charset="-122"/>
                 <a:cs typeface="Arial" pitchFamily="34" charset="-120"/>
               </a:rPr>
-              <a:t>Tzvetan Todorov, The Poetics of Prose</a:t>
+              <a:t>after Tzvetan Todorov, Structural Analysis of Narrative, 1969</a:t>
             </a:r>
             <a:endParaRPr lang="en-US" sz="1400" dirty="0"/>
           </a:p>
@@ -5259,7 +6444,7 @@
         <p:spPr>
           <a:xfrm>
             <a:off x="822960" y="932688"/>
-            <a:ext cx="10543032" cy="640080"/>
+            <a:ext cx="7315200" cy="640080"/>
           </a:xfrm>
           <a:prstGeom prst="rect">
             <a:avLst/>
@@ -5298,7 +6483,7 @@
         <p:spPr>
           <a:xfrm>
             <a:off x="822960" y="1737360"/>
-            <a:ext cx="10543032" cy="0"/>
+            <a:ext cx="7315200" cy="0"/>
           </a:xfrm>
           <a:prstGeom prst="line">
             <a:avLst/>
@@ -5321,7 +6506,7 @@
         <p:spPr>
           <a:xfrm>
             <a:off x="822960" y="1737360"/>
-            <a:ext cx="2926080" cy="548640"/>
+            <a:ext cx="2468880" cy="512064"/>
           </a:xfrm>
           <a:prstGeom prst="rect">
             <a:avLst/>
@@ -5337,7 +6522,7 @@
               <a:buNone/>
             </a:pPr>
             <a:r>
-              <a:rPr lang="en-US" sz="1800" dirty="0">
+              <a:rPr lang="en-US" sz="1700" dirty="0">
                 <a:solidFill>
                   <a:srgbClr val="4A6B5D"/>
                 </a:solidFill>
@@ -5347,7 +6532,7 @@
               </a:rPr>
               <a:t>Hero</a:t>
             </a:r>
-            <a:endParaRPr lang="en-US" sz="1800" dirty="0"/>
+            <a:endParaRPr lang="en-US" sz="1700" dirty="0"/>
           </a:p>
         </p:txBody>
       </p:sp>
@@ -5359,8 +6544,8 @@
         </p:nvSpPr>
         <p:spPr>
           <a:xfrm>
-            <a:off x="3840480" y="1737360"/>
-            <a:ext cx="7498080" cy="548640"/>
+            <a:off x="3383280" y="1737360"/>
+            <a:ext cx="4754880" cy="512064"/>
           </a:xfrm>
           <a:prstGeom prst="rect">
             <a:avLst/>
@@ -5376,7 +6561,7 @@
               <a:buNone/>
             </a:pPr>
             <a:r>
-              <a:rPr lang="en-US" sz="1600" dirty="0">
+              <a:rPr lang="en-US" sz="1500" dirty="0">
                 <a:solidFill>
                   <a:srgbClr val="24313F"/>
                 </a:solidFill>
@@ -5386,7 +6571,7 @@
               </a:rPr>
               <a:t>seeks, and is tested</a:t>
             </a:r>
-            <a:endParaRPr lang="en-US" sz="1600" dirty="0"/>
+            <a:endParaRPr lang="en-US" sz="1500" dirty="0"/>
           </a:p>
         </p:txBody>
       </p:sp>
@@ -5398,8 +6583,8 @@
         </p:nvSpPr>
         <p:spPr>
           <a:xfrm>
-            <a:off x="822960" y="2286000"/>
-            <a:ext cx="10543032" cy="0"/>
+            <a:off x="822960" y="2249424"/>
+            <a:ext cx="7315200" cy="0"/>
           </a:xfrm>
           <a:prstGeom prst="line">
             <a:avLst/>
@@ -5421,8 +6606,8 @@
         </p:nvSpPr>
         <p:spPr>
           <a:xfrm>
-            <a:off x="822960" y="2286000"/>
-            <a:ext cx="2926080" cy="548640"/>
+            <a:off x="822960" y="2249424"/>
+            <a:ext cx="2468880" cy="512064"/>
           </a:xfrm>
           <a:prstGeom prst="rect">
             <a:avLst/>
@@ -5438,7 +6623,7 @@
               <a:buNone/>
             </a:pPr>
             <a:r>
-              <a:rPr lang="en-US" sz="1800" dirty="0">
+              <a:rPr lang="en-US" sz="1700" dirty="0">
                 <a:solidFill>
                   <a:srgbClr val="4A6B5D"/>
                 </a:solidFill>
@@ -5448,7 +6633,7 @@
               </a:rPr>
               <a:t>Villain</a:t>
             </a:r>
-            <a:endParaRPr lang="en-US" sz="1800" dirty="0"/>
+            <a:endParaRPr lang="en-US" sz="1700" dirty="0"/>
           </a:p>
         </p:txBody>
       </p:sp>
@@ -5460,8 +6645,8 @@
         </p:nvSpPr>
         <p:spPr>
           <a:xfrm>
-            <a:off x="3840480" y="2286000"/>
-            <a:ext cx="7498080" cy="548640"/>
+            <a:off x="3383280" y="2249424"/>
+            <a:ext cx="4754880" cy="512064"/>
           </a:xfrm>
           <a:prstGeom prst="rect">
             <a:avLst/>
@@ -5477,7 +6662,7 @@
               <a:buNone/>
             </a:pPr>
             <a:r>
-              <a:rPr lang="en-US" sz="1600" dirty="0">
+              <a:rPr lang="en-US" sz="1500" dirty="0">
                 <a:solidFill>
                   <a:srgbClr val="24313F"/>
                 </a:solidFill>
@@ -5487,7 +6672,7 @@
               </a:rPr>
               <a:t>struggles against the hero</a:t>
             </a:r>
-            <a:endParaRPr lang="en-US" sz="1600" dirty="0"/>
+            <a:endParaRPr lang="en-US" sz="1500" dirty="0"/>
           </a:p>
         </p:txBody>
       </p:sp>
@@ -5499,8 +6684,8 @@
         </p:nvSpPr>
         <p:spPr>
           <a:xfrm>
-            <a:off x="822960" y="2834640"/>
-            <a:ext cx="10543032" cy="0"/>
+            <a:off x="822960" y="2761488"/>
+            <a:ext cx="7315200" cy="0"/>
           </a:xfrm>
           <a:prstGeom prst="line">
             <a:avLst/>
@@ -5522,8 +6707,8 @@
         </p:nvSpPr>
         <p:spPr>
           <a:xfrm>
-            <a:off x="822960" y="2834640"/>
-            <a:ext cx="2926080" cy="548640"/>
+            <a:off x="822960" y="2761488"/>
+            <a:ext cx="2468880" cy="512064"/>
           </a:xfrm>
           <a:prstGeom prst="rect">
             <a:avLst/>
@@ -5539,7 +6724,7 @@
               <a:buNone/>
             </a:pPr>
             <a:r>
-              <a:rPr lang="en-US" sz="1800" dirty="0">
+              <a:rPr lang="en-US" sz="1700" dirty="0">
                 <a:solidFill>
                   <a:srgbClr val="4A6B5D"/>
                 </a:solidFill>
@@ -5549,7 +6734,7 @@
               </a:rPr>
               <a:t>Donor</a:t>
             </a:r>
-            <a:endParaRPr lang="en-US" sz="1800" dirty="0"/>
+            <a:endParaRPr lang="en-US" sz="1700" dirty="0"/>
           </a:p>
         </p:txBody>
       </p:sp>
@@ -5561,8 +6746,8 @@
         </p:nvSpPr>
         <p:spPr>
           <a:xfrm>
-            <a:off x="3840480" y="2834640"/>
-            <a:ext cx="7498080" cy="548640"/>
+            <a:off x="3383280" y="2761488"/>
+            <a:ext cx="4754880" cy="512064"/>
           </a:xfrm>
           <a:prstGeom prst="rect">
             <a:avLst/>
@@ -5578,7 +6763,7 @@
               <a:buNone/>
             </a:pPr>
             <a:r>
-              <a:rPr lang="en-US" sz="1600" dirty="0">
+              <a:rPr lang="en-US" sz="1500" dirty="0">
                 <a:solidFill>
                   <a:srgbClr val="24313F"/>
                 </a:solidFill>
@@ -5588,7 +6773,7 @@
               </a:rPr>
               <a:t>gives the hero a tool or gift</a:t>
             </a:r>
-            <a:endParaRPr lang="en-US" sz="1600" dirty="0"/>
+            <a:endParaRPr lang="en-US" sz="1500" dirty="0"/>
           </a:p>
         </p:txBody>
       </p:sp>
@@ -5600,8 +6785,8 @@
         </p:nvSpPr>
         <p:spPr>
           <a:xfrm>
-            <a:off x="822960" y="3383280"/>
-            <a:ext cx="10543032" cy="0"/>
+            <a:off x="822960" y="3273552"/>
+            <a:ext cx="7315200" cy="0"/>
           </a:xfrm>
           <a:prstGeom prst="line">
             <a:avLst/>
@@ -5623,8 +6808,8 @@
         </p:nvSpPr>
         <p:spPr>
           <a:xfrm>
-            <a:off x="822960" y="3383280"/>
-            <a:ext cx="2926080" cy="548640"/>
+            <a:off x="822960" y="3273552"/>
+            <a:ext cx="2468880" cy="512064"/>
           </a:xfrm>
           <a:prstGeom prst="rect">
             <a:avLst/>
@@ -5640,7 +6825,7 @@
               <a:buNone/>
             </a:pPr>
             <a:r>
-              <a:rPr lang="en-US" sz="1800" dirty="0">
+              <a:rPr lang="en-US" sz="1700" dirty="0">
                 <a:solidFill>
                   <a:srgbClr val="4A6B5D"/>
                 </a:solidFill>
@@ -5650,7 +6835,7 @@
               </a:rPr>
               <a:t>Helper</a:t>
             </a:r>
-            <a:endParaRPr lang="en-US" sz="1800" dirty="0"/>
+            <a:endParaRPr lang="en-US" sz="1700" dirty="0"/>
           </a:p>
         </p:txBody>
       </p:sp>
@@ -5662,8 +6847,8 @@
         </p:nvSpPr>
         <p:spPr>
           <a:xfrm>
-            <a:off x="3840480" y="3383280"/>
-            <a:ext cx="7498080" cy="548640"/>
+            <a:off x="3383280" y="3273552"/>
+            <a:ext cx="4754880" cy="512064"/>
           </a:xfrm>
           <a:prstGeom prst="rect">
             <a:avLst/>
@@ -5679,7 +6864,7 @@
               <a:buNone/>
             </a:pPr>
             <a:r>
-              <a:rPr lang="en-US" sz="1600" dirty="0">
+              <a:rPr lang="en-US" sz="1500" dirty="0">
                 <a:solidFill>
                   <a:srgbClr val="24313F"/>
                 </a:solidFill>
@@ -5689,7 +6874,7 @@
               </a:rPr>
               <a:t>aids the hero on the way</a:t>
             </a:r>
-            <a:endParaRPr lang="en-US" sz="1600" dirty="0"/>
+            <a:endParaRPr lang="en-US" sz="1500" dirty="0"/>
           </a:p>
         </p:txBody>
       </p:sp>
@@ -5701,8 +6886,8 @@
         </p:nvSpPr>
         <p:spPr>
           <a:xfrm>
-            <a:off x="822960" y="3931920"/>
-            <a:ext cx="10543032" cy="0"/>
+            <a:off x="822960" y="3785616"/>
+            <a:ext cx="7315200" cy="0"/>
           </a:xfrm>
           <a:prstGeom prst="line">
             <a:avLst/>
@@ -5724,8 +6909,8 @@
         </p:nvSpPr>
         <p:spPr>
           <a:xfrm>
-            <a:off x="822960" y="3931920"/>
-            <a:ext cx="2926080" cy="548640"/>
+            <a:off x="822960" y="3785616"/>
+            <a:ext cx="2468880" cy="512064"/>
           </a:xfrm>
           <a:prstGeom prst="rect">
             <a:avLst/>
@@ -5741,7 +6926,7 @@
               <a:buNone/>
             </a:pPr>
             <a:r>
-              <a:rPr lang="en-US" sz="1800" dirty="0">
+              <a:rPr lang="en-US" sz="1700" dirty="0">
                 <a:solidFill>
                   <a:srgbClr val="4A6B5D"/>
                 </a:solidFill>
@@ -5751,7 +6936,7 @@
               </a:rPr>
               <a:t>Princess</a:t>
             </a:r>
-            <a:endParaRPr lang="en-US" sz="1800" dirty="0"/>
+            <a:endParaRPr lang="en-US" sz="1700" dirty="0"/>
           </a:p>
         </p:txBody>
       </p:sp>
@@ -5763,8 +6948,8 @@
         </p:nvSpPr>
         <p:spPr>
           <a:xfrm>
-            <a:off x="3840480" y="3931920"/>
-            <a:ext cx="7498080" cy="548640"/>
+            <a:off x="3383280" y="3785616"/>
+            <a:ext cx="4754880" cy="512064"/>
           </a:xfrm>
           <a:prstGeom prst="rect">
             <a:avLst/>
@@ -5780,7 +6965,7 @@
               <a:buNone/>
             </a:pPr>
             <a:r>
-              <a:rPr lang="en-US" sz="1600" dirty="0">
+              <a:rPr lang="en-US" sz="1500" dirty="0">
                 <a:solidFill>
                   <a:srgbClr val="24313F"/>
                 </a:solidFill>
@@ -5790,7 +6975,7 @@
               </a:rPr>
               <a:t>the sought-for person or prize</a:t>
             </a:r>
-            <a:endParaRPr lang="en-US" sz="1600" dirty="0"/>
+            <a:endParaRPr lang="en-US" sz="1500" dirty="0"/>
           </a:p>
         </p:txBody>
       </p:sp>
@@ -5802,8 +6987,8 @@
         </p:nvSpPr>
         <p:spPr>
           <a:xfrm>
-            <a:off x="822960" y="4480560"/>
-            <a:ext cx="10543032" cy="0"/>
+            <a:off x="822960" y="4297680"/>
+            <a:ext cx="7315200" cy="0"/>
           </a:xfrm>
           <a:prstGeom prst="line">
             <a:avLst/>
@@ -5825,8 +7010,8 @@
         </p:nvSpPr>
         <p:spPr>
           <a:xfrm>
-            <a:off x="822960" y="4480560"/>
-            <a:ext cx="2926080" cy="548640"/>
+            <a:off x="822960" y="4297680"/>
+            <a:ext cx="2468880" cy="512064"/>
           </a:xfrm>
           <a:prstGeom prst="rect">
             <a:avLst/>
@@ -5842,7 +7027,7 @@
               <a:buNone/>
             </a:pPr>
             <a:r>
-              <a:rPr lang="en-US" sz="1800" dirty="0">
+              <a:rPr lang="en-US" sz="1700" dirty="0">
                 <a:solidFill>
                   <a:srgbClr val="4A6B5D"/>
                 </a:solidFill>
@@ -5852,7 +7037,7 @@
               </a:rPr>
               <a:t>Dispatcher</a:t>
             </a:r>
-            <a:endParaRPr lang="en-US" sz="1800" dirty="0"/>
+            <a:endParaRPr lang="en-US" sz="1700" dirty="0"/>
           </a:p>
         </p:txBody>
       </p:sp>
@@ -5864,8 +7049,8 @@
         </p:nvSpPr>
         <p:spPr>
           <a:xfrm>
-            <a:off x="3840480" y="4480560"/>
-            <a:ext cx="7498080" cy="548640"/>
+            <a:off x="3383280" y="4297680"/>
+            <a:ext cx="4754880" cy="512064"/>
           </a:xfrm>
           <a:prstGeom prst="rect">
             <a:avLst/>
@@ -5881,7 +7066,7 @@
               <a:buNone/>
             </a:pPr>
             <a:r>
-              <a:rPr lang="en-US" sz="1600" dirty="0">
+              <a:rPr lang="en-US" sz="1500" dirty="0">
                 <a:solidFill>
                   <a:srgbClr val="24313F"/>
                 </a:solidFill>
@@ -5891,7 +7076,7 @@
               </a:rPr>
               <a:t>sends the hero out</a:t>
             </a:r>
-            <a:endParaRPr lang="en-US" sz="1600" dirty="0"/>
+            <a:endParaRPr lang="en-US" sz="1500" dirty="0"/>
           </a:p>
         </p:txBody>
       </p:sp>
@@ -5903,8 +7088,8 @@
         </p:nvSpPr>
         <p:spPr>
           <a:xfrm>
-            <a:off x="822960" y="5029200"/>
-            <a:ext cx="10543032" cy="0"/>
+            <a:off x="822960" y="4809744"/>
+            <a:ext cx="7315200" cy="0"/>
           </a:xfrm>
           <a:prstGeom prst="line">
             <a:avLst/>
@@ -5926,8 +7111,8 @@
         </p:nvSpPr>
         <p:spPr>
           <a:xfrm>
-            <a:off x="822960" y="5029200"/>
-            <a:ext cx="2926080" cy="548640"/>
+            <a:off x="822960" y="4809744"/>
+            <a:ext cx="2468880" cy="512064"/>
           </a:xfrm>
           <a:prstGeom prst="rect">
             <a:avLst/>
@@ -5943,7 +7128,7 @@
               <a:buNone/>
             </a:pPr>
             <a:r>
-              <a:rPr lang="en-US" sz="1800" dirty="0">
+              <a:rPr lang="en-US" sz="1700" dirty="0">
                 <a:solidFill>
                   <a:srgbClr val="4A6B5D"/>
                 </a:solidFill>
@@ -5953,7 +7138,7 @@
               </a:rPr>
               <a:t>False hero</a:t>
             </a:r>
-            <a:endParaRPr lang="en-US" sz="1800" dirty="0"/>
+            <a:endParaRPr lang="en-US" sz="1700" dirty="0"/>
           </a:p>
         </p:txBody>
       </p:sp>
@@ -5965,8 +7150,8 @@
         </p:nvSpPr>
         <p:spPr>
           <a:xfrm>
-            <a:off x="3840480" y="5029200"/>
-            <a:ext cx="7498080" cy="548640"/>
+            <a:off x="3383280" y="4809744"/>
+            <a:ext cx="4754880" cy="512064"/>
           </a:xfrm>
           <a:prstGeom prst="rect">
             <a:avLst/>
@@ -5982,7 +7167,7 @@
               <a:buNone/>
             </a:pPr>
             <a:r>
-              <a:rPr lang="en-US" sz="1600" dirty="0">
+              <a:rPr lang="en-US" sz="1500" dirty="0">
                 <a:solidFill>
                   <a:srgbClr val="24313F"/>
                 </a:solidFill>
@@ -5992,7 +7177,7 @@
               </a:rPr>
               <a:t>claims the reward unearned</a:t>
             </a:r>
-            <a:endParaRPr lang="en-US" sz="1600" dirty="0"/>
+            <a:endParaRPr lang="en-US" sz="1500" dirty="0"/>
           </a:p>
         </p:txBody>
       </p:sp>
@@ -6004,8 +7189,8 @@
         </p:nvSpPr>
         <p:spPr>
           <a:xfrm>
-            <a:off x="822960" y="5577840"/>
-            <a:ext cx="10543032" cy="0"/>
+            <a:off x="822960" y="5321808"/>
+            <a:ext cx="7315200" cy="0"/>
           </a:xfrm>
           <a:prstGeom prst="line">
             <a:avLst/>
@@ -6021,61 +7206,21 @@
       </p:sp>
       <p:sp>
         <p:nvSpPr>
-          <p:cNvPr id="28" name="Text 26"/>
-          <p:cNvSpPr/>
-          <p:nvPr/>
-        </p:nvSpPr>
-        <p:spPr>
-          <a:xfrm>
-            <a:off x="822960" y="5715000"/>
-            <a:ext cx="10543032" cy="594360"/>
-          </a:xfrm>
-          <a:prstGeom prst="rect">
-            <a:avLst/>
-          </a:prstGeom>
-          <a:noFill/>
-          <a:ln/>
-        </p:spPr>
-        <p:txBody>
-          <a:bodyPr wrap="square" lIns="0" tIns="0" rIns="0" bIns="0" rtlCol="0" anchor="t"/>
-          <a:lstStyle/>
-          <a:p>
-            <a:pPr indent="0" marL="0">
-              <a:lnSpc>
-                <a:spcPts val="1600"/>
-              </a:lnSpc>
-              <a:buNone/>
-            </a:pPr>
-            <a:r>
-              <a:rPr lang="en-US" sz="1200" i="1" dirty="0">
-                <a:solidFill>
-                  <a:srgbClr val="7A7F72"/>
-                </a:solidFill>
-                <a:latin typeface="Arial" pitchFamily="34" charset="0"/>
-                <a:ea typeface="Arial" pitchFamily="34" charset="-122"/>
-                <a:cs typeface="Arial" pitchFamily="34" charset="-120"/>
-              </a:rPr>
-              <a:t>The caveat: folk tales, 1928; apply with judgment. Dealt as Sort Wars cards: rebuild a scrambled tale, then ask your own opening: who is your donor, and do you even have one?</a:t>
-            </a:r>
-            <a:endParaRPr lang="en-US" sz="1200" dirty="0"/>
-          </a:p>
-        </p:txBody>
-      </p:sp>
-      <p:sp>
-        <p:nvSpPr>
-          <p:cNvPr id="29" name="Shape 27"/>
-          <p:cNvSpPr/>
-          <p:nvPr/>
-        </p:nvSpPr>
-        <p:spPr>
-          <a:xfrm>
-            <a:off x="822960" y="6382512"/>
-            <a:ext cx="10543032" cy="0"/>
-          </a:xfrm>
-          <a:prstGeom prst="line">
-            <a:avLst/>
-          </a:prstGeom>
-          <a:noFill/>
+          <p:cNvPr id="28" name="Shape 26"/>
+          <p:cNvSpPr/>
+          <p:nvPr/>
+        </p:nvSpPr>
+        <p:spPr>
+          <a:xfrm>
+            <a:off x="8366760" y="1783080"/>
+            <a:ext cx="3017520" cy="2377440"/>
+          </a:xfrm>
+          <a:prstGeom prst="rect">
+            <a:avLst/>
+          </a:prstGeom>
+          <a:solidFill>
+            <a:srgbClr val="FAF8F1"/>
+          </a:solidFill>
           <a:ln w="9525">
             <a:solidFill>
               <a:srgbClr val="D9D4C4"/>
@@ -6084,32 +7229,59 @@
           </a:ln>
         </p:spPr>
       </p:sp>
-      <p:sp>
-        <p:nvSpPr>
-          <p:cNvPr id="30" name="Text 28"/>
-          <p:cNvSpPr/>
-          <p:nvPr/>
-        </p:nvSpPr>
-        <p:spPr>
-          <a:xfrm>
-            <a:off x="822960" y="6419088"/>
-            <a:ext cx="7315200" cy="274320"/>
-          </a:xfrm>
-          <a:prstGeom prst="rect">
-            <a:avLst/>
-          </a:prstGeom>
-          <a:noFill/>
-          <a:ln/>
-        </p:spPr>
-        <p:txBody>
-          <a:bodyPr wrap="square" lIns="0" tIns="0" rIns="0" bIns="0" rtlCol="0" anchor="ctr"/>
+      <p:pic>
+        <p:nvPicPr>
+          <p:cNvPr id="29" name="Image 0" descr="/Users/dogan/Documents/Vaults/Courses/wiki/classes/media-studies/decks/_build/img/toystory-buzz-unwrapped.jpg">    </p:cNvPr>
+          <p:cNvPicPr>
+            <a:picLocks noChangeAspect="1"/>
+          </p:cNvPicPr>
+          <p:nvPr/>
+        </p:nvPicPr>
+        <p:blipFill>
+          <a:blip r:embed="rId1"/>
+          <a:stretch>
+            <a:fillRect/>
+          </a:stretch>
+        </p:blipFill>
+        <p:spPr>
+          <a:xfrm>
+            <a:off x="8494776" y="2079494"/>
+            <a:ext cx="2761488" cy="1784612"/>
+          </a:xfrm>
+          <a:prstGeom prst="rect">
+            <a:avLst/>
+          </a:prstGeom>
+        </p:spPr>
+      </p:pic>
+      <p:sp>
+        <p:nvSpPr>
+          <p:cNvPr id="30" name="Text 27"/>
+          <p:cNvSpPr/>
+          <p:nvPr/>
+        </p:nvSpPr>
+        <p:spPr>
+          <a:xfrm>
+            <a:off x="8366760" y="4251960"/>
+            <a:ext cx="3017520" cy="1371600"/>
+          </a:xfrm>
+          <a:prstGeom prst="rect">
+            <a:avLst/>
+          </a:prstGeom>
+          <a:noFill/>
+          <a:ln/>
+        </p:spPr>
+        <p:txBody>
+          <a:bodyPr wrap="square" lIns="0" tIns="0" rIns="0" bIns="0" rtlCol="0" anchor="t"/>
           <a:lstStyle/>
           <a:p>
             <a:pPr indent="0" marL="0">
-              <a:buNone/>
-            </a:pPr>
-            <a:r>
-              <a:rPr lang="en-US" sz="900" spc="150" kern="0" dirty="0">
+              <a:lnSpc>
+                <a:spcPts val="1500"/>
+              </a:lnSpc>
+              <a:buNone/>
+            </a:pPr>
+            <a:r>
+              <a:rPr lang="en-US" sz="1100" i="1" dirty="0">
                 <a:solidFill>
                   <a:srgbClr val="7A7F72"/>
                 </a:solidFill>
@@ -6117,6 +7289,110 @@
                 <a:ea typeface="Arial" pitchFamily="34" charset="-122"/>
                 <a:cs typeface="Arial" pitchFamily="34" charset="-120"/>
               </a:rPr>
+              <a:t>Map this cast. Woody: hero, or the villain of act one? Buzz: prize, rival, helper? Where Propp refuses to sit still is the strain log's first entry.</a:t>
+            </a:r>
+            <a:endParaRPr lang="en-US" sz="1100" dirty="0"/>
+          </a:p>
+        </p:txBody>
+      </p:sp>
+      <p:sp>
+        <p:nvSpPr>
+          <p:cNvPr id="31" name="Text 28"/>
+          <p:cNvSpPr/>
+          <p:nvPr/>
+        </p:nvSpPr>
+        <p:spPr>
+          <a:xfrm>
+            <a:off x="822960" y="5458968"/>
+            <a:ext cx="7315200" cy="685800"/>
+          </a:xfrm>
+          <a:prstGeom prst="rect">
+            <a:avLst/>
+          </a:prstGeom>
+          <a:noFill/>
+          <a:ln/>
+        </p:spPr>
+        <p:txBody>
+          <a:bodyPr wrap="square" lIns="0" tIns="0" rIns="0" bIns="0" rtlCol="0" anchor="t"/>
+          <a:lstStyle/>
+          <a:p>
+            <a:pPr indent="0" marL="0">
+              <a:lnSpc>
+                <a:spcPts val="1500"/>
+              </a:lnSpc>
+              <a:buNone/>
+            </a:pPr>
+            <a:r>
+              <a:rPr lang="en-US" sz="1150" i="1" dirty="0">
+                <a:solidFill>
+                  <a:srgbClr val="7A7F72"/>
+                </a:solidFill>
+                <a:latin typeface="Arial" pitchFamily="34" charset="0"/>
+                <a:ea typeface="Arial" pitchFamily="34" charset="-122"/>
+                <a:cs typeface="Arial" pitchFamily="34" charset="-120"/>
+              </a:rPr>
+              <a:t>The caveat: folk tales, 1928; apply with judgment. Dealt as Sort Wars cards: rebuild a scrambled tale, then ask your own opening: who is your donor, and do you even have one?</a:t>
+            </a:r>
+            <a:endParaRPr lang="en-US" sz="1150" dirty="0"/>
+          </a:p>
+        </p:txBody>
+      </p:sp>
+      <p:sp>
+        <p:nvSpPr>
+          <p:cNvPr id="32" name="Shape 29"/>
+          <p:cNvSpPr/>
+          <p:nvPr/>
+        </p:nvSpPr>
+        <p:spPr>
+          <a:xfrm>
+            <a:off x="822960" y="6382512"/>
+            <a:ext cx="10543032" cy="0"/>
+          </a:xfrm>
+          <a:prstGeom prst="line">
+            <a:avLst/>
+          </a:prstGeom>
+          <a:noFill/>
+          <a:ln w="9525">
+            <a:solidFill>
+              <a:srgbClr val="D9D4C4"/>
+            </a:solidFill>
+            <a:prstDash val="solid"/>
+          </a:ln>
+        </p:spPr>
+      </p:sp>
+      <p:sp>
+        <p:nvSpPr>
+          <p:cNvPr id="33" name="Text 30"/>
+          <p:cNvSpPr/>
+          <p:nvPr/>
+        </p:nvSpPr>
+        <p:spPr>
+          <a:xfrm>
+            <a:off x="822960" y="6419088"/>
+            <a:ext cx="7315200" cy="274320"/>
+          </a:xfrm>
+          <a:prstGeom prst="rect">
+            <a:avLst/>
+          </a:prstGeom>
+          <a:noFill/>
+          <a:ln/>
+        </p:spPr>
+        <p:txBody>
+          <a:bodyPr wrap="square" lIns="0" tIns="0" rIns="0" bIns="0" rtlCol="0" anchor="ctr"/>
+          <a:lstStyle/>
+          <a:p>
+            <a:pPr indent="0" marL="0">
+              <a:buNone/>
+            </a:pPr>
+            <a:r>
+              <a:rPr lang="en-US" sz="900" spc="150" kern="0" dirty="0">
+                <a:solidFill>
+                  <a:srgbClr val="7A7F72"/>
+                </a:solidFill>
+                <a:latin typeface="Arial" pitchFamily="34" charset="0"/>
+                <a:ea typeface="Arial" pitchFamily="34" charset="-122"/>
+                <a:cs typeface="Arial" pitchFamily="34" charset="-120"/>
+              </a:rPr>
               <a:t>MEDIA STUDIES 9607 · SEMESTER I</a:t>
             </a:r>
             <a:endParaRPr lang="en-US" sz="900" dirty="0"/>
@@ -6125,7 +7401,7 @@
       </p:sp>
       <p:sp>
         <p:nvSpPr>
-          <p:cNvPr id="31" name="Text 29"/>
+          <p:cNvPr id="34" name="Text 31"/>
           <p:cNvSpPr/>
           <p:nvPr/>
         </p:nvSpPr>
@@ -6537,97 +7813,21 @@
       </p:sp>
       <p:sp>
         <p:nvSpPr>
-          <p:cNvPr id="5" name="Text 3"/>
-          <p:cNvSpPr/>
-          <p:nvPr/>
-        </p:nvSpPr>
-        <p:spPr>
-          <a:xfrm>
-            <a:off x="822960" y="1005840"/>
-            <a:ext cx="10543032" cy="731520"/>
-          </a:xfrm>
-          <a:prstGeom prst="rect">
-            <a:avLst/>
-          </a:prstGeom>
-          <a:noFill/>
-          <a:ln/>
-        </p:spPr>
-        <p:txBody>
-          <a:bodyPr wrap="square" lIns="0" tIns="0" rIns="0" bIns="0" rtlCol="0" anchor="ctr"/>
-          <a:lstStyle/>
-          <a:p>
-            <a:pPr indent="0" marL="0">
-              <a:buNone/>
-            </a:pPr>
-            <a:r>
-              <a:rPr lang="en-US" sz="3600" dirty="0">
-                <a:solidFill>
-                  <a:srgbClr val="24313F"/>
-                </a:solidFill>
-                <a:latin typeface="Georgia" pitchFamily="34" charset="0"/>
-                <a:ea typeface="Georgia" pitchFamily="34" charset="-122"/>
-                <a:cs typeface="Georgia" pitchFamily="34" charset="-120"/>
-              </a:rPr>
-              <a:t>What a text owes you</a:t>
-            </a:r>
-            <a:endParaRPr lang="en-US" sz="3600" dirty="0"/>
-          </a:p>
-        </p:txBody>
-      </p:sp>
-      <p:sp>
-        <p:nvSpPr>
-          <p:cNvPr id="6" name="Text 4"/>
-          <p:cNvSpPr/>
-          <p:nvPr/>
-        </p:nvSpPr>
-        <p:spPr>
-          <a:xfrm>
-            <a:off x="822960" y="2011680"/>
-            <a:ext cx="4846320" cy="502920"/>
-          </a:xfrm>
-          <a:prstGeom prst="rect">
-            <a:avLst/>
-          </a:prstGeom>
-          <a:noFill/>
-          <a:ln/>
-        </p:spPr>
-        <p:txBody>
-          <a:bodyPr wrap="square" lIns="0" tIns="0" rIns="0" bIns="0" rtlCol="0" anchor="ctr"/>
-          <a:lstStyle/>
-          <a:p>
-            <a:pPr indent="0" marL="0">
-              <a:buNone/>
-            </a:pPr>
-            <a:r>
-              <a:rPr lang="en-US" sz="2400" dirty="0">
-                <a:solidFill>
-                  <a:srgbClr val="4A6B5D"/>
-                </a:solidFill>
-                <a:latin typeface="Georgia" pitchFamily="34" charset="0"/>
-                <a:ea typeface="Georgia" pitchFamily="34" charset="-122"/>
-                <a:cs typeface="Georgia" pitchFamily="34" charset="-120"/>
-              </a:rPr>
-              <a:t>Enigma code</a:t>
-            </a:r>
-            <a:endParaRPr lang="en-US" sz="2400" dirty="0"/>
-          </a:p>
-        </p:txBody>
-      </p:sp>
-      <p:sp>
-        <p:nvSpPr>
-          <p:cNvPr id="7" name="Shape 5"/>
-          <p:cNvSpPr/>
-          <p:nvPr/>
-        </p:nvSpPr>
-        <p:spPr>
-          <a:xfrm>
-            <a:off x="822960" y="2560320"/>
-            <a:ext cx="4754880" cy="0"/>
-          </a:xfrm>
-          <a:prstGeom prst="line">
-            <a:avLst/>
-          </a:prstGeom>
-          <a:noFill/>
+          <p:cNvPr id="5" name="Shape 3"/>
+          <p:cNvSpPr/>
+          <p:nvPr/>
+        </p:nvSpPr>
+        <p:spPr>
+          <a:xfrm>
+            <a:off x="822960" y="1097280"/>
+            <a:ext cx="5088636" cy="2743200"/>
+          </a:xfrm>
+          <a:prstGeom prst="rect">
+            <a:avLst/>
+          </a:prstGeom>
+          <a:solidFill>
+            <a:srgbClr val="FAF8F1"/>
+          </a:solidFill>
           <a:ln w="9525">
             <a:solidFill>
               <a:srgbClr val="D9D4C4"/>
@@ -6636,102 +7836,47 @@
           </a:ln>
         </p:spPr>
       </p:sp>
-      <p:sp>
-        <p:nvSpPr>
-          <p:cNvPr id="8" name="Text 6"/>
-          <p:cNvSpPr/>
-          <p:nvPr/>
-        </p:nvSpPr>
-        <p:spPr>
-          <a:xfrm>
-            <a:off x="822960" y="2697480"/>
-            <a:ext cx="4846320" cy="2377440"/>
-          </a:xfrm>
-          <a:prstGeom prst="rect">
-            <a:avLst/>
-          </a:prstGeom>
-          <a:noFill/>
-          <a:ln/>
-        </p:spPr>
-        <p:txBody>
-          <a:bodyPr wrap="square" lIns="0" tIns="0" rIns="0" bIns="0" rtlCol="0" anchor="t"/>
-          <a:lstStyle/>
-          <a:p>
-            <a:pPr indent="0" marL="0">
-              <a:lnSpc>
-                <a:spcPts val="2400"/>
-              </a:lnSpc>
-              <a:buNone/>
-            </a:pPr>
-            <a:r>
-              <a:rPr lang="en-US" sz="1700" dirty="0">
-                <a:solidFill>
-                  <a:srgbClr val="24313F"/>
-                </a:solidFill>
-                <a:latin typeface="Georgia" pitchFamily="34" charset="0"/>
-                <a:ea typeface="Georgia" pitchFamily="34" charset="-122"/>
-                <a:cs typeface="Georgia" pitchFamily="34" charset="-120"/>
-              </a:rPr>
-              <a:t>The question a text plants and refuses to answer yet. It creates the debt that keeps you watching: who did it, what is behind the door, will they survive?</a:t>
-            </a:r>
-            <a:endParaRPr lang="en-US" sz="1700" dirty="0"/>
-          </a:p>
-        </p:txBody>
-      </p:sp>
-      <p:sp>
-        <p:nvSpPr>
-          <p:cNvPr id="9" name="Text 7"/>
-          <p:cNvSpPr/>
-          <p:nvPr/>
-        </p:nvSpPr>
-        <p:spPr>
-          <a:xfrm>
-            <a:off x="6309360" y="2011680"/>
-            <a:ext cx="4846320" cy="502920"/>
-          </a:xfrm>
-          <a:prstGeom prst="rect">
-            <a:avLst/>
-          </a:prstGeom>
-          <a:noFill/>
-          <a:ln/>
-        </p:spPr>
-        <p:txBody>
-          <a:bodyPr wrap="square" lIns="0" tIns="0" rIns="0" bIns="0" rtlCol="0" anchor="ctr"/>
-          <a:lstStyle/>
-          <a:p>
-            <a:pPr indent="0" marL="0">
-              <a:buNone/>
-            </a:pPr>
-            <a:r>
-              <a:rPr lang="en-US" sz="2400" dirty="0">
-                <a:solidFill>
-                  <a:srgbClr val="5C7A6B"/>
-                </a:solidFill>
-                <a:latin typeface="Georgia" pitchFamily="34" charset="0"/>
-                <a:ea typeface="Georgia" pitchFamily="34" charset="-122"/>
-                <a:cs typeface="Georgia" pitchFamily="34" charset="-120"/>
-              </a:rPr>
-              <a:t>Action code</a:t>
-            </a:r>
-            <a:endParaRPr lang="en-US" sz="2400" dirty="0"/>
-          </a:p>
-        </p:txBody>
-      </p:sp>
-      <p:sp>
-        <p:nvSpPr>
-          <p:cNvPr id="10" name="Shape 8"/>
-          <p:cNvSpPr/>
-          <p:nvPr/>
-        </p:nvSpPr>
-        <p:spPr>
-          <a:xfrm>
-            <a:off x="6309360" y="2560320"/>
-            <a:ext cx="4754880" cy="0"/>
-          </a:xfrm>
-          <a:prstGeom prst="line">
-            <a:avLst/>
-          </a:prstGeom>
-          <a:noFill/>
+      <p:pic>
+        <p:nvPicPr>
+          <p:cNvPr id="6" name="Image 0" descr="/Users/dogan/Documents/Vaults/Courses/wiki/classes/media-studies/decks/_build/img/lupin-vitrine.jpg">    </p:cNvPr>
+          <p:cNvPicPr>
+            <a:picLocks noChangeAspect="1"/>
+          </p:cNvPicPr>
+          <p:nvPr/>
+        </p:nvPicPr>
+        <p:blipFill>
+          <a:blip r:embed="rId1"/>
+          <a:stretch>
+            <a:fillRect/>
+          </a:stretch>
+        </p:blipFill>
+        <p:spPr>
+          <a:xfrm>
+            <a:off x="1501902" y="1225296"/>
+            <a:ext cx="3730752" cy="2487168"/>
+          </a:xfrm>
+          <a:prstGeom prst="rect">
+            <a:avLst/>
+          </a:prstGeom>
+        </p:spPr>
+      </p:pic>
+      <p:sp>
+        <p:nvSpPr>
+          <p:cNvPr id="7" name="Shape 4"/>
+          <p:cNvSpPr/>
+          <p:nvPr/>
+        </p:nvSpPr>
+        <p:spPr>
+          <a:xfrm>
+            <a:off x="6277356" y="1097280"/>
+            <a:ext cx="5088636" cy="2743200"/>
+          </a:xfrm>
+          <a:prstGeom prst="rect">
+            <a:avLst/>
+          </a:prstGeom>
+          <a:solidFill>
+            <a:srgbClr val="FAF8F1"/>
+          </a:solidFill>
           <a:ln w="9525">
             <a:solidFill>
               <a:srgbClr val="D9D4C4"/>
@@ -6740,51 +7885,273 @@
           </a:ln>
         </p:spPr>
       </p:sp>
-      <p:sp>
-        <p:nvSpPr>
-          <p:cNvPr id="11" name="Text 9"/>
-          <p:cNvSpPr/>
-          <p:nvPr/>
-        </p:nvSpPr>
-        <p:spPr>
-          <a:xfrm>
-            <a:off x="6309360" y="2697480"/>
-            <a:ext cx="4846320" cy="2377440"/>
-          </a:xfrm>
-          <a:prstGeom prst="rect">
-            <a:avLst/>
-          </a:prstGeom>
-          <a:noFill/>
-          <a:ln/>
-        </p:spPr>
-        <p:txBody>
-          <a:bodyPr wrap="square" lIns="0" tIns="0" rIns="0" bIns="0" rtlCol="0" anchor="t"/>
+      <p:pic>
+        <p:nvPicPr>
+          <p:cNvPr id="8" name="Image 1" descr="/Users/dogan/Documents/Vaults/Courses/wiki/classes/media-studies/decks/_build/img/toystory-remote-ecu.jpg">    </p:cNvPr>
+          <p:cNvPicPr>
+            <a:picLocks noChangeAspect="1"/>
+          </p:cNvPicPr>
+          <p:nvPr/>
+        </p:nvPicPr>
+        <p:blipFill>
+          <a:blip r:embed="rId2"/>
+          <a:stretch>
+            <a:fillRect/>
+          </a:stretch>
+        </p:blipFill>
+        <p:spPr>
+          <a:xfrm>
+            <a:off x="6897366" y="1225296"/>
+            <a:ext cx="3848616" cy="2487168"/>
+          </a:xfrm>
+          <a:prstGeom prst="rect">
+            <a:avLst/>
+          </a:prstGeom>
+        </p:spPr>
+      </p:pic>
+      <p:sp>
+        <p:nvSpPr>
+          <p:cNvPr id="9" name="Text 5"/>
+          <p:cNvSpPr/>
+          <p:nvPr/>
+        </p:nvSpPr>
+        <p:spPr>
+          <a:xfrm>
+            <a:off x="822960" y="3877056"/>
+            <a:ext cx="5088636" cy="320040"/>
+          </a:xfrm>
+          <a:prstGeom prst="rect">
+            <a:avLst/>
+          </a:prstGeom>
+          <a:noFill/>
+          <a:ln/>
+        </p:spPr>
+        <p:txBody>
+          <a:bodyPr wrap="square" lIns="0" tIns="0" rIns="0" bIns="0" rtlCol="0" anchor="ctr"/>
+          <a:lstStyle/>
+          <a:p>
+            <a:pPr algn="ctr" indent="0" marL="0">
+              <a:buNone/>
+            </a:pPr>
+            <a:r>
+              <a:rPr lang="en-US" sz="1000" dirty="0">
+                <a:solidFill>
+                  <a:srgbClr val="7A7F72"/>
+                </a:solidFill>
+                <a:latin typeface="Arial" pitchFamily="34" charset="0"/>
+                <a:ea typeface="Arial" pitchFamily="34" charset="-122"/>
+                <a:cs typeface="Arial" pitchFamily="34" charset="-120"/>
+              </a:rPr>
+              <a:t>Lupin (Netflix, 2021): the cleaner nobody sees, at the necklace nobody guards</a:t>
+            </a:r>
+            <a:endParaRPr lang="en-US" sz="1000" dirty="0"/>
+          </a:p>
+        </p:txBody>
+      </p:sp>
+      <p:sp>
+        <p:nvSpPr>
+          <p:cNvPr id="10" name="Text 6"/>
+          <p:cNvSpPr/>
+          <p:nvPr/>
+        </p:nvSpPr>
+        <p:spPr>
+          <a:xfrm>
+            <a:off x="6277356" y="3877056"/>
+            <a:ext cx="5088636" cy="320040"/>
+          </a:xfrm>
+          <a:prstGeom prst="rect">
+            <a:avLst/>
+          </a:prstGeom>
+          <a:noFill/>
+          <a:ln/>
+        </p:spPr>
+        <p:txBody>
+          <a:bodyPr wrap="square" lIns="0" tIns="0" rIns="0" bIns="0" rtlCol="0" anchor="ctr"/>
+          <a:lstStyle/>
+          <a:p>
+            <a:pPr algn="ctr" indent="0" marL="0">
+              <a:buNone/>
+            </a:pPr>
+            <a:r>
+              <a:rPr lang="en-US" sz="1000" dirty="0">
+                <a:solidFill>
+                  <a:srgbClr val="7A7F72"/>
+                </a:solidFill>
+                <a:latin typeface="Arial" pitchFamily="34" charset="0"/>
+                <a:ea typeface="Arial" pitchFamily="34" charset="-122"/>
+                <a:cs typeface="Arial" pitchFamily="34" charset="-120"/>
+              </a:rPr>
+              <a:t>Toy Story (1995): a thumb on a trigger is a promise the scene must keep</a:t>
+            </a:r>
+            <a:endParaRPr lang="en-US" sz="1000" dirty="0"/>
+          </a:p>
+        </p:txBody>
+      </p:sp>
+      <p:sp>
+        <p:nvSpPr>
+          <p:cNvPr id="11" name="Text 7"/>
+          <p:cNvSpPr/>
+          <p:nvPr/>
+        </p:nvSpPr>
+        <p:spPr>
+          <a:xfrm>
+            <a:off x="822960" y="4343400"/>
+            <a:ext cx="5088636" cy="411480"/>
+          </a:xfrm>
+          <a:prstGeom prst="rect">
+            <a:avLst/>
+          </a:prstGeom>
+          <a:noFill/>
+          <a:ln/>
+        </p:spPr>
+        <p:txBody>
+          <a:bodyPr wrap="square" lIns="0" tIns="0" rIns="0" bIns="0" rtlCol="0" anchor="ctr"/>
           <a:lstStyle/>
           <a:p>
             <a:pPr indent="0" marL="0">
-              <a:lnSpc>
-                <a:spcPts val="2400"/>
-              </a:lnSpc>
-              <a:buNone/>
-            </a:pPr>
-            <a:r>
-              <a:rPr lang="en-US" sz="1700" dirty="0">
-                <a:solidFill>
-                  <a:srgbClr val="24313F"/>
+              <a:buNone/>
+            </a:pPr>
+            <a:r>
+              <a:rPr lang="en-US" sz="2000" dirty="0">
+                <a:solidFill>
+                  <a:srgbClr val="4A6B5D"/>
                 </a:solidFill>
                 <a:latin typeface="Georgia" pitchFamily="34" charset="0"/>
                 <a:ea typeface="Georgia" pitchFamily="34" charset="-122"/>
                 <a:cs typeface="Georgia" pitchFamily="34" charset="-120"/>
               </a:rPr>
-              <a:t>The promise that something will happen, and soon. A loaded gun, a lit fuse, a packed suitcase: the text owes you a consequence.</a:t>
-            </a:r>
-            <a:endParaRPr lang="en-US" sz="1700" dirty="0"/>
-          </a:p>
-        </p:txBody>
-      </p:sp>
-      <p:sp>
-        <p:nvSpPr>
-          <p:cNvPr id="12" name="Shape 10"/>
+              <a:t>Enigma code</a:t>
+            </a:r>
+            <a:endParaRPr lang="en-US" sz="2000" dirty="0"/>
+          </a:p>
+        </p:txBody>
+      </p:sp>
+      <p:sp>
+        <p:nvSpPr>
+          <p:cNvPr id="12" name="Text 8"/>
+          <p:cNvSpPr/>
+          <p:nvPr/>
+        </p:nvSpPr>
+        <p:spPr>
+          <a:xfrm>
+            <a:off x="822960" y="4800600"/>
+            <a:ext cx="5088636" cy="1097280"/>
+          </a:xfrm>
+          <a:prstGeom prst="rect">
+            <a:avLst/>
+          </a:prstGeom>
+          <a:noFill/>
+          <a:ln/>
+        </p:spPr>
+        <p:txBody>
+          <a:bodyPr wrap="square" lIns="0" tIns="0" rIns="0" bIns="0" rtlCol="0" anchor="t"/>
+          <a:lstStyle/>
+          <a:p>
+            <a:pPr indent="0" marL="0">
+              <a:lnSpc>
+                <a:spcPts val="2000"/>
+              </a:lnSpc>
+              <a:buNone/>
+            </a:pPr>
+            <a:r>
+              <a:rPr lang="en-US" sz="1450" dirty="0">
+                <a:solidFill>
+                  <a:srgbClr val="24313F"/>
+                </a:solidFill>
+                <a:latin typeface="Georgia" pitchFamily="34" charset="0"/>
+                <a:ea typeface="Georgia" pitchFamily="34" charset="-122"/>
+                <a:cs typeface="Georgia" pitchFamily="34" charset="-120"/>
+              </a:rPr>
+              <a:t>The question a text plants and refuses to answer yet: who is he, what is he here to take?</a:t>
+            </a:r>
+            <a:endParaRPr lang="en-US" sz="1450" dirty="0"/>
+          </a:p>
+        </p:txBody>
+      </p:sp>
+      <p:sp>
+        <p:nvSpPr>
+          <p:cNvPr id="13" name="Text 9"/>
+          <p:cNvSpPr/>
+          <p:nvPr/>
+        </p:nvSpPr>
+        <p:spPr>
+          <a:xfrm>
+            <a:off x="6277356" y="4343400"/>
+            <a:ext cx="5088636" cy="411480"/>
+          </a:xfrm>
+          <a:prstGeom prst="rect">
+            <a:avLst/>
+          </a:prstGeom>
+          <a:noFill/>
+          <a:ln/>
+        </p:spPr>
+        <p:txBody>
+          <a:bodyPr wrap="square" lIns="0" tIns="0" rIns="0" bIns="0" rtlCol="0" anchor="ctr"/>
+          <a:lstStyle/>
+          <a:p>
+            <a:pPr indent="0" marL="0">
+              <a:buNone/>
+            </a:pPr>
+            <a:r>
+              <a:rPr lang="en-US" sz="2000" dirty="0">
+                <a:solidFill>
+                  <a:srgbClr val="5C7A6B"/>
+                </a:solidFill>
+                <a:latin typeface="Georgia" pitchFamily="34" charset="0"/>
+                <a:ea typeface="Georgia" pitchFamily="34" charset="-122"/>
+                <a:cs typeface="Georgia" pitchFamily="34" charset="-120"/>
+              </a:rPr>
+              <a:t>Action code</a:t>
+            </a:r>
+            <a:endParaRPr lang="en-US" sz="2000" dirty="0"/>
+          </a:p>
+        </p:txBody>
+      </p:sp>
+      <p:sp>
+        <p:nvSpPr>
+          <p:cNvPr id="14" name="Text 10"/>
+          <p:cNvSpPr/>
+          <p:nvPr/>
+        </p:nvSpPr>
+        <p:spPr>
+          <a:xfrm>
+            <a:off x="6277356" y="4800600"/>
+            <a:ext cx="5088636" cy="1097280"/>
+          </a:xfrm>
+          <a:prstGeom prst="rect">
+            <a:avLst/>
+          </a:prstGeom>
+          <a:noFill/>
+          <a:ln/>
+        </p:spPr>
+        <p:txBody>
+          <a:bodyPr wrap="square" lIns="0" tIns="0" rIns="0" bIns="0" rtlCol="0" anchor="t"/>
+          <a:lstStyle/>
+          <a:p>
+            <a:pPr indent="0" marL="0">
+              <a:lnSpc>
+                <a:spcPts val="2000"/>
+              </a:lnSpc>
+              <a:buNone/>
+            </a:pPr>
+            <a:r>
+              <a:rPr lang="en-US" sz="1450" dirty="0">
+                <a:solidFill>
+                  <a:srgbClr val="24313F"/>
+                </a:solidFill>
+                <a:latin typeface="Georgia" pitchFamily="34" charset="0"/>
+                <a:ea typeface="Georgia" pitchFamily="34" charset="-122"/>
+                <a:cs typeface="Georgia" pitchFamily="34" charset="-120"/>
+              </a:rPr>
+              <a:t>The promise that something will happen, and soon: a loaded gun, a lit fuse, a pressed trigger.</a:t>
+            </a:r>
+            <a:endParaRPr lang="en-US" sz="1450" dirty="0"/>
+          </a:p>
+        </p:txBody>
+      </p:sp>
+      <p:sp>
+        <p:nvSpPr>
+          <p:cNvPr id="15" name="Shape 11"/>
           <p:cNvSpPr/>
           <p:nvPr/>
         </p:nvSpPr>
@@ -6807,7 +8174,7 @@
       </p:sp>
       <p:sp>
         <p:nvSpPr>
-          <p:cNvPr id="13" name="Text 11"/>
+          <p:cNvPr id="16" name="Text 12"/>
           <p:cNvSpPr/>
           <p:nvPr/>
         </p:nvSpPr>
@@ -6846,7 +8213,7 @@
       </p:sp>
       <p:sp>
         <p:nvSpPr>
-          <p:cNvPr id="14" name="Text 12"/>
+          <p:cNvPr id="17" name="Text 13"/>
           <p:cNvSpPr/>
           <p:nvPr/>
         </p:nvSpPr>
@@ -6977,12 +8344,12 @@
           <a:p>
             <a:pPr indent="0" marL="0">
               <a:lnSpc>
-                <a:spcPts val="5200"/>
+                <a:spcPts val="4800"/>
               </a:lnSpc>
               <a:buNone/>
             </a:pPr>
             <a:r>
-              <a:rPr lang="en-US" sz="4400" dirty="0">
+              <a:rPr lang="en-US" sz="3800" dirty="0">
                 <a:solidFill>
                   <a:srgbClr val="24313F"/>
                 </a:solidFill>
@@ -6990,9 +8357,9 @@
                 <a:ea typeface="Georgia" pitchFamily="34" charset="-122"/>
                 <a:cs typeface="Georgia" pitchFamily="34" charset="-120"/>
               </a:rPr>
-              <a:t>The birth of the reader must be at the cost of the death of the Author.</a:t>
-            </a:r>
-            <a:endParaRPr lang="en-US" sz="4400" dirty="0"/>
+              <a:t>An enigma can be distinguished, suggested, formulated, held in suspense, and finally disclosed.</a:t>
+            </a:r>
+            <a:endParaRPr lang="en-US" sz="3800" dirty="0"/>
           </a:p>
         </p:txBody>
       </p:sp>
@@ -7052,7 +8419,7 @@
                 <a:ea typeface="Arial" pitchFamily="34" charset="-122"/>
                 <a:cs typeface="Arial" pitchFamily="34" charset="-120"/>
               </a:rPr>
-              <a:t>Roland Barthes, The Death of the Author, 1967</a:t>
+              <a:t>Roland Barthes, S/Z, 1970</a:t>
             </a:r>
             <a:endParaRPr lang="en-US" sz="1400" dirty="0"/>
           </a:p>
@@ -7069,6 +8436,13 @@
 <file path=ppt/slides/slide9.xml><?xml version="1.0" encoding="utf-8"?>
 <p:sld xmlns:a="http://schemas.openxmlformats.org/drawingml/2006/main" xmlns:r="http://schemas.openxmlformats.org/officeDocument/2006/relationships" xmlns:p="http://schemas.openxmlformats.org/presentationml/2006/main">
   <p:cSld name="Slide 9">
+    <p:bg>
+      <p:bgPr>
+        <a:solidFill>
+          <a:srgbClr val="FAF8F1"/>
+        </a:solidFill>
+      </p:bgPr>
+    </p:bg>
     <p:spTree>
       <p:nvGrpSpPr>
         <p:cNvPr id="1" name=""/>
@@ -7083,9 +8457,135 @@
           <a:chExt cx="0" cy="0"/>
         </a:xfrm>
       </p:grpSpPr>
+      <p:sp>
+        <p:nvSpPr>
+          <p:cNvPr id="2" name="Text 0"/>
+          <p:cNvSpPr/>
+          <p:nvPr/>
+        </p:nvSpPr>
+        <p:spPr>
+          <a:xfrm>
+            <a:off x="822960" y="457200"/>
+            <a:ext cx="6400800" cy="274320"/>
+          </a:xfrm>
+          <a:prstGeom prst="rect">
+            <a:avLst/>
+          </a:prstGeom>
+          <a:noFill/>
+          <a:ln/>
+        </p:spPr>
+        <p:txBody>
+          <a:bodyPr wrap="square" lIns="0" tIns="0" rIns="0" bIns="0" rtlCol="0" anchor="ctr"/>
+          <a:lstStyle/>
+          <a:p>
+            <a:pPr algn="l" indent="0" marL="0">
+              <a:buNone/>
+            </a:pPr>
+            <a:r>
+              <a:rPr lang="en-US" sz="1100" b="1" spc="250" kern="0" dirty="0">
+                <a:solidFill>
+                  <a:srgbClr val="4A6B5D"/>
+                </a:solidFill>
+                <a:latin typeface="Arial" pitchFamily="34" charset="0"/>
+                <a:ea typeface="Arial" pitchFamily="34" charset="-122"/>
+                <a:cs typeface="Arial" pitchFamily="34" charset="-120"/>
+              </a:rPr>
+              <a:t>BINARY OPPOSITIONS</a:t>
+            </a:r>
+            <a:endParaRPr lang="en-US" sz="1100" dirty="0"/>
+          </a:p>
+        </p:txBody>
+      </p:sp>
+      <p:sp>
+        <p:nvSpPr>
+          <p:cNvPr id="3" name="Text 1"/>
+          <p:cNvSpPr/>
+          <p:nvPr/>
+        </p:nvSpPr>
+        <p:spPr>
+          <a:xfrm>
+            <a:off x="6793992" y="457200"/>
+            <a:ext cx="4572000" cy="274320"/>
+          </a:xfrm>
+          <a:prstGeom prst="rect">
+            <a:avLst/>
+          </a:prstGeom>
+          <a:noFill/>
+          <a:ln/>
+        </p:spPr>
+        <p:txBody>
+          <a:bodyPr wrap="square" lIns="0" tIns="0" rIns="0" bIns="0" rtlCol="0" anchor="ctr"/>
+          <a:lstStyle/>
+          <a:p>
+            <a:pPr algn="r" indent="0" marL="0">
+              <a:buNone/>
+            </a:pPr>
+            <a:r>
+              <a:rPr lang="en-US" sz="1100" b="1" spc="250" kern="0" dirty="0">
+                <a:solidFill>
+                  <a:srgbClr val="7A7F72"/>
+                </a:solidFill>
+                <a:latin typeface="Arial" pitchFamily="34" charset="0"/>
+                <a:ea typeface="Arial" pitchFamily="34" charset="-122"/>
+                <a:cs typeface="Arial" pitchFamily="34" charset="-120"/>
+              </a:rPr>
+              <a:t>NARRATIVES RUN ON CONFLICTS OF VALUE</a:t>
+            </a:r>
+            <a:endParaRPr lang="en-US" sz="1100" dirty="0"/>
+          </a:p>
+        </p:txBody>
+      </p:sp>
+      <p:sp>
+        <p:nvSpPr>
+          <p:cNvPr id="4" name="Shape 2"/>
+          <p:cNvSpPr/>
+          <p:nvPr/>
+        </p:nvSpPr>
+        <p:spPr>
+          <a:xfrm>
+            <a:off x="822960" y="786384"/>
+            <a:ext cx="10543032" cy="0"/>
+          </a:xfrm>
+          <a:prstGeom prst="line">
+            <a:avLst/>
+          </a:prstGeom>
+          <a:noFill/>
+          <a:ln w="9525">
+            <a:solidFill>
+              <a:srgbClr val="D9D4C4"/>
+            </a:solidFill>
+            <a:prstDash val="solid"/>
+          </a:ln>
+        </p:spPr>
+      </p:sp>
+      <p:sp>
+        <p:nvSpPr>
+          <p:cNvPr id="5" name="Shape 3"/>
+          <p:cNvSpPr/>
+          <p:nvPr/>
+        </p:nvSpPr>
+        <p:spPr>
+          <a:xfrm>
+            <a:off x="822960" y="1051560"/>
+            <a:ext cx="5852160" cy="4480560"/>
+          </a:xfrm>
+          <a:prstGeom prst="rect">
+            <a:avLst/>
+          </a:prstGeom>
+          <a:solidFill>
+            <a:srgbClr val="FAF8F1"/>
+          </a:solidFill>
+          <a:ln w="9525">
+            <a:solidFill>
+              <a:srgbClr val="D9D4C4"/>
+            </a:solidFill>
+            <a:prstDash val="solid"/>
+          </a:ln>
+        </p:spPr>
+      </p:sp>
       <p:pic>
         <p:nvPicPr>
-          <p:cNvPr id="2" name="Image 0" descr="/Users/dogan/Documents/Vaults/Courses/wiki/classes/media-studies/decks/_build/img/crops/johnston-geography_a1777.jpg">    </p:cNvPr>
+          <p:cNvPr id="6" name="Image 0" descr="/Users/dogan/Documents/Vaults/Courses/wiki/classes/media-studies/decks/_build/img/lupin-vitrine.jpg">    </p:cNvPr>
           <p:cNvPicPr>
             <a:picLocks noChangeAspect="1"/>
           </p:cNvPicPr>
@@ -7099,8 +8599,8 @@
         </p:blipFill>
         <p:spPr>
           <a:xfrm>
-            <a:off x="0" y="0"/>
-            <a:ext cx="12188952" cy="6858000"/>
+            <a:off x="950976" y="1426464"/>
+            <a:ext cx="5596128" cy="3730752"/>
           </a:xfrm>
           <a:prstGeom prst="rect">
             <a:avLst/>
@@ -7109,101 +8609,103 @@
       </p:pic>
       <p:sp>
         <p:nvSpPr>
-          <p:cNvPr id="3" name="Shape 0"/>
-          <p:cNvSpPr/>
-          <p:nvPr/>
-        </p:nvSpPr>
-        <p:spPr>
-          <a:xfrm>
-            <a:off x="502920" y="502920"/>
-            <a:ext cx="5120640" cy="502920"/>
-          </a:xfrm>
-          <a:prstGeom prst="rect">
-            <a:avLst/>
-          </a:prstGeom>
-          <a:solidFill>
-            <a:srgbClr val="FAF8F1"/>
-          </a:solidFill>
-          <a:ln/>
-        </p:spPr>
-      </p:sp>
-      <p:sp>
-        <p:nvSpPr>
-          <p:cNvPr id="4" name="Text 1"/>
-          <p:cNvSpPr/>
-          <p:nvPr/>
-        </p:nvSpPr>
-        <p:spPr>
-          <a:xfrm>
-            <a:off x="704088" y="521208"/>
-            <a:ext cx="4846320" cy="274320"/>
-          </a:xfrm>
-          <a:prstGeom prst="rect">
-            <a:avLst/>
-          </a:prstGeom>
-          <a:noFill/>
-          <a:ln/>
-        </p:spPr>
-        <p:txBody>
-          <a:bodyPr wrap="square" lIns="0" tIns="0" rIns="0" bIns="0" rtlCol="0" anchor="ctr"/>
-          <a:lstStyle/>
-          <a:p>
-            <a:pPr algn="l" indent="0" marL="0">
-              <a:buNone/>
-            </a:pPr>
-            <a:r>
-              <a:rPr lang="en-US" sz="1100" b="1" spc="250" kern="0" dirty="0">
-                <a:solidFill>
-                  <a:srgbClr val="4A6B5D"/>
+          <p:cNvPr id="7" name="Text 4"/>
+          <p:cNvSpPr/>
+          <p:nvPr/>
+        </p:nvSpPr>
+        <p:spPr>
+          <a:xfrm>
+            <a:off x="822960" y="5577840"/>
+            <a:ext cx="5852160" cy="274320"/>
+          </a:xfrm>
+          <a:prstGeom prst="rect">
+            <a:avLst/>
+          </a:prstGeom>
+          <a:noFill/>
+          <a:ln/>
+        </p:spPr>
+        <p:txBody>
+          <a:bodyPr wrap="square" lIns="0" tIns="0" rIns="0" bIns="0" rtlCol="0" anchor="ctr"/>
+          <a:lstStyle/>
+          <a:p>
+            <a:pPr algn="ctr" indent="0" marL="0">
+              <a:buNone/>
+            </a:pPr>
+            <a:r>
+              <a:rPr lang="en-US" sz="1000" dirty="0">
+                <a:solidFill>
+                  <a:srgbClr val="7A7F72"/>
                 </a:solidFill>
                 <a:latin typeface="Arial" pitchFamily="34" charset="0"/>
                 <a:ea typeface="Arial" pitchFamily="34" charset="-122"/>
                 <a:cs typeface="Arial" pitchFamily="34" charset="-120"/>
               </a:rPr>
-              <a:t>CS9 · THE BLOG AUDIT</a:t>
-            </a:r>
-            <a:endParaRPr lang="en-US" sz="1100" dirty="0"/>
-          </a:p>
-        </p:txBody>
-      </p:sp>
-      <p:sp>
-        <p:nvSpPr>
-          <p:cNvPr id="5" name="Shape 2"/>
-          <p:cNvSpPr/>
-          <p:nvPr/>
-        </p:nvSpPr>
-        <p:spPr>
-          <a:xfrm>
-            <a:off x="457200" y="5230368"/>
-            <a:ext cx="8778240" cy="1243584"/>
-          </a:xfrm>
-          <a:prstGeom prst="rect">
-            <a:avLst/>
-          </a:prstGeom>
-          <a:solidFill>
-            <a:srgbClr val="FAF8F1"/>
-          </a:solidFill>
-          <a:ln/>
-        </p:spPr>
-      </p:sp>
-      <p:sp>
-        <p:nvSpPr>
-          <p:cNvPr id="6" name="Shape 3"/>
-          <p:cNvSpPr/>
-          <p:nvPr/>
-        </p:nvSpPr>
-        <p:spPr>
-          <a:xfrm>
-            <a:off x="676656" y="5468112"/>
-            <a:ext cx="731520" cy="0"/>
+              <a:t>Lupin S1 E1 (Netflix, 2021): Assane at the vitrine</a:t>
+            </a:r>
+            <a:endParaRPr lang="en-US" sz="1000" dirty="0"/>
+          </a:p>
+        </p:txBody>
+      </p:sp>
+      <p:sp>
+        <p:nvSpPr>
+          <p:cNvPr id="8" name="Text 5"/>
+          <p:cNvSpPr/>
+          <p:nvPr/>
+        </p:nvSpPr>
+        <p:spPr>
+          <a:xfrm>
+            <a:off x="7223760" y="1188720"/>
+            <a:ext cx="4206240" cy="822960"/>
+          </a:xfrm>
+          <a:prstGeom prst="rect">
+            <a:avLst/>
+          </a:prstGeom>
+          <a:noFill/>
+          <a:ln/>
+        </p:spPr>
+        <p:txBody>
+          <a:bodyPr wrap="square" lIns="0" tIns="0" rIns="0" bIns="0" rtlCol="0" anchor="ctr"/>
+          <a:lstStyle/>
+          <a:p>
+            <a:pPr indent="0" marL="0">
+              <a:lnSpc>
+                <a:spcPts val="3000"/>
+              </a:lnSpc>
+              <a:buNone/>
+            </a:pPr>
+            <a:r>
+              <a:rPr lang="en-US" sz="2600" dirty="0">
+                <a:solidFill>
+                  <a:srgbClr val="24313F"/>
+                </a:solidFill>
+                <a:latin typeface="Georgia" pitchFamily="34" charset="0"/>
+                <a:ea typeface="Georgia" pitchFamily="34" charset="-122"/>
+                <a:cs typeface="Georgia" pitchFamily="34" charset="-120"/>
+              </a:rPr>
+              <a:t>One frame, four value conflicts</a:t>
+            </a:r>
+            <a:endParaRPr lang="en-US" sz="2600" dirty="0"/>
+          </a:p>
+        </p:txBody>
+      </p:sp>
+      <p:sp>
+        <p:nvSpPr>
+          <p:cNvPr id="9" name="Shape 6"/>
+          <p:cNvSpPr/>
+          <p:nvPr/>
+        </p:nvSpPr>
+        <p:spPr>
+          <a:xfrm>
+            <a:off x="7223760" y="2103120"/>
+            <a:ext cx="4114800" cy="0"/>
           </a:xfrm>
           <a:prstGeom prst="line">
             <a:avLst/>
           </a:prstGeom>
           <a:noFill/>
-          <a:ln w="28575">
+          <a:ln w="9525">
             <a:solidFill>
-              <a:srgbClr val="8C3A38"/>
+              <a:srgbClr val="D9D4C4"/>
             </a:solidFill>
             <a:prstDash val="solid"/>
           </a:ln>
@@ -7211,72 +8713,69 @@
       </p:sp>
       <p:sp>
         <p:nvSpPr>
-          <p:cNvPr id="7" name="Text 4"/>
-          <p:cNvSpPr/>
-          <p:nvPr/>
-        </p:nvSpPr>
-        <p:spPr>
-          <a:xfrm>
-            <a:off x="676656" y="5541264"/>
-            <a:ext cx="8339328" cy="585216"/>
-          </a:xfrm>
-          <a:prstGeom prst="rect">
-            <a:avLst/>
-          </a:prstGeom>
-          <a:noFill/>
-          <a:ln/>
-        </p:spPr>
-        <p:txBody>
-          <a:bodyPr wrap="square" lIns="0" tIns="0" rIns="0" bIns="0" rtlCol="0" anchor="t"/>
-          <a:lstStyle/>
-          <a:p>
-            <a:pPr indent="0" marL="0">
-              <a:lnSpc>
-                <a:spcPts val="2200"/>
-              </a:lnSpc>
-              <a:buNone/>
-            </a:pPr>
-            <a:r>
-              <a:rPr lang="en-US" sz="1800" dirty="0">
-                <a:solidFill>
-                  <a:srgbClr val="24313F"/>
+          <p:cNvPr id="10" name="Text 7"/>
+          <p:cNvSpPr/>
+          <p:nvPr/>
+        </p:nvSpPr>
+        <p:spPr>
+          <a:xfrm>
+            <a:off x="7223760" y="2331720"/>
+            <a:ext cx="1737360" cy="457200"/>
+          </a:xfrm>
+          <a:prstGeom prst="rect">
+            <a:avLst/>
+          </a:prstGeom>
+          <a:noFill/>
+          <a:ln/>
+        </p:spPr>
+        <p:txBody>
+          <a:bodyPr wrap="square" lIns="0" tIns="0" rIns="0" bIns="0" rtlCol="0" anchor="ctr"/>
+          <a:lstStyle/>
+          <a:p>
+            <a:pPr algn="r" indent="0" marL="0">
+              <a:buNone/>
+            </a:pPr>
+            <a:r>
+              <a:rPr lang="en-US" sz="1700" dirty="0">
+                <a:solidFill>
+                  <a:srgbClr val="4A6B5D"/>
                 </a:solidFill>
                 <a:latin typeface="Georgia" pitchFamily="34" charset="0"/>
                 <a:ea typeface="Georgia" pitchFamily="34" charset="-122"/>
                 <a:cs typeface="Georgia" pitchFamily="34" charset="-120"/>
               </a:rPr>
-              <a:t>Every blog read by a peer against the same checklist A2 is marked with, three days before it is due.</a:t>
-            </a:r>
-            <a:endParaRPr lang="en-US" sz="1800" dirty="0"/>
-          </a:p>
-        </p:txBody>
-      </p:sp>
-      <p:sp>
-        <p:nvSpPr>
-          <p:cNvPr id="8" name="Text 5"/>
-          <p:cNvSpPr/>
-          <p:nvPr/>
-        </p:nvSpPr>
-        <p:spPr>
-          <a:xfrm>
-            <a:off x="676656" y="6181344"/>
-            <a:ext cx="8339328" cy="256032"/>
-          </a:xfrm>
-          <a:prstGeom prst="rect">
-            <a:avLst/>
-          </a:prstGeom>
-          <a:noFill/>
-          <a:ln/>
-        </p:spPr>
-        <p:txBody>
-          <a:bodyPr wrap="square" lIns="0" tIns="0" rIns="0" bIns="0" rtlCol="0" anchor="ctr"/>
-          <a:lstStyle/>
-          <a:p>
-            <a:pPr indent="0" marL="0">
-              <a:buNone/>
-            </a:pPr>
-            <a:r>
-              <a:rPr lang="en-US" sz="950" spc="50" kern="0" dirty="0">
+              <a:t>seen</a:t>
+            </a:r>
+            <a:endParaRPr lang="en-US" sz="1700" dirty="0"/>
+          </a:p>
+        </p:txBody>
+      </p:sp>
+      <p:sp>
+        <p:nvSpPr>
+          <p:cNvPr id="11" name="Text 8"/>
+          <p:cNvSpPr/>
+          <p:nvPr/>
+        </p:nvSpPr>
+        <p:spPr>
+          <a:xfrm>
+            <a:off x="9006840" y="2331720"/>
+            <a:ext cx="548640" cy="457200"/>
+          </a:xfrm>
+          <a:prstGeom prst="rect">
+            <a:avLst/>
+          </a:prstGeom>
+          <a:noFill/>
+          <a:ln/>
+        </p:spPr>
+        <p:txBody>
+          <a:bodyPr wrap="square" lIns="0" tIns="0" rIns="0" bIns="0" rtlCol="0" anchor="ctr"/>
+          <a:lstStyle/>
+          <a:p>
+            <a:pPr algn="ctr" indent="0" marL="0">
+              <a:buNone/>
+            </a:pPr>
+            <a:r>
+              <a:rPr lang="en-US" sz="1100" dirty="0">
                 <a:solidFill>
                   <a:srgbClr val="7A7F72"/>
                 </a:solidFill>
@@ -7284,9 +8783,542 @@
                 <a:ea typeface="Arial" pitchFamily="34" charset="-122"/>
                 <a:cs typeface="Arial" pitchFamily="34" charset="-120"/>
               </a:rPr>
-              <a:t>Frances Benjamin Johnston, a Geography class, Hampton, c. 1899</a:t>
-            </a:r>
-            <a:endParaRPr lang="en-US" sz="950" dirty="0"/>
+              <a:t>vs</a:t>
+            </a:r>
+            <a:endParaRPr lang="en-US" sz="1100" dirty="0"/>
+          </a:p>
+        </p:txBody>
+      </p:sp>
+      <p:sp>
+        <p:nvSpPr>
+          <p:cNvPr id="12" name="Text 9"/>
+          <p:cNvSpPr/>
+          <p:nvPr/>
+        </p:nvSpPr>
+        <p:spPr>
+          <a:xfrm>
+            <a:off x="9601200" y="2331720"/>
+            <a:ext cx="1737360" cy="457200"/>
+          </a:xfrm>
+          <a:prstGeom prst="rect">
+            <a:avLst/>
+          </a:prstGeom>
+          <a:noFill/>
+          <a:ln/>
+        </p:spPr>
+        <p:txBody>
+          <a:bodyPr wrap="square" lIns="0" tIns="0" rIns="0" bIns="0" rtlCol="0" anchor="ctr"/>
+          <a:lstStyle/>
+          <a:p>
+            <a:pPr indent="0" marL="0">
+              <a:buNone/>
+            </a:pPr>
+            <a:r>
+              <a:rPr lang="en-US" sz="1700" dirty="0">
+                <a:solidFill>
+                  <a:srgbClr val="5C7A6B"/>
+                </a:solidFill>
+                <a:latin typeface="Georgia" pitchFamily="34" charset="0"/>
+                <a:ea typeface="Georgia" pitchFamily="34" charset="-122"/>
+                <a:cs typeface="Georgia" pitchFamily="34" charset="-120"/>
+              </a:rPr>
+              <a:t>unseen</a:t>
+            </a:r>
+            <a:endParaRPr lang="en-US" sz="1700" dirty="0"/>
+          </a:p>
+        </p:txBody>
+      </p:sp>
+      <p:sp>
+        <p:nvSpPr>
+          <p:cNvPr id="13" name="Text 10"/>
+          <p:cNvSpPr/>
+          <p:nvPr/>
+        </p:nvSpPr>
+        <p:spPr>
+          <a:xfrm>
+            <a:off x="7223760" y="2898648"/>
+            <a:ext cx="1737360" cy="457200"/>
+          </a:xfrm>
+          <a:prstGeom prst="rect">
+            <a:avLst/>
+          </a:prstGeom>
+          <a:noFill/>
+          <a:ln/>
+        </p:spPr>
+        <p:txBody>
+          <a:bodyPr wrap="square" lIns="0" tIns="0" rIns="0" bIns="0" rtlCol="0" anchor="ctr"/>
+          <a:lstStyle/>
+          <a:p>
+            <a:pPr algn="r" indent="0" marL="0">
+              <a:buNone/>
+            </a:pPr>
+            <a:r>
+              <a:rPr lang="en-US" sz="1700" dirty="0">
+                <a:solidFill>
+                  <a:srgbClr val="4A6B5D"/>
+                </a:solidFill>
+                <a:latin typeface="Georgia" pitchFamily="34" charset="0"/>
+                <a:ea typeface="Georgia" pitchFamily="34" charset="-122"/>
+                <a:cs typeface="Georgia" pitchFamily="34" charset="-120"/>
+              </a:rPr>
+              <a:t>guardian</a:t>
+            </a:r>
+            <a:endParaRPr lang="en-US" sz="1700" dirty="0"/>
+          </a:p>
+        </p:txBody>
+      </p:sp>
+      <p:sp>
+        <p:nvSpPr>
+          <p:cNvPr id="14" name="Text 11"/>
+          <p:cNvSpPr/>
+          <p:nvPr/>
+        </p:nvSpPr>
+        <p:spPr>
+          <a:xfrm>
+            <a:off x="9006840" y="2898648"/>
+            <a:ext cx="548640" cy="457200"/>
+          </a:xfrm>
+          <a:prstGeom prst="rect">
+            <a:avLst/>
+          </a:prstGeom>
+          <a:noFill/>
+          <a:ln/>
+        </p:spPr>
+        <p:txBody>
+          <a:bodyPr wrap="square" lIns="0" tIns="0" rIns="0" bIns="0" rtlCol="0" anchor="ctr"/>
+          <a:lstStyle/>
+          <a:p>
+            <a:pPr algn="ctr" indent="0" marL="0">
+              <a:buNone/>
+            </a:pPr>
+            <a:r>
+              <a:rPr lang="en-US" sz="1100" dirty="0">
+                <a:solidFill>
+                  <a:srgbClr val="7A7F72"/>
+                </a:solidFill>
+                <a:latin typeface="Arial" pitchFamily="34" charset="0"/>
+                <a:ea typeface="Arial" pitchFamily="34" charset="-122"/>
+                <a:cs typeface="Arial" pitchFamily="34" charset="-120"/>
+              </a:rPr>
+              <a:t>vs</a:t>
+            </a:r>
+            <a:endParaRPr lang="en-US" sz="1100" dirty="0"/>
+          </a:p>
+        </p:txBody>
+      </p:sp>
+      <p:sp>
+        <p:nvSpPr>
+          <p:cNvPr id="15" name="Text 12"/>
+          <p:cNvSpPr/>
+          <p:nvPr/>
+        </p:nvSpPr>
+        <p:spPr>
+          <a:xfrm>
+            <a:off x="9601200" y="2898648"/>
+            <a:ext cx="1737360" cy="457200"/>
+          </a:xfrm>
+          <a:prstGeom prst="rect">
+            <a:avLst/>
+          </a:prstGeom>
+          <a:noFill/>
+          <a:ln/>
+        </p:spPr>
+        <p:txBody>
+          <a:bodyPr wrap="square" lIns="0" tIns="0" rIns="0" bIns="0" rtlCol="0" anchor="ctr"/>
+          <a:lstStyle/>
+          <a:p>
+            <a:pPr indent="0" marL="0">
+              <a:buNone/>
+            </a:pPr>
+            <a:r>
+              <a:rPr lang="en-US" sz="1700" dirty="0">
+                <a:solidFill>
+                  <a:srgbClr val="5C7A6B"/>
+                </a:solidFill>
+                <a:latin typeface="Georgia" pitchFamily="34" charset="0"/>
+                <a:ea typeface="Georgia" pitchFamily="34" charset="-122"/>
+                <a:cs typeface="Georgia" pitchFamily="34" charset="-120"/>
+              </a:rPr>
+              <a:t>thief</a:t>
+            </a:r>
+            <a:endParaRPr lang="en-US" sz="1700" dirty="0"/>
+          </a:p>
+        </p:txBody>
+      </p:sp>
+      <p:sp>
+        <p:nvSpPr>
+          <p:cNvPr id="16" name="Text 13"/>
+          <p:cNvSpPr/>
+          <p:nvPr/>
+        </p:nvSpPr>
+        <p:spPr>
+          <a:xfrm>
+            <a:off x="7223760" y="3465576"/>
+            <a:ext cx="1737360" cy="457200"/>
+          </a:xfrm>
+          <a:prstGeom prst="rect">
+            <a:avLst/>
+          </a:prstGeom>
+          <a:noFill/>
+          <a:ln/>
+        </p:spPr>
+        <p:txBody>
+          <a:bodyPr wrap="square" lIns="0" tIns="0" rIns="0" bIns="0" rtlCol="0" anchor="ctr"/>
+          <a:lstStyle/>
+          <a:p>
+            <a:pPr algn="r" indent="0" marL="0">
+              <a:buNone/>
+            </a:pPr>
+            <a:r>
+              <a:rPr lang="en-US" sz="1700" dirty="0">
+                <a:solidFill>
+                  <a:srgbClr val="4A6B5D"/>
+                </a:solidFill>
+                <a:latin typeface="Georgia" pitchFamily="34" charset="0"/>
+                <a:ea typeface="Georgia" pitchFamily="34" charset="-122"/>
+                <a:cs typeface="Georgia" pitchFamily="34" charset="-120"/>
+              </a:rPr>
+              <a:t>wealth</a:t>
+            </a:r>
+            <a:endParaRPr lang="en-US" sz="1700" dirty="0"/>
+          </a:p>
+        </p:txBody>
+      </p:sp>
+      <p:sp>
+        <p:nvSpPr>
+          <p:cNvPr id="17" name="Text 14"/>
+          <p:cNvSpPr/>
+          <p:nvPr/>
+        </p:nvSpPr>
+        <p:spPr>
+          <a:xfrm>
+            <a:off x="9006840" y="3465576"/>
+            <a:ext cx="548640" cy="457200"/>
+          </a:xfrm>
+          <a:prstGeom prst="rect">
+            <a:avLst/>
+          </a:prstGeom>
+          <a:noFill/>
+          <a:ln/>
+        </p:spPr>
+        <p:txBody>
+          <a:bodyPr wrap="square" lIns="0" tIns="0" rIns="0" bIns="0" rtlCol="0" anchor="ctr"/>
+          <a:lstStyle/>
+          <a:p>
+            <a:pPr algn="ctr" indent="0" marL="0">
+              <a:buNone/>
+            </a:pPr>
+            <a:r>
+              <a:rPr lang="en-US" sz="1100" dirty="0">
+                <a:solidFill>
+                  <a:srgbClr val="7A7F72"/>
+                </a:solidFill>
+                <a:latin typeface="Arial" pitchFamily="34" charset="0"/>
+                <a:ea typeface="Arial" pitchFamily="34" charset="-122"/>
+                <a:cs typeface="Arial" pitchFamily="34" charset="-120"/>
+              </a:rPr>
+              <a:t>vs</a:t>
+            </a:r>
+            <a:endParaRPr lang="en-US" sz="1100" dirty="0"/>
+          </a:p>
+        </p:txBody>
+      </p:sp>
+      <p:sp>
+        <p:nvSpPr>
+          <p:cNvPr id="18" name="Text 15"/>
+          <p:cNvSpPr/>
+          <p:nvPr/>
+        </p:nvSpPr>
+        <p:spPr>
+          <a:xfrm>
+            <a:off x="9601200" y="3465576"/>
+            <a:ext cx="1737360" cy="457200"/>
+          </a:xfrm>
+          <a:prstGeom prst="rect">
+            <a:avLst/>
+          </a:prstGeom>
+          <a:noFill/>
+          <a:ln/>
+        </p:spPr>
+        <p:txBody>
+          <a:bodyPr wrap="square" lIns="0" tIns="0" rIns="0" bIns="0" rtlCol="0" anchor="ctr"/>
+          <a:lstStyle/>
+          <a:p>
+            <a:pPr indent="0" marL="0">
+              <a:buNone/>
+            </a:pPr>
+            <a:r>
+              <a:rPr lang="en-US" sz="1700" dirty="0">
+                <a:solidFill>
+                  <a:srgbClr val="5C7A6B"/>
+                </a:solidFill>
+                <a:latin typeface="Georgia" pitchFamily="34" charset="0"/>
+                <a:ea typeface="Georgia" pitchFamily="34" charset="-122"/>
+                <a:cs typeface="Georgia" pitchFamily="34" charset="-120"/>
+              </a:rPr>
+              <a:t>service</a:t>
+            </a:r>
+            <a:endParaRPr lang="en-US" sz="1700" dirty="0"/>
+          </a:p>
+        </p:txBody>
+      </p:sp>
+      <p:sp>
+        <p:nvSpPr>
+          <p:cNvPr id="19" name="Text 16"/>
+          <p:cNvSpPr/>
+          <p:nvPr/>
+        </p:nvSpPr>
+        <p:spPr>
+          <a:xfrm>
+            <a:off x="7223760" y="4032504"/>
+            <a:ext cx="1737360" cy="457200"/>
+          </a:xfrm>
+          <a:prstGeom prst="rect">
+            <a:avLst/>
+          </a:prstGeom>
+          <a:noFill/>
+          <a:ln/>
+        </p:spPr>
+        <p:txBody>
+          <a:bodyPr wrap="square" lIns="0" tIns="0" rIns="0" bIns="0" rtlCol="0" anchor="ctr"/>
+          <a:lstStyle/>
+          <a:p>
+            <a:pPr algn="r" indent="0" marL="0">
+              <a:buNone/>
+            </a:pPr>
+            <a:r>
+              <a:rPr lang="en-US" sz="1700" dirty="0">
+                <a:solidFill>
+                  <a:srgbClr val="4A6B5D"/>
+                </a:solidFill>
+                <a:latin typeface="Georgia" pitchFamily="34" charset="0"/>
+                <a:ea typeface="Georgia" pitchFamily="34" charset="-122"/>
+                <a:cs typeface="Georgia" pitchFamily="34" charset="-120"/>
+              </a:rPr>
+              <a:t>light</a:t>
+            </a:r>
+            <a:endParaRPr lang="en-US" sz="1700" dirty="0"/>
+          </a:p>
+        </p:txBody>
+      </p:sp>
+      <p:sp>
+        <p:nvSpPr>
+          <p:cNvPr id="20" name="Text 17"/>
+          <p:cNvSpPr/>
+          <p:nvPr/>
+        </p:nvSpPr>
+        <p:spPr>
+          <a:xfrm>
+            <a:off x="9006840" y="4032504"/>
+            <a:ext cx="548640" cy="457200"/>
+          </a:xfrm>
+          <a:prstGeom prst="rect">
+            <a:avLst/>
+          </a:prstGeom>
+          <a:noFill/>
+          <a:ln/>
+        </p:spPr>
+        <p:txBody>
+          <a:bodyPr wrap="square" lIns="0" tIns="0" rIns="0" bIns="0" rtlCol="0" anchor="ctr"/>
+          <a:lstStyle/>
+          <a:p>
+            <a:pPr algn="ctr" indent="0" marL="0">
+              <a:buNone/>
+            </a:pPr>
+            <a:r>
+              <a:rPr lang="en-US" sz="1100" dirty="0">
+                <a:solidFill>
+                  <a:srgbClr val="7A7F72"/>
+                </a:solidFill>
+                <a:latin typeface="Arial" pitchFamily="34" charset="0"/>
+                <a:ea typeface="Arial" pitchFamily="34" charset="-122"/>
+                <a:cs typeface="Arial" pitchFamily="34" charset="-120"/>
+              </a:rPr>
+              <a:t>vs</a:t>
+            </a:r>
+            <a:endParaRPr lang="en-US" sz="1100" dirty="0"/>
+          </a:p>
+        </p:txBody>
+      </p:sp>
+      <p:sp>
+        <p:nvSpPr>
+          <p:cNvPr id="21" name="Text 18"/>
+          <p:cNvSpPr/>
+          <p:nvPr/>
+        </p:nvSpPr>
+        <p:spPr>
+          <a:xfrm>
+            <a:off x="9601200" y="4032504"/>
+            <a:ext cx="1737360" cy="457200"/>
+          </a:xfrm>
+          <a:prstGeom prst="rect">
+            <a:avLst/>
+          </a:prstGeom>
+          <a:noFill/>
+          <a:ln/>
+        </p:spPr>
+        <p:txBody>
+          <a:bodyPr wrap="square" lIns="0" tIns="0" rIns="0" bIns="0" rtlCol="0" anchor="ctr"/>
+          <a:lstStyle/>
+          <a:p>
+            <a:pPr indent="0" marL="0">
+              <a:buNone/>
+            </a:pPr>
+            <a:r>
+              <a:rPr lang="en-US" sz="1700" dirty="0">
+                <a:solidFill>
+                  <a:srgbClr val="5C7A6B"/>
+                </a:solidFill>
+                <a:latin typeface="Georgia" pitchFamily="34" charset="0"/>
+                <a:ea typeface="Georgia" pitchFamily="34" charset="-122"/>
+                <a:cs typeface="Georgia" pitchFamily="34" charset="-120"/>
+              </a:rPr>
+              <a:t>dark</a:t>
+            </a:r>
+            <a:endParaRPr lang="en-US" sz="1700" dirty="0"/>
+          </a:p>
+        </p:txBody>
+      </p:sp>
+      <p:sp>
+        <p:nvSpPr>
+          <p:cNvPr id="22" name="Text 19"/>
+          <p:cNvSpPr/>
+          <p:nvPr/>
+        </p:nvSpPr>
+        <p:spPr>
+          <a:xfrm>
+            <a:off x="7223760" y="4690872"/>
+            <a:ext cx="4114800" cy="1097280"/>
+          </a:xfrm>
+          <a:prstGeom prst="rect">
+            <a:avLst/>
+          </a:prstGeom>
+          <a:noFill/>
+          <a:ln/>
+        </p:spPr>
+        <p:txBody>
+          <a:bodyPr wrap="square" lIns="0" tIns="0" rIns="0" bIns="0" rtlCol="0" anchor="t"/>
+          <a:lstStyle/>
+          <a:p>
+            <a:pPr indent="0" marL="0">
+              <a:lnSpc>
+                <a:spcPts val="1600"/>
+              </a:lnSpc>
+              <a:buNone/>
+            </a:pPr>
+            <a:r>
+              <a:rPr lang="en-US" sz="1200" i="1" dirty="0">
+                <a:solidFill>
+                  <a:srgbClr val="7A7F72"/>
+                </a:solidFill>
+                <a:latin typeface="Arial" pitchFamily="34" charset="0"/>
+                <a:ea typeface="Arial" pitchFamily="34" charset="-122"/>
+                <a:cs typeface="Arial" pitchFamily="34" charset="-120"/>
+              </a:rPr>
+              <a:t>The test of a real pair: scenes, costumes and settings line up on the two sides. Name your own opening's pair before Friday.</a:t>
+            </a:r>
+            <a:endParaRPr lang="en-US" sz="1200" dirty="0"/>
+          </a:p>
+        </p:txBody>
+      </p:sp>
+      <p:sp>
+        <p:nvSpPr>
+          <p:cNvPr id="23" name="Shape 20"/>
+          <p:cNvSpPr/>
+          <p:nvPr/>
+        </p:nvSpPr>
+        <p:spPr>
+          <a:xfrm>
+            <a:off x="822960" y="6382512"/>
+            <a:ext cx="10543032" cy="0"/>
+          </a:xfrm>
+          <a:prstGeom prst="line">
+            <a:avLst/>
+          </a:prstGeom>
+          <a:noFill/>
+          <a:ln w="9525">
+            <a:solidFill>
+              <a:srgbClr val="D9D4C4"/>
+            </a:solidFill>
+            <a:prstDash val="solid"/>
+          </a:ln>
+        </p:spPr>
+      </p:sp>
+      <p:sp>
+        <p:nvSpPr>
+          <p:cNvPr id="24" name="Text 21"/>
+          <p:cNvSpPr/>
+          <p:nvPr/>
+        </p:nvSpPr>
+        <p:spPr>
+          <a:xfrm>
+            <a:off x="822960" y="6419088"/>
+            <a:ext cx="7315200" cy="274320"/>
+          </a:xfrm>
+          <a:prstGeom prst="rect">
+            <a:avLst/>
+          </a:prstGeom>
+          <a:noFill/>
+          <a:ln/>
+        </p:spPr>
+        <p:txBody>
+          <a:bodyPr wrap="square" lIns="0" tIns="0" rIns="0" bIns="0" rtlCol="0" anchor="ctr"/>
+          <a:lstStyle/>
+          <a:p>
+            <a:pPr indent="0" marL="0">
+              <a:buNone/>
+            </a:pPr>
+            <a:r>
+              <a:rPr lang="en-US" sz="900" spc="150" kern="0" dirty="0">
+                <a:solidFill>
+                  <a:srgbClr val="7A7F72"/>
+                </a:solidFill>
+                <a:latin typeface="Arial" pitchFamily="34" charset="0"/>
+                <a:ea typeface="Arial" pitchFamily="34" charset="-122"/>
+                <a:cs typeface="Arial" pitchFamily="34" charset="-120"/>
+              </a:rPr>
+              <a:t>MEDIA STUDIES 9607 · SEMESTER I</a:t>
+            </a:r>
+            <a:endParaRPr lang="en-US" sz="900" dirty="0"/>
+          </a:p>
+        </p:txBody>
+      </p:sp>
+      <p:sp>
+        <p:nvSpPr>
+          <p:cNvPr id="25" name="Text 22"/>
+          <p:cNvSpPr/>
+          <p:nvPr/>
+        </p:nvSpPr>
+        <p:spPr>
+          <a:xfrm>
+            <a:off x="10268712" y="6355080"/>
+            <a:ext cx="1097280" cy="365760"/>
+          </a:xfrm>
+          <a:prstGeom prst="rect">
+            <a:avLst/>
+          </a:prstGeom>
+          <a:noFill/>
+          <a:ln/>
+        </p:spPr>
+        <p:txBody>
+          <a:bodyPr wrap="square" lIns="0" tIns="0" rIns="0" bIns="0" rtlCol="0" anchor="ctr"/>
+          <a:lstStyle/>
+          <a:p>
+            <a:pPr algn="r" indent="0" marL="0">
+              <a:buNone/>
+            </a:pPr>
+            <a:r>
+              <a:rPr lang="en-US" sz="1600" dirty="0">
+                <a:solidFill>
+                  <a:srgbClr val="A3C1AD"/>
+                </a:solidFill>
+                <a:latin typeface="Georgia" pitchFamily="34" charset="0"/>
+                <a:ea typeface="Georgia" pitchFamily="34" charset="-122"/>
+                <a:cs typeface="Georgia" pitchFamily="34" charset="-120"/>
+              </a:rPr>
+              <a:t>04</a:t>
+            </a:r>
+            <a:endParaRPr lang="en-US" sz="1600" dirty="0"/>
           </a:p>
         </p:txBody>
       </p:sp>

--- a/content/decks/media-studies/media-studies-s1-lesson-10-narrative-barthes-and-the-blog-audit.pptx
+++ b/content/decks/media-studies/media-studies-s1-lesson-10-narrative-barthes-and-the-blog-audit.pptx
@@ -3393,8 +3393,8 @@
         </p:nvSpPr>
         <p:spPr>
           <a:xfrm>
-            <a:off x="822960" y="4069080"/>
-            <a:ext cx="10424160" cy="1097280"/>
+            <a:off x="822960" y="4160520"/>
+            <a:ext cx="10424160" cy="914400"/>
           </a:xfrm>
           <a:prstGeom prst="rect">
             <a:avLst/>
@@ -3408,12 +3408,29 @@
           <a:p>
             <a:pPr indent="0" marL="0">
               <a:lnSpc>
-                <a:spcPts val="2300"/>
+                <a:spcPts val="2200"/>
               </a:lnSpc>
               <a:buNone/>
             </a:pPr>
             <a:r>
-              <a:rPr lang="en-US" sz="1700" dirty="0">
+              <a:rPr lang="en-US" sz="1400" b="1" spc="100" kern="0" dirty="0">
+                <a:solidFill>
+                  <a:srgbClr val="4A6B5D"/>
+                </a:solidFill>
+                <a:latin typeface="Arial" pitchFamily="34" charset="0"/>
+                <a:ea typeface="Arial" pitchFamily="34" charset="-122"/>
+                <a:cs typeface="Arial" pitchFamily="34" charset="-120"/>
+              </a:rPr>
+              <a:t>THE STANDARD   </a:t>
+            </a:r>
+            <a:pPr indent="0" marL="0">
+              <a:lnSpc>
+                <a:spcPts val="2200"/>
+              </a:lnSpc>
+              <a:buNone/>
+            </a:pPr>
+            <a:r>
+              <a:rPr lang="en-US" sz="1600" dirty="0">
                 <a:solidFill>
                   <a:srgbClr val="24313F"/>
                 </a:solidFill>
@@ -3421,9 +3438,46 @@
                 <a:ea typeface="Georgia" pitchFamily="34" charset="-122"/>
                 <a:cs typeface="Georgia" pitchFamily="34" charset="-120"/>
               </a:rPr>
-              <a:t>Every post dated on the day it happened, contributions labelled, no gaps. The four technical builds are named on this checklist for the first time: they are Component 1 evidence under Cambridge's own portfolio structure, and a blog missing them is missing marks it already earned in class.</a:t>
-            </a:r>
-            <a:endParaRPr lang="en-US" sz="1700" dirty="0"/>
+              <a:t>Every post dated on the day it happened. Contributions labeled. No gaps.</a:t>
+            </a:r>
+            <a:endParaRPr lang="en-US" sz="1400" dirty="0"/>
+          </a:p>
+          <a:p>
+            <a:pPr indent="0" marL="0">
+              <a:lnSpc>
+                <a:spcPts val="2200"/>
+              </a:lnSpc>
+              <a:buNone/>
+            </a:pPr>
+            <a:r>
+              <a:rPr lang="en-US" sz="1400" b="1" spc="100" kern="0" dirty="0">
+                <a:solidFill>
+                  <a:srgbClr val="4A6B5D"/>
+                </a:solidFill>
+                <a:latin typeface="Arial" pitchFamily="34" charset="0"/>
+                <a:ea typeface="Arial" pitchFamily="34" charset="-122"/>
+                <a:cs typeface="Arial" pitchFamily="34" charset="-120"/>
+              </a:rPr>
+              <a:t>KEY POINT   </a:t>
+            </a:r>
+            <a:pPr indent="0" marL="0">
+              <a:lnSpc>
+                <a:spcPts val="2200"/>
+              </a:lnSpc>
+              <a:buNone/>
+            </a:pPr>
+            <a:r>
+              <a:rPr lang="en-US" sz="1600" dirty="0">
+                <a:solidFill>
+                  <a:srgbClr val="24313F"/>
+                </a:solidFill>
+                <a:latin typeface="Georgia" pitchFamily="34" charset="0"/>
+                <a:ea typeface="Georgia" pitchFamily="34" charset="-122"/>
+                <a:cs typeface="Georgia" pitchFamily="34" charset="-120"/>
+              </a:rPr>
+              <a:t>The four technical builds are Component 1 evidence. A blog missing them loses marks it already earned.</a:t>
+            </a:r>
+            <a:endParaRPr lang="en-US" sz="1400" dirty="0"/>
           </a:p>
         </p:txBody>
       </p:sp>
@@ -3468,14 +3522,17 @@
           <a:ln/>
         </p:spPr>
         <p:txBody>
-          <a:bodyPr wrap="square" lIns="0" tIns="0" rIns="0" bIns="0" rtlCol="0" anchor="ctr"/>
-          <a:lstStyle/>
-          <a:p>
-            <a:pPr indent="0" marL="0">
-              <a:buNone/>
-            </a:pPr>
-            <a:r>
-              <a:rPr lang="en-US" sz="1250" i="1" dirty="0">
+          <a:bodyPr wrap="square" lIns="0" tIns="0" rIns="0" bIns="0" rtlCol="0" anchor="t"/>
+          <a:lstStyle/>
+          <a:p>
+            <a:pPr indent="0" marL="0">
+              <a:lnSpc>
+                <a:spcPts val="1600"/>
+              </a:lnSpc>
+              <a:buNone/>
+            </a:pPr>
+            <a:r>
+              <a:rPr lang="en-US" sz="1050" b="1" spc="100" kern="0" dirty="0">
                 <a:solidFill>
                   <a:srgbClr val="7A7F72"/>
                 </a:solidFill>
@@ -3483,9 +3540,63 @@
                 <a:ea typeface="Arial" pitchFamily="34" charset="-122"/>
                 <a:cs typeface="Arial" pitchFamily="34" charset="-120"/>
               </a:rPr>
-              <a:t>Findings written as actions, not comments. Post 3 has no audience data, add the survey screenshot beats more detail. Three teaching days to Monday.</a:t>
-            </a:r>
-            <a:endParaRPr lang="en-US" sz="1250" dirty="0"/>
+              <a:t>RULE   </a:t>
+            </a:r>
+            <a:pPr indent="0" marL="0">
+              <a:lnSpc>
+                <a:spcPts val="1600"/>
+              </a:lnSpc>
+              <a:buNone/>
+            </a:pPr>
+            <a:r>
+              <a:rPr lang="en-US" sz="1250" dirty="0">
+                <a:solidFill>
+                  <a:srgbClr val="7A7F72"/>
+                </a:solidFill>
+                <a:latin typeface="Georgia" pitchFamily="34" charset="0"/>
+                <a:ea typeface="Georgia" pitchFamily="34" charset="-122"/>
+                <a:cs typeface="Georgia" pitchFamily="34" charset="-120"/>
+              </a:rPr>
+              <a:t>Write findings as actions. “Add the survey screenshot to post 3” beats “more detail please.”</a:t>
+            </a:r>
+            <a:endParaRPr lang="en-US" sz="1050" dirty="0"/>
+          </a:p>
+          <a:p>
+            <a:pPr indent="0" marL="0">
+              <a:lnSpc>
+                <a:spcPts val="1600"/>
+              </a:lnSpc>
+              <a:buNone/>
+            </a:pPr>
+            <a:r>
+              <a:rPr lang="en-US" sz="1050" b="1" spc="100" kern="0" dirty="0">
+                <a:solidFill>
+                  <a:srgbClr val="7A7F72"/>
+                </a:solidFill>
+                <a:latin typeface="Arial" pitchFamily="34" charset="0"/>
+                <a:ea typeface="Arial" pitchFamily="34" charset="-122"/>
+                <a:cs typeface="Arial" pitchFamily="34" charset="-120"/>
+              </a:rPr>
+              <a:t>THE CLOCK   </a:t>
+            </a:r>
+            <a:pPr indent="0" marL="0">
+              <a:lnSpc>
+                <a:spcPts val="1600"/>
+              </a:lnSpc>
+              <a:buNone/>
+            </a:pPr>
+            <a:r>
+              <a:rPr lang="en-US" sz="1250" dirty="0">
+                <a:solidFill>
+                  <a:srgbClr val="7A7F72"/>
+                </a:solidFill>
+                <a:latin typeface="Georgia" pitchFamily="34" charset="0"/>
+                <a:ea typeface="Georgia" pitchFamily="34" charset="-122"/>
+                <a:cs typeface="Georgia" pitchFamily="34" charset="-120"/>
+              </a:rPr>
+              <a:t>Three teaching days to Monday.</a:t>
+            </a:r>
+            <a:endParaRPr lang="en-US" sz="1050" dirty="0"/>
           </a:p>
         </p:txBody>
       </p:sp>
@@ -3794,7 +3905,7 @@
         <p:spPr>
           <a:xfrm>
             <a:off x="822960" y="2743200"/>
-            <a:ext cx="9875520" cy="1920240"/>
+            <a:ext cx="9875520" cy="2011680"/>
           </a:xfrm>
           <a:prstGeom prst="rect">
             <a:avLst/>
@@ -3813,7 +3924,24 @@
               <a:buNone/>
             </a:pPr>
             <a:r>
-              <a:rPr lang="en-US" sz="2000" dirty="0">
+              <a:rPr lang="en-US" sz="1700" b="1" spc="100" kern="0" dirty="0">
+                <a:solidFill>
+                  <a:srgbClr val="4A6B5D"/>
+                </a:solidFill>
+                <a:latin typeface="Arial" pitchFamily="34" charset="0"/>
+                <a:ea typeface="Arial" pitchFamily="34" charset="-122"/>
+                <a:cs typeface="Arial" pitchFamily="34" charset="-120"/>
+              </a:rPr>
+              <a:t>CS9   </a:t>
+            </a:r>
+            <a:pPr indent="0" marL="0">
+              <a:lnSpc>
+                <a:spcPts val="2800"/>
+              </a:lnSpc>
+              <a:buNone/>
+            </a:pPr>
+            <a:r>
+              <a:rPr lang="en-US" sz="1900" dirty="0">
                 <a:solidFill>
                   <a:srgbClr val="24313F"/>
                 </a:solidFill>
@@ -3821,9 +3949,83 @@
                 <a:ea typeface="Georgia" pitchFamily="34" charset="-122"/>
                 <a:cs typeface="Georgia" pitchFamily="34" charset="-120"/>
               </a:rPr>
-              <a:t>CS9 is a peer blog audit against the mid-point checklist, the same instrument A2 is marked with. It is placed with working days to spare on purpose, so the deadline surprises nobody. A2 is submitted work, not a sitting: it is due the Monday after this lesson ends.</a:t>
-            </a:r>
-            <a:endParaRPr lang="en-US" sz="2000" dirty="0"/>
+              <a:t>A peer blog audit, using the same checklist A2 is marked with.</a:t>
+            </a:r>
+            <a:endParaRPr lang="en-US" sz="1700" dirty="0"/>
+          </a:p>
+          <a:p>
+            <a:pPr indent="0" marL="0">
+              <a:lnSpc>
+                <a:spcPts val="2800"/>
+              </a:lnSpc>
+              <a:buNone/>
+            </a:pPr>
+            <a:r>
+              <a:rPr lang="en-US" sz="1700" b="1" spc="100" kern="0" dirty="0">
+                <a:solidFill>
+                  <a:srgbClr val="4A6B5D"/>
+                </a:solidFill>
+                <a:latin typeface="Arial" pitchFamily="34" charset="0"/>
+                <a:ea typeface="Arial" pitchFamily="34" charset="-122"/>
+                <a:cs typeface="Arial" pitchFamily="34" charset="-120"/>
+              </a:rPr>
+              <a:t>WHY NOW   </a:t>
+            </a:r>
+            <a:pPr indent="0" marL="0">
+              <a:lnSpc>
+                <a:spcPts val="2800"/>
+              </a:lnSpc>
+              <a:buNone/>
+            </a:pPr>
+            <a:r>
+              <a:rPr lang="en-US" sz="1900" dirty="0">
+                <a:solidFill>
+                  <a:srgbClr val="24313F"/>
+                </a:solidFill>
+                <a:latin typeface="Georgia" pitchFamily="34" charset="0"/>
+                <a:ea typeface="Georgia" pitchFamily="34" charset="-122"/>
+                <a:cs typeface="Georgia" pitchFamily="34" charset="-120"/>
+              </a:rPr>
+              <a:t>Days to spare, on purpose. The deadline should surprise nobody.</a:t>
+            </a:r>
+            <a:endParaRPr lang="en-US" sz="1700" dirty="0"/>
+          </a:p>
+          <a:p>
+            <a:pPr indent="0" marL="0">
+              <a:lnSpc>
+                <a:spcPts val="2800"/>
+              </a:lnSpc>
+              <a:buNone/>
+            </a:pPr>
+            <a:r>
+              <a:rPr lang="en-US" sz="1700" b="1" spc="100" kern="0" dirty="0">
+                <a:solidFill>
+                  <a:srgbClr val="4A6B5D"/>
+                </a:solidFill>
+                <a:latin typeface="Arial" pitchFamily="34" charset="0"/>
+                <a:ea typeface="Arial" pitchFamily="34" charset="-122"/>
+                <a:cs typeface="Arial" pitchFamily="34" charset="-120"/>
+              </a:rPr>
+              <a:t>A2   </a:t>
+            </a:r>
+            <a:pPr indent="0" marL="0">
+              <a:lnSpc>
+                <a:spcPts val="2800"/>
+              </a:lnSpc>
+              <a:buNone/>
+            </a:pPr>
+            <a:r>
+              <a:rPr lang="en-US" sz="1900" dirty="0">
+                <a:solidFill>
+                  <a:srgbClr val="24313F"/>
+                </a:solidFill>
+                <a:latin typeface="Georgia" pitchFamily="34" charset="0"/>
+                <a:ea typeface="Georgia" pitchFamily="34" charset="-122"/>
+                <a:cs typeface="Georgia" pitchFamily="34" charset="-120"/>
+              </a:rPr>
+              <a:t>Submitted work, not an exam sitting. Due the Monday after this lesson.</a:t>
+            </a:r>
+            <a:endParaRPr lang="en-US" sz="1700" dirty="0"/>
           </a:p>
         </p:txBody>
       </p:sp>
@@ -4185,12 +4387,29 @@
           <a:p>
             <a:pPr indent="0" marL="0">
               <a:lnSpc>
-                <a:spcPts val="2200"/>
+                <a:spcPts val="2100"/>
               </a:lnSpc>
               <a:buNone/>
             </a:pPr>
             <a:r>
-              <a:rPr lang="en-US" sz="1550" dirty="0">
+              <a:rPr lang="en-US" sz="1300" b="1" spc="100" kern="0" dirty="0">
+                <a:solidFill>
+                  <a:srgbClr val="4A6B5D"/>
+                </a:solidFill>
+                <a:latin typeface="Arial" pitchFamily="34" charset="0"/>
+                <a:ea typeface="Arial" pitchFamily="34" charset="-122"/>
+                <a:cs typeface="Arial" pitchFamily="34" charset="-120"/>
+              </a:rPr>
+              <a:t>KEY POINT   </a:t>
+            </a:r>
+            <a:pPr indent="0" marL="0">
+              <a:lnSpc>
+                <a:spcPts val="2100"/>
+              </a:lnSpc>
+              <a:buNone/>
+            </a:pPr>
+            <a:r>
+              <a:rPr lang="en-US" sz="1500" dirty="0">
                 <a:solidFill>
                   <a:srgbClr val="24313F"/>
                 </a:solidFill>
@@ -4198,9 +4417,66 @@
                 <a:ea typeface="Georgia" pitchFamily="34" charset="-122"/>
                 <a:cs typeface="Georgia" pitchFamily="34" charset="-120"/>
               </a:rPr>
-              <a:t>The second half is where the marks are. The strain log feeds Y: the false hero who is also the donor, the trailer that hides its villain on purpose, the film told out of order. Coursebook 3.2 closes on Dil Chahta Hai for exactly this reason: the arc is there, and the culture it runs in is not Hollywood's.</a:t>
-            </a:r>
-            <a:endParaRPr lang="en-US" sz="1550" dirty="0"/>
+              <a:t>The second half of the sentence earns the marks.</a:t>
+            </a:r>
+            <a:endParaRPr lang="en-US" sz="1300" dirty="0"/>
+          </a:p>
+          <a:p>
+            <a:pPr indent="0" marL="0">
+              <a:lnSpc>
+                <a:spcPts val="2100"/>
+              </a:lnSpc>
+              <a:buNone/>
+            </a:pPr>
+            <a:r>
+              <a:rPr lang="en-US" sz="1300" b="1" spc="100" kern="0" dirty="0">
+                <a:solidFill>
+                  <a:srgbClr val="4A6B5D"/>
+                </a:solidFill>
+                <a:latin typeface="Arial" pitchFamily="34" charset="0"/>
+                <a:ea typeface="Arial" pitchFamily="34" charset="-122"/>
+                <a:cs typeface="Arial" pitchFamily="34" charset="-120"/>
+              </a:rPr>
+              <a:t>FIND Y   </a:t>
+            </a:r>
+            <a:pPr indent="0" marL="0">
+              <a:lnSpc>
+                <a:spcPts val="2100"/>
+              </a:lnSpc>
+              <a:buNone/>
+            </a:pPr>
+            <a:r>
+              <a:rPr lang="en-US" sz="1500" dirty="0">
+                <a:solidFill>
+                  <a:srgbClr val="24313F"/>
+                </a:solidFill>
+                <a:latin typeface="Georgia" pitchFamily="34" charset="0"/>
+                <a:ea typeface="Georgia" pitchFamily="34" charset="-122"/>
+                <a:cs typeface="Georgia" pitchFamily="34" charset="-120"/>
+              </a:rPr>
+              <a:t>Use your strain log: a false hero who is also the donor, a hidden villain, a story told out of order.</a:t>
+            </a:r>
+            <a:endParaRPr lang="en-US" sz="1300" dirty="0"/>
+          </a:p>
+          <a:p>
+            <a:pPr indent="0" marL="0">
+              <a:lnSpc>
+                <a:spcPts val="2100"/>
+              </a:lnSpc>
+              <a:buNone/>
+            </a:pPr>
+            <a:r>
+              <a:rPr lang="en-US" sz="1500" dirty="0">
+                <a:solidFill>
+                  <a:srgbClr val="24313F"/>
+                </a:solidFill>
+                <a:latin typeface="Georgia" pitchFamily="34" charset="0"/>
+                <a:ea typeface="Georgia" pitchFamily="34" charset="-122"/>
+                <a:cs typeface="Georgia" pitchFamily="34" charset="-120"/>
+              </a:rPr>
+              <a:t>Coursebook 3.2 ends on Dil Chahta Hai: the arc fits, and the culture is not Hollywood's.</a:t>
+            </a:r>
+            <a:endParaRPr lang="en-US" sz="1300" dirty="0"/>
           </a:p>
         </p:txBody>
       </p:sp>
@@ -4289,7 +4565,7 @@
                 <a:ea typeface="Arial" pitchFamily="34" charset="-122"/>
                 <a:cs typeface="Arial" pitchFamily="34" charset="-120"/>
               </a:rPr>
-              <a:t>Knives Out (2019): Propp on a trailer. A withheld villain is a marketing decision.</a:t>
+              <a:t>Knives Out (2019): Propp on a trailer. A hidden villain is a marketing decision.</a:t>
             </a:r>
             <a:endParaRPr lang="en-US" sz="1000" dirty="0"/>
           </a:p>
@@ -4864,7 +5140,7 @@
                 <a:ea typeface="Georgia" pitchFamily="34" charset="-122"/>
                 <a:cs typeface="Georgia" pitchFamily="34" charset="-120"/>
               </a:rPr>
-              <a:t>With their failure</a:t>
+              <a:t>Taught with the cases</a:t>
             </a:r>
             <a:endParaRPr lang="en-US" sz="4400" dirty="0"/>
           </a:p>
@@ -4884,7 +5160,7 @@
                 <a:ea typeface="Georgia" pitchFamily="34" charset="-122"/>
                 <a:cs typeface="Georgia" pitchFamily="34" charset="-120"/>
               </a:rPr>
-              <a:t>conditions attached.</a:t>
+              <a:t>where they fail.</a:t>
             </a:r>
             <a:endParaRPr lang="en-US" sz="4400" dirty="0"/>
           </a:p>
@@ -5996,23 +6272,26 @@
         <p:spPr>
           <a:xfrm>
             <a:off x="822960" y="5413248"/>
-            <a:ext cx="10543032" cy="411480"/>
-          </a:xfrm>
-          <a:prstGeom prst="rect">
-            <a:avLst/>
-          </a:prstGeom>
-          <a:noFill/>
-          <a:ln/>
-        </p:spPr>
-        <p:txBody>
-          <a:bodyPr wrap="square" lIns="0" tIns="0" rIns="0" bIns="0" rtlCol="0" anchor="ctr"/>
-          <a:lstStyle/>
-          <a:p>
-            <a:pPr indent="0" marL="0">
-              <a:buNone/>
-            </a:pPr>
-            <a:r>
-              <a:rPr lang="en-US" sz="1250" i="1" dirty="0">
+            <a:ext cx="10543032" cy="320040"/>
+          </a:xfrm>
+          <a:prstGeom prst="rect">
+            <a:avLst/>
+          </a:prstGeom>
+          <a:noFill/>
+          <a:ln/>
+        </p:spPr>
+        <p:txBody>
+          <a:bodyPr wrap="square" lIns="0" tIns="0" rIns="0" bIns="0" rtlCol="0" anchor="t"/>
+          <a:lstStyle/>
+          <a:p>
+            <a:pPr indent="0" marL="0">
+              <a:lnSpc>
+                <a:spcPts val="1700"/>
+              </a:lnSpc>
+              <a:buNone/>
+            </a:pPr>
+            <a:r>
+              <a:rPr lang="en-US" sz="1050" b="1" spc="100" kern="0" dirty="0">
                 <a:solidFill>
                   <a:srgbClr val="7A7F72"/>
                 </a:solidFill>
@@ -6020,9 +6299,26 @@
                 <a:ea typeface="Arial" pitchFamily="34" charset="-122"/>
                 <a:cs typeface="Arial" pitchFamily="34" charset="-120"/>
               </a:rPr>
-              <a:t>The caveat that earns marks: the model fails on non-linear narratives, and saying so is the top-band move.</a:t>
-            </a:r>
-            <a:endParaRPr lang="en-US" sz="1250" dirty="0"/>
+              <a:t>EXAM MOVE   </a:t>
+            </a:r>
+            <a:pPr indent="0" marL="0">
+              <a:lnSpc>
+                <a:spcPts val="1700"/>
+              </a:lnSpc>
+              <a:buNone/>
+            </a:pPr>
+            <a:r>
+              <a:rPr lang="en-US" sz="1250" dirty="0">
+                <a:solidFill>
+                  <a:srgbClr val="7A7F72"/>
+                </a:solidFill>
+                <a:latin typeface="Georgia" pitchFamily="34" charset="0"/>
+                <a:ea typeface="Georgia" pitchFamily="34" charset="-122"/>
+                <a:cs typeface="Georgia" pitchFamily="34" charset="-120"/>
+              </a:rPr>
+              <a:t>The model fails on non-linear stories. Saying where it fails is the top-band move.</a:t>
+            </a:r>
+            <a:endParaRPr lang="en-US" sz="1050" dirty="0"/>
           </a:p>
         </p:txBody>
       </p:sp>
@@ -6302,6 +6598,65 @@
           </a:p>
         </p:txBody>
       </p:sp>
+      <p:sp>
+        <p:nvSpPr>
+          <p:cNvPr id="6" name="Text 4"/>
+          <p:cNvSpPr/>
+          <p:nvPr/>
+        </p:nvSpPr>
+        <p:spPr>
+          <a:xfrm>
+            <a:off x="822960" y="5806440"/>
+            <a:ext cx="10424160" cy="640080"/>
+          </a:xfrm>
+          <a:prstGeom prst="rect">
+            <a:avLst/>
+          </a:prstGeom>
+          <a:noFill/>
+          <a:ln/>
+        </p:spPr>
+        <p:txBody>
+          <a:bodyPr wrap="square" lIns="0" tIns="0" rIns="0" bIns="0" rtlCol="0" anchor="t"/>
+          <a:lstStyle/>
+          <a:p>
+            <a:pPr indent="0" marL="0">
+              <a:lnSpc>
+                <a:spcPts val="1900"/>
+              </a:lnSpc>
+              <a:buNone/>
+            </a:pPr>
+            <a:r>
+              <a:rPr lang="en-US" sz="1200" b="1" spc="100" kern="0" dirty="0">
+                <a:solidFill>
+                  <a:srgbClr val="7A7F72"/>
+                </a:solidFill>
+                <a:latin typeface="Arial" pitchFamily="34" charset="0"/>
+                <a:ea typeface="Arial" pitchFamily="34" charset="-122"/>
+                <a:cs typeface="Arial" pitchFamily="34" charset="-120"/>
+              </a:rPr>
+              <a:t>IN PLAIN WORDS   </a:t>
+            </a:r>
+            <a:pPr indent="0" marL="0">
+              <a:lnSpc>
+                <a:spcPts val="1900"/>
+              </a:lnSpc>
+              <a:buNone/>
+            </a:pPr>
+            <a:r>
+              <a:rPr lang="en-US" sz="1400" i="1" dirty="0">
+                <a:solidFill>
+                  <a:srgbClr val="4A6B5D"/>
+                </a:solidFill>
+                <a:latin typeface="Georgia" pitchFamily="34" charset="0"/>
+                <a:ea typeface="Georgia" pitchFamily="34" charset="-122"/>
+                <a:cs typeface="Georgia" pitchFamily="34" charset="-120"/>
+              </a:rPr>
+              <a:t>A complete story moves from one stable state, through disruption, to a new stable state.</a:t>
+            </a:r>
+            <a:endParaRPr lang="en-US" sz="1200" dirty="0"/>
+          </a:p>
+        </p:txBody>
+      </p:sp>
     </p:spTree>
   </p:cSld>
   <p:clrMapOvr>
@@ -7289,7 +7644,7 @@
                 <a:ea typeface="Arial" pitchFamily="34" charset="-122"/>
                 <a:cs typeface="Arial" pitchFamily="34" charset="-120"/>
               </a:rPr>
-              <a:t>Map this cast. Woody: hero, or the villain of act one? Buzz: prize, rival, helper? Where Propp refuses to sit still is the strain log's first entry.</a:t>
+              <a:t>Map this cast. Is Woody the hero, or act one's villain? Is Buzz a prize, a rival, a helper? Where Propp does not fit is your strain log's first entry.</a:t>
             </a:r>
             <a:endParaRPr lang="en-US" sz="1100" dirty="0"/>
           </a:p>
@@ -7331,7 +7686,7 @@
                 <a:ea typeface="Arial" pitchFamily="34" charset="-122"/>
                 <a:cs typeface="Arial" pitchFamily="34" charset="-120"/>
               </a:rPr>
-              <a:t>The caveat: folk tales, 1928; apply with judgment. Dealt as Sort Wars cards: rebuild a scrambled tale, then ask your own opening: who is your donor, and do you even have one?</a:t>
+              <a:t>Propp studied folk tales in 1928, so apply him with care. Sort Wars: rebuild a scrambled tale from the cards. Then ask your own opening: who is your donor? Do you have one?</a:t>
             </a:r>
             <a:endParaRPr lang="en-US" sz="1150" dirty="0"/>
           </a:p>
@@ -7659,12 +8014,29 @@
           <a:p>
             <a:pPr indent="0" marL="0">
               <a:lnSpc>
-                <a:spcPts val="2600"/>
+                <a:spcPts val="2300"/>
               </a:lnSpc>
               <a:buNone/>
             </a:pPr>
             <a:r>
-              <a:rPr lang="en-US" sz="1800" dirty="0">
+              <a:rPr lang="en-US" sz="1400" b="1" spc="100" kern="0" dirty="0">
+                <a:solidFill>
+                  <a:srgbClr val="4A6B5D"/>
+                </a:solidFill>
+                <a:latin typeface="Arial" pitchFamily="34" charset="0"/>
+                <a:ea typeface="Arial" pitchFamily="34" charset="-122"/>
+                <a:cs typeface="Arial" pitchFamily="34" charset="-120"/>
+              </a:rPr>
+              <a:t>THE FRAME   </a:t>
+            </a:r>
+            <a:pPr indent="0" marL="0">
+              <a:lnSpc>
+                <a:spcPts val="2300"/>
+              </a:lnSpc>
+              <a:buNone/>
+            </a:pPr>
+            <a:r>
+              <a:rPr lang="en-US" sz="1600" dirty="0">
                 <a:solidFill>
                   <a:srgbClr val="24313F"/>
                 </a:solidFill>
@@ -7672,9 +8044,83 @@
                 <a:ea typeface="Georgia" pitchFamily="34" charset="-122"/>
                 <a:cs typeface="Georgia" pitchFamily="34" charset="-120"/>
               </a:rPr>
-              <a:t>White hair, tinted glasses, a borrowed name: the man at the gala is the series' hero in disguise, and every viewer at home is asking the same two questions. Will he be recognised? What is he here to take? The show plants questions and pays them off on a schedule, and that lean toward the answer is Barthes's enigma code working. Every opening is engineered to owe you answers, and your D1 table maps exactly what this frame owes.</a:t>
-            </a:r>
-            <a:endParaRPr lang="en-US" sz="1800" dirty="0"/>
+              <a:t>White hair, tinted glasses, a borrowed name: the hero in disguise. Two questions pull you in. Will he be recognized? What is he here to take?</a:t>
+            </a:r>
+            <a:endParaRPr lang="en-US" sz="1400" dirty="0"/>
+          </a:p>
+          <a:p>
+            <a:pPr indent="0" marL="0">
+              <a:lnSpc>
+                <a:spcPts val="2300"/>
+              </a:lnSpc>
+              <a:buNone/>
+            </a:pPr>
+            <a:r>
+              <a:rPr lang="en-US" sz="1400" b="1" spc="100" kern="0" dirty="0">
+                <a:solidFill>
+                  <a:srgbClr val="4A6B5D"/>
+                </a:solidFill>
+                <a:latin typeface="Arial" pitchFamily="34" charset="0"/>
+                <a:ea typeface="Arial" pitchFamily="34" charset="-122"/>
+                <a:cs typeface="Arial" pitchFamily="34" charset="-120"/>
+              </a:rPr>
+              <a:t>TERM   </a:t>
+            </a:r>
+            <a:pPr indent="0" marL="0">
+              <a:lnSpc>
+                <a:spcPts val="2300"/>
+              </a:lnSpc>
+              <a:buNone/>
+            </a:pPr>
+            <a:r>
+              <a:rPr lang="en-US" sz="1600" dirty="0">
+                <a:solidFill>
+                  <a:srgbClr val="24313F"/>
+                </a:solidFill>
+                <a:latin typeface="Georgia" pitchFamily="34" charset="0"/>
+                <a:ea typeface="Georgia" pitchFamily="34" charset="-122"/>
+                <a:cs typeface="Georgia" pitchFamily="34" charset="-120"/>
+              </a:rPr>
+              <a:t>The enigma code (Barthes): a question the text plants and delays answering.</a:t>
+            </a:r>
+            <a:endParaRPr lang="en-US" sz="1400" dirty="0"/>
+          </a:p>
+          <a:p>
+            <a:pPr indent="0" marL="0">
+              <a:lnSpc>
+                <a:spcPts val="2300"/>
+              </a:lnSpc>
+              <a:buNone/>
+            </a:pPr>
+            <a:r>
+              <a:rPr lang="en-US" sz="1400" b="1" spc="100" kern="0" dirty="0">
+                <a:solidFill>
+                  <a:srgbClr val="4A6B5D"/>
+                </a:solidFill>
+                <a:latin typeface="Arial" pitchFamily="34" charset="0"/>
+                <a:ea typeface="Arial" pitchFamily="34" charset="-122"/>
+                <a:cs typeface="Arial" pitchFamily="34" charset="-120"/>
+              </a:rPr>
+              <a:t>TASK   </a:t>
+            </a:r>
+            <a:pPr indent="0" marL="0">
+              <a:lnSpc>
+                <a:spcPts val="2300"/>
+              </a:lnSpc>
+              <a:buNone/>
+            </a:pPr>
+            <a:r>
+              <a:rPr lang="en-US" sz="1600" dirty="0">
+                <a:solidFill>
+                  <a:srgbClr val="24313F"/>
+                </a:solidFill>
+                <a:latin typeface="Georgia" pitchFamily="34" charset="0"/>
+                <a:ea typeface="Georgia" pitchFamily="34" charset="-122"/>
+                <a:cs typeface="Georgia" pitchFamily="34" charset="-120"/>
+              </a:rPr>
+              <a:t>Your D1 table maps every question and promise this opening owes you.</a:t>
+            </a:r>
+            <a:endParaRPr lang="en-US" sz="1400" dirty="0"/>
           </a:p>
         </p:txBody>
       </p:sp>
@@ -8425,6 +8871,65 @@
           </a:p>
         </p:txBody>
       </p:sp>
+      <p:sp>
+        <p:nvSpPr>
+          <p:cNvPr id="6" name="Text 4"/>
+          <p:cNvSpPr/>
+          <p:nvPr/>
+        </p:nvSpPr>
+        <p:spPr>
+          <a:xfrm>
+            <a:off x="822960" y="5806440"/>
+            <a:ext cx="10424160" cy="640080"/>
+          </a:xfrm>
+          <a:prstGeom prst="rect">
+            <a:avLst/>
+          </a:prstGeom>
+          <a:noFill/>
+          <a:ln/>
+        </p:spPr>
+        <p:txBody>
+          <a:bodyPr wrap="square" lIns="0" tIns="0" rIns="0" bIns="0" rtlCol="0" anchor="t"/>
+          <a:lstStyle/>
+          <a:p>
+            <a:pPr indent="0" marL="0">
+              <a:lnSpc>
+                <a:spcPts val="1900"/>
+              </a:lnSpc>
+              <a:buNone/>
+            </a:pPr>
+            <a:r>
+              <a:rPr lang="en-US" sz="1200" b="1" spc="100" kern="0" dirty="0">
+                <a:solidFill>
+                  <a:srgbClr val="7A7F72"/>
+                </a:solidFill>
+                <a:latin typeface="Arial" pitchFamily="34" charset="0"/>
+                <a:ea typeface="Arial" pitchFamily="34" charset="-122"/>
+                <a:cs typeface="Arial" pitchFamily="34" charset="-120"/>
+              </a:rPr>
+              <a:t>IN PLAIN WORDS   </a:t>
+            </a:r>
+            <a:pPr indent="0" marL="0">
+              <a:lnSpc>
+                <a:spcPts val="1900"/>
+              </a:lnSpc>
+              <a:buNone/>
+            </a:pPr>
+            <a:r>
+              <a:rPr lang="en-US" sz="1400" i="1" dirty="0">
+                <a:solidFill>
+                  <a:srgbClr val="4A6B5D"/>
+                </a:solidFill>
+                <a:latin typeface="Georgia" pitchFamily="34" charset="0"/>
+                <a:ea typeface="Georgia" pitchFamily="34" charset="-122"/>
+                <a:cs typeface="Georgia" pitchFamily="34" charset="-120"/>
+              </a:rPr>
+              <a:t>A story can hint at a mystery, state it, delay it, and finally reveal the answer.</a:t>
+            </a:r>
+            <a:endParaRPr lang="en-US" sz="1200" dirty="0"/>
+          </a:p>
+        </p:txBody>
+      </p:sp>
     </p:spTree>
   </p:cSld>
   <p:clrMapOvr>
@@ -8640,7 +9145,7 @@
                 <a:ea typeface="Arial" pitchFamily="34" charset="-122"/>
                 <a:cs typeface="Arial" pitchFamily="34" charset="-120"/>
               </a:rPr>
-              <a:t>Lupin S1 E1 (Netflix, 2021): Assane at the vitrine</a:t>
+              <a:t>Lupin S1 E1 (Netflix, 2021): Assane at the glass display case</a:t>
             </a:r>
             <a:endParaRPr lang="en-US" sz="1000" dirty="0"/>
           </a:p>
@@ -9202,22 +9707,76 @@
           <a:p>
             <a:pPr indent="0" marL="0">
               <a:lnSpc>
-                <a:spcPts val="1600"/>
+                <a:spcPts val="1500"/>
               </a:lnSpc>
               <a:buNone/>
             </a:pPr>
             <a:r>
-              <a:rPr lang="en-US" sz="1200" i="1" dirty="0">
-                <a:solidFill>
-                  <a:srgbClr val="7A7F72"/>
+              <a:rPr lang="en-US" sz="950" b="1" spc="100" kern="0" dirty="0">
+                <a:solidFill>
+                  <a:srgbClr val="4A6B5D"/>
                 </a:solidFill>
                 <a:latin typeface="Arial" pitchFamily="34" charset="0"/>
                 <a:ea typeface="Arial" pitchFamily="34" charset="-122"/>
                 <a:cs typeface="Arial" pitchFamily="34" charset="-120"/>
               </a:rPr>
-              <a:t>The test of a real pair: scenes, costumes and settings line up on the two sides. Name your own opening's pair before Friday.</a:t>
-            </a:r>
-            <a:endParaRPr lang="en-US" sz="1200" dirty="0"/>
+              <a:t>TEST   </a:t>
+            </a:r>
+            <a:pPr indent="0" marL="0">
+              <a:lnSpc>
+                <a:spcPts val="1500"/>
+              </a:lnSpc>
+              <a:buNone/>
+            </a:pPr>
+            <a:r>
+              <a:rPr lang="en-US" sz="1150" dirty="0">
+                <a:solidFill>
+                  <a:srgbClr val="7A7F72"/>
+                </a:solidFill>
+                <a:latin typeface="Georgia" pitchFamily="34" charset="0"/>
+                <a:ea typeface="Georgia" pitchFamily="34" charset="-122"/>
+                <a:cs typeface="Georgia" pitchFamily="34" charset="-120"/>
+              </a:rPr>
+              <a:t>A real pair organizes the text: scenes, costumes, and settings line up on the two sides.</a:t>
+            </a:r>
+            <a:endParaRPr lang="en-US" sz="950" dirty="0"/>
+          </a:p>
+          <a:p>
+            <a:pPr indent="0" marL="0">
+              <a:lnSpc>
+                <a:spcPts val="1500"/>
+              </a:lnSpc>
+              <a:buNone/>
+            </a:pPr>
+            <a:r>
+              <a:rPr lang="en-US" sz="950" b="1" spc="100" kern="0" dirty="0">
+                <a:solidFill>
+                  <a:srgbClr val="4A6B5D"/>
+                </a:solidFill>
+                <a:latin typeface="Arial" pitchFamily="34" charset="0"/>
+                <a:ea typeface="Arial" pitchFamily="34" charset="-122"/>
+                <a:cs typeface="Arial" pitchFamily="34" charset="-120"/>
+              </a:rPr>
+              <a:t>TASK   </a:t>
+            </a:r>
+            <a:pPr indent="0" marL="0">
+              <a:lnSpc>
+                <a:spcPts val="1500"/>
+              </a:lnSpc>
+              <a:buNone/>
+            </a:pPr>
+            <a:r>
+              <a:rPr lang="en-US" sz="1150" dirty="0">
+                <a:solidFill>
+                  <a:srgbClr val="7A7F72"/>
+                </a:solidFill>
+                <a:latin typeface="Georgia" pitchFamily="34" charset="0"/>
+                <a:ea typeface="Georgia" pitchFamily="34" charset="-122"/>
+                <a:cs typeface="Georgia" pitchFamily="34" charset="-120"/>
+              </a:rPr>
+              <a:t>Name your own opening's pair before Friday.</a:t>
+            </a:r>
+            <a:endParaRPr lang="en-US" sz="950" dirty="0"/>
           </a:p>
         </p:txBody>
       </p:sp>

--- a/content/decks/media-studies/media-studies-s1-lesson-10-narrative-barthes-and-the-blog-audit.pptx
+++ b/content/decks/media-studies/media-studies-s1-lesson-10-narrative-barthes-and-the-blog-audit.pptx
@@ -2267,7 +2267,7 @@
                 <a:ea typeface="Arial" pitchFamily="34" charset="-122"/>
                 <a:cs typeface="Arial" pitchFamily="34" charset="-120"/>
               </a:rPr>
-              <a:t>Three days  ·  Tuesday 20 to Friday 23 October  ·  A2 falls the following Monday</a:t>
+              <a:t>Three days  ·  Wednesday 21 to Friday 23 October  ·  A2 falls the following Monday</a:t>
             </a:r>
             <a:endParaRPr lang="en-US" sz="1300" dirty="0"/>
           </a:p>
